--- a/assets/结构图/连续区间重点分布-001/example.pptx
+++ b/assets/结构图/连续区间重点分布-001/example.pptx
@@ -2,18 +2,18 @@
 <file path=ppt/presentation.xml><?xml version="1.0" encoding="utf-8"?>
 <p:presentation xmlns:p="http://schemas.openxmlformats.org/presentationml/2006/main">
   <p:sldMasterIdLst>
-    <p:sldMasterId xmlns:r="http://schemas.openxmlformats.org/officeDocument/2006/relationships" id="2147483648" r:id="Rb026c0ec311a42bd"/>
+    <p:sldMasterId xmlns:r="http://schemas.openxmlformats.org/officeDocument/2006/relationships" id="2147483648" r:id="Ra2e8dac1dcf64071"/>
   </p:sldMasterIdLst>
   <p:notesMasterIdLst>
-    <p:notesMasterId xmlns:r="http://schemas.openxmlformats.org/officeDocument/2006/relationships" r:id="Ra5aac03930674946"/>
+    <p:notesMasterId xmlns:r="http://schemas.openxmlformats.org/officeDocument/2006/relationships" r:id="R3ad6920b902c4ed7"/>
   </p:notesMasterIdLst>
   <p:sldIdLst>
-    <p:sldId xmlns:r="http://schemas.openxmlformats.org/officeDocument/2006/relationships" id="256" r:id="Re2732f6c52b74156"/>
-    <p:sldId xmlns:r="http://schemas.openxmlformats.org/officeDocument/2006/relationships" id="257" r:id="R0c7731d2a8be4fe8"/>
-    <p:sldId xmlns:r="http://schemas.openxmlformats.org/officeDocument/2006/relationships" id="258" r:id="R3f202ca416f04487"/>
-    <p:sldId xmlns:r="http://schemas.openxmlformats.org/officeDocument/2006/relationships" id="259" r:id="R15b358363dec420d"/>
-    <p:sldId xmlns:r="http://schemas.openxmlformats.org/officeDocument/2006/relationships" id="260" r:id="R69202e00f4534b05"/>
-    <p:sldId xmlns:r="http://schemas.openxmlformats.org/officeDocument/2006/relationships" id="261" r:id="R40ed803bf95c4213"/>
+    <p:sldId xmlns:r="http://schemas.openxmlformats.org/officeDocument/2006/relationships" id="256" r:id="R10ea7418eb504d84"/>
+    <p:sldId xmlns:r="http://schemas.openxmlformats.org/officeDocument/2006/relationships" id="257" r:id="Rc75ffab607fe4d20"/>
+    <p:sldId xmlns:r="http://schemas.openxmlformats.org/officeDocument/2006/relationships" id="258" r:id="Ra280f901eebc493f"/>
+    <p:sldId xmlns:r="http://schemas.openxmlformats.org/officeDocument/2006/relationships" id="259" r:id="Rf795a25eac0140da"/>
+    <p:sldId xmlns:r="http://schemas.openxmlformats.org/officeDocument/2006/relationships" id="260" r:id="R8e27625d2c974a5e"/>
+    <p:sldId xmlns:r="http://schemas.openxmlformats.org/officeDocument/2006/relationships" id="261" r:id="R7393a554c22f4f40"/>
   </p:sldIdLst>
   <p:sldSz cx="12192000" cy="6858000"/>
   <p:notesSz cx="6858000" cy="9144000"/>
@@ -359,132 +359,6 @@
             <a:outerShdw blurRad="266700" dist="95250" dir="5400000">
               <a:srgbClr val="000000">
                 <a:alpha val="24000"/>
-              </a:srgbClr>
-            </a:outerShdw>
-          </a:effectLst>
-        </a:effectStyle>
-        <a:effectStyle>
-          <a:effectLst>
-            <a:outerShdw blurRad="266700" dist="114300" dir="5400000">
-              <a:srgbClr val="2F5EA8">
-                <a:alpha val="22000"/>
-              </a:srgbClr>
-            </a:outerShdw>
-          </a:effectLst>
-        </a:effectStyle>
-        <a:effectStyle>
-          <a:effectLst>
-            <a:outerShdw blurRad="152400" dist="66675" dir="5400000">
-              <a:srgbClr val="2F5EA8">
-                <a:alpha val="9000"/>
-              </a:srgbClr>
-            </a:outerShdw>
-          </a:effectLst>
-        </a:effectStyle>
-        <a:effectStyle>
-          <a:effectLst>
-            <a:outerShdw blurRad="152400" dist="66675" dir="5400000">
-              <a:srgbClr val="2F5EA8">
-                <a:alpha val="10000"/>
-              </a:srgbClr>
-            </a:outerShdw>
-          </a:effectLst>
-        </a:effectStyle>
-        <a:effectStyle>
-          <a:effectLst>
-            <a:outerShdw blurRad="171450" dist="76200" dir="5400000">
-              <a:srgbClr val="2F5EA8">
-                <a:alpha val="16000"/>
-              </a:srgbClr>
-            </a:outerShdw>
-          </a:effectLst>
-        </a:effectStyle>
-        <a:effectStyle>
-          <a:effectLst>
-            <a:outerShdw blurRad="114300" dist="47625" dir="5400000">
-              <a:srgbClr val="2F5EA8">
-                <a:alpha val="7000"/>
-              </a:srgbClr>
-            </a:outerShdw>
-          </a:effectLst>
-        </a:effectStyle>
-        <a:effectStyle>
-          <a:effectLst>
-            <a:outerShdw blurRad="95250" dist="38100" dir="5400000">
-              <a:srgbClr val="2F5EA8">
-                <a:alpha val="8000"/>
-              </a:srgbClr>
-            </a:outerShdw>
-          </a:effectLst>
-        </a:effectStyle>
-        <a:effectStyle>
-          <a:effectLst>
-            <a:outerShdw blurRad="209550" dist="95250" dir="5400000">
-              <a:srgbClr val="2F5EA8">
-                <a:alpha val="8000"/>
-              </a:srgbClr>
-            </a:outerShdw>
-          </a:effectLst>
-        </a:effectStyle>
-        <a:effectStyle>
-          <a:effectLst>
-            <a:outerShdw blurRad="133350" dist="57150" dir="5400000">
-              <a:srgbClr val="2F5EA8">
-                <a:alpha val="18000"/>
-              </a:srgbClr>
-            </a:outerShdw>
-          </a:effectLst>
-        </a:effectStyle>
-        <a:effectStyle>
-          <a:effectLst>
-            <a:outerShdw blurRad="200025" dist="85725" dir="5400000">
-              <a:srgbClr val="2F5EA8">
-                <a:alpha val="14000"/>
-              </a:srgbClr>
-            </a:outerShdw>
-          </a:effectLst>
-        </a:effectStyle>
-        <a:effectStyle>
-          <a:effectLst>
-            <a:outerShdw blurRad="171450" dist="76200" dir="5400000">
-              <a:srgbClr val="264E80">
-                <a:alpha val="10000"/>
-              </a:srgbClr>
-            </a:outerShdw>
-          </a:effectLst>
-        </a:effectStyle>
-        <a:effectStyle>
-          <a:effectLst>
-            <a:outerShdw blurRad="171450" dist="76200" dir="5400000">
-              <a:srgbClr val="1F497E">
-                <a:alpha val="8000"/>
-              </a:srgbClr>
-            </a:outerShdw>
-          </a:effectLst>
-        </a:effectStyle>
-        <a:effectStyle>
-          <a:effectLst>
-            <a:outerShdw blurRad="95250" dist="38100" dir="5400000">
-              <a:srgbClr val="2F5EA8">
-                <a:alpha val="16000"/>
-              </a:srgbClr>
-            </a:outerShdw>
-          </a:effectLst>
-        </a:effectStyle>
-        <a:effectStyle>
-          <a:effectLst>
-            <a:outerShdw blurRad="114300" dist="57150" dir="5400000">
-              <a:srgbClr val="2F5EA8">
-                <a:alpha val="15000"/>
-              </a:srgbClr>
-            </a:outerShdw>
-          </a:effectLst>
-        </a:effectStyle>
-        <a:effectStyle>
-          <a:effectLst>
-            <a:outerShdw blurRad="114300" dist="47625" dir="5400000">
-              <a:srgbClr val="2F5EA8">
-                <a:alpha val="20000"/>
               </a:srgbClr>
             </a:outerShdw>
           </a:effectLst>
@@ -985,7 +859,7 @@
   </p:cSld>
   <p:clrMap bg1="lt1" tx1="dk1" bg2="lt2" tx2="dk2" accent1="accent1" accent2="accent2" accent3="accent3" accent4="accent4" accent5="accent5" accent6="accent6" hlink="hlink" folHlink="folHlink"/>
   <p:sldLayoutIdLst>
-    <p:sldLayoutId xmlns:r="http://schemas.openxmlformats.org/officeDocument/2006/relationships" id="2147483649" r:id="R67f97b6c28c8472d"/>
+    <p:sldLayoutId xmlns:r="http://schemas.openxmlformats.org/officeDocument/2006/relationships" id="2147483649" r:id="R8c9e942a5c604f41"/>
   </p:sldLayoutIdLst>
   <p:txStyles>
     <p:titleStyle>
@@ -1470,132 +1344,6 @@
         </a:effectStyle>
         <a:effectStyle>
           <a:effectLst>
-            <a:outerShdw blurRad="266700" dist="114300" dir="5400000">
-              <a:srgbClr val="2F5EA8">
-                <a:alpha val="22000"/>
-              </a:srgbClr>
-            </a:outerShdw>
-          </a:effectLst>
-        </a:effectStyle>
-        <a:effectStyle>
-          <a:effectLst>
-            <a:outerShdw blurRad="152400" dist="66675" dir="5400000">
-              <a:srgbClr val="2F5EA8">
-                <a:alpha val="9000"/>
-              </a:srgbClr>
-            </a:outerShdw>
-          </a:effectLst>
-        </a:effectStyle>
-        <a:effectStyle>
-          <a:effectLst>
-            <a:outerShdw blurRad="152400" dist="66675" dir="5400000">
-              <a:srgbClr val="2F5EA8">
-                <a:alpha val="10000"/>
-              </a:srgbClr>
-            </a:outerShdw>
-          </a:effectLst>
-        </a:effectStyle>
-        <a:effectStyle>
-          <a:effectLst>
-            <a:outerShdw blurRad="171450" dist="76200" dir="5400000">
-              <a:srgbClr val="2F5EA8">
-                <a:alpha val="16000"/>
-              </a:srgbClr>
-            </a:outerShdw>
-          </a:effectLst>
-        </a:effectStyle>
-        <a:effectStyle>
-          <a:effectLst>
-            <a:outerShdw blurRad="114300" dist="47625" dir="5400000">
-              <a:srgbClr val="2F5EA8">
-                <a:alpha val="7000"/>
-              </a:srgbClr>
-            </a:outerShdw>
-          </a:effectLst>
-        </a:effectStyle>
-        <a:effectStyle>
-          <a:effectLst>
-            <a:outerShdw blurRad="95250" dist="38100" dir="5400000">
-              <a:srgbClr val="2F5EA8">
-                <a:alpha val="8000"/>
-              </a:srgbClr>
-            </a:outerShdw>
-          </a:effectLst>
-        </a:effectStyle>
-        <a:effectStyle>
-          <a:effectLst>
-            <a:outerShdw blurRad="209550" dist="95250" dir="5400000">
-              <a:srgbClr val="2F5EA8">
-                <a:alpha val="8000"/>
-              </a:srgbClr>
-            </a:outerShdw>
-          </a:effectLst>
-        </a:effectStyle>
-        <a:effectStyle>
-          <a:effectLst>
-            <a:outerShdw blurRad="133350" dist="57150" dir="5400000">
-              <a:srgbClr val="2F5EA8">
-                <a:alpha val="18000"/>
-              </a:srgbClr>
-            </a:outerShdw>
-          </a:effectLst>
-        </a:effectStyle>
-        <a:effectStyle>
-          <a:effectLst>
-            <a:outerShdw blurRad="200025" dist="85725" dir="5400000">
-              <a:srgbClr val="2F5EA8">
-                <a:alpha val="14000"/>
-              </a:srgbClr>
-            </a:outerShdw>
-          </a:effectLst>
-        </a:effectStyle>
-        <a:effectStyle>
-          <a:effectLst>
-            <a:outerShdw blurRad="171450" dist="76200" dir="5400000">
-              <a:srgbClr val="264E80">
-                <a:alpha val="10000"/>
-              </a:srgbClr>
-            </a:outerShdw>
-          </a:effectLst>
-        </a:effectStyle>
-        <a:effectStyle>
-          <a:effectLst>
-            <a:outerShdw blurRad="171450" dist="76200" dir="5400000">
-              <a:srgbClr val="1F497E">
-                <a:alpha val="8000"/>
-              </a:srgbClr>
-            </a:outerShdw>
-          </a:effectLst>
-        </a:effectStyle>
-        <a:effectStyle>
-          <a:effectLst>
-            <a:outerShdw blurRad="95250" dist="38100" dir="5400000">
-              <a:srgbClr val="2F5EA8">
-                <a:alpha val="16000"/>
-              </a:srgbClr>
-            </a:outerShdw>
-          </a:effectLst>
-        </a:effectStyle>
-        <a:effectStyle>
-          <a:effectLst>
-            <a:outerShdw blurRad="114300" dist="57150" dir="5400000">
-              <a:srgbClr val="2F5EA8">
-                <a:alpha val="15000"/>
-              </a:srgbClr>
-            </a:outerShdw>
-          </a:effectLst>
-        </a:effectStyle>
-        <a:effectStyle>
-          <a:effectLst>
-            <a:outerShdw blurRad="114300" dist="47625" dir="5400000">
-              <a:srgbClr val="2F5EA8">
-                <a:alpha val="20000"/>
-              </a:srgbClr>
-            </a:outerShdw>
-          </a:effectLst>
-        </a:effectStyle>
-        <a:effectStyle>
-          <a:effectLst>
             <a:outerShdw blurRad="190500" dist="85725" dir="5400000">
               <a:srgbClr val="2F5EA8">
                 <a:alpha val="9000"/>
@@ -1680,7 +1428,7 @@
           <p:cNvPr id="25" name="spectrum-density-fill">
             <a:extLst xmlns:a="http://schemas.openxmlformats.org/drawingml/2006/main">
               <a:ext uri="{FF2B5EF4-FFF2-40B4-BE49-F238E27FC236}">
-                <a16:creationId xmlns:a16="http://schemas.microsoft.com/office/drawing/2014/main" id="{67A97B40-FDE1-450B-B32B-F2D619CDFFF9}"/>
+                <a16:creationId xmlns:a16="http://schemas.microsoft.com/office/drawing/2014/main" id="{C80AA402-0436-4925-9702-3BAD5B880FF4}"/>
               </a:ext>
             </a:extLst>
           </p:cNvPr>
@@ -2438,7 +2186,7 @@
           <p:cNvPr id="2" name="spectrum-density-curve">
             <a:extLst xmlns:a="http://schemas.openxmlformats.org/drawingml/2006/main">
               <a:ext uri="{FF2B5EF4-FFF2-40B4-BE49-F238E27FC236}">
-                <a16:creationId xmlns:a16="http://schemas.microsoft.com/office/drawing/2014/main" id="{3296A627-85B3-41AC-9CB3-D2486168E212}"/>
+                <a16:creationId xmlns:a16="http://schemas.microsoft.com/office/drawing/2014/main" id="{71CDB4DC-14DC-4820-87DF-12C07EEBA4A7}"/>
               </a:ext>
             </a:extLst>
           </p:cNvPr>
@@ -3195,7 +2943,7 @@
           <p:cNvPr id="3" name="spectrum-underlay-0">
             <a:extLst xmlns:a="http://schemas.openxmlformats.org/drawingml/2006/main">
               <a:ext uri="{FF2B5EF4-FFF2-40B4-BE49-F238E27FC236}">
-                <a16:creationId xmlns:a16="http://schemas.microsoft.com/office/drawing/2014/main" id="{C7BDA78A-69A2-4971-AA01-7CA5BE06315A}"/>
+                <a16:creationId xmlns:a16="http://schemas.microsoft.com/office/drawing/2014/main" id="{1C5B182E-81DC-4954-B566-EF12E20C794C}"/>
               </a:ext>
             </a:extLst>
           </p:cNvPr>
@@ -3228,7 +2976,7 @@
           <p:cNvPr id="4" name="spectrum-card-0">
             <a:extLst xmlns:a="http://schemas.openxmlformats.org/drawingml/2006/main">
               <a:ext uri="{FF2B5EF4-FFF2-40B4-BE49-F238E27FC236}">
-                <a16:creationId xmlns:a16="http://schemas.microsoft.com/office/drawing/2014/main" id="{91CAD757-02C3-4B46-9D7E-920AEC0FADAE}"/>
+                <a16:creationId xmlns:a16="http://schemas.microsoft.com/office/drawing/2014/main" id="{9DDA88F1-874B-45EF-B7C7-A3DEDFC04B45}"/>
               </a:ext>
             </a:extLst>
           </p:cNvPr>
@@ -3260,7 +3008,7 @@
         <p:style>
           <a:lnRef xmlns:a="http://schemas.openxmlformats.org/drawingml/2006/main" idx="0"/>
           <a:fillRef xmlns:a="http://schemas.openxmlformats.org/drawingml/2006/main" idx="0"/>
-          <a:effectRef xmlns:a="http://schemas.openxmlformats.org/drawingml/2006/main" idx="24"/>
+          <a:effectRef xmlns:a="http://schemas.openxmlformats.org/drawingml/2006/main" idx="10"/>
           <a:fontRef xmlns:a="http://schemas.openxmlformats.org/drawingml/2006/main" idx="major"/>
         </p:style>
       </p:sp>
@@ -3269,7 +3017,7 @@
           <p:cNvPr id="5" name="spectrum-underlay-1">
             <a:extLst xmlns:a="http://schemas.openxmlformats.org/drawingml/2006/main">
               <a:ext uri="{FF2B5EF4-FFF2-40B4-BE49-F238E27FC236}">
-                <a16:creationId xmlns:a16="http://schemas.microsoft.com/office/drawing/2014/main" id="{FA650CDB-9DBE-4D81-81E8-AA670038994D}"/>
+                <a16:creationId xmlns:a16="http://schemas.microsoft.com/office/drawing/2014/main" id="{00C79464-83A3-4AD0-9241-BF2D5F641450}"/>
               </a:ext>
             </a:extLst>
           </p:cNvPr>
@@ -3302,7 +3050,7 @@
           <p:cNvPr id="6" name="spectrum-card-1">
             <a:extLst xmlns:a="http://schemas.openxmlformats.org/drawingml/2006/main">
               <a:ext uri="{FF2B5EF4-FFF2-40B4-BE49-F238E27FC236}">
-                <a16:creationId xmlns:a16="http://schemas.microsoft.com/office/drawing/2014/main" id="{EF82BE99-D275-43E4-88E1-DD71B1668094}"/>
+                <a16:creationId xmlns:a16="http://schemas.microsoft.com/office/drawing/2014/main" id="{1B56F4C3-F8B4-4DE5-946A-F9B66BCEDB9C}"/>
               </a:ext>
             </a:extLst>
           </p:cNvPr>
@@ -3334,7 +3082,7 @@
         <p:style>
           <a:lnRef xmlns:a="http://schemas.openxmlformats.org/drawingml/2006/main" idx="0"/>
           <a:fillRef xmlns:a="http://schemas.openxmlformats.org/drawingml/2006/main" idx="0"/>
-          <a:effectRef xmlns:a="http://schemas.openxmlformats.org/drawingml/2006/main" idx="25"/>
+          <a:effectRef xmlns:a="http://schemas.openxmlformats.org/drawingml/2006/main" idx="11"/>
           <a:fontRef xmlns:a="http://schemas.openxmlformats.org/drawingml/2006/main" idx="major"/>
         </p:style>
       </p:sp>
@@ -3343,7 +3091,7 @@
           <p:cNvPr id="7" name="spectrum-underlay-2">
             <a:extLst xmlns:a="http://schemas.openxmlformats.org/drawingml/2006/main">
               <a:ext uri="{FF2B5EF4-FFF2-40B4-BE49-F238E27FC236}">
-                <a16:creationId xmlns:a16="http://schemas.microsoft.com/office/drawing/2014/main" id="{0E6F267C-A4EB-48DF-BDA2-4FBBC336BD2D}"/>
+                <a16:creationId xmlns:a16="http://schemas.microsoft.com/office/drawing/2014/main" id="{B25A77CD-958F-4869-B368-A6BE258FBF48}"/>
               </a:ext>
             </a:extLst>
           </p:cNvPr>
@@ -3376,7 +3124,7 @@
           <p:cNvPr id="8" name="spectrum-card-2">
             <a:extLst xmlns:a="http://schemas.openxmlformats.org/drawingml/2006/main">
               <a:ext uri="{FF2B5EF4-FFF2-40B4-BE49-F238E27FC236}">
-                <a16:creationId xmlns:a16="http://schemas.microsoft.com/office/drawing/2014/main" id="{95C7F630-9A34-4A94-BB68-19987B848147}"/>
+                <a16:creationId xmlns:a16="http://schemas.microsoft.com/office/drawing/2014/main" id="{6CBF1E89-2FA3-4FBA-B12C-959F11CFBDB9}"/>
               </a:ext>
             </a:extLst>
           </p:cNvPr>
@@ -3408,7 +3156,7 @@
         <p:style>
           <a:lnRef xmlns:a="http://schemas.openxmlformats.org/drawingml/2006/main" idx="0"/>
           <a:fillRef xmlns:a="http://schemas.openxmlformats.org/drawingml/2006/main" idx="0"/>
-          <a:effectRef xmlns:a="http://schemas.openxmlformats.org/drawingml/2006/main" idx="24"/>
+          <a:effectRef xmlns:a="http://schemas.openxmlformats.org/drawingml/2006/main" idx="10"/>
           <a:fontRef xmlns:a="http://schemas.openxmlformats.org/drawingml/2006/main" idx="major"/>
         </p:style>
       </p:sp>
@@ -3417,7 +3165,7 @@
           <p:cNvPr id="9" name="spectrum-axis">
             <a:extLst xmlns:a="http://schemas.openxmlformats.org/drawingml/2006/main">
               <a:ext uri="{FF2B5EF4-FFF2-40B4-BE49-F238E27FC236}">
-                <a16:creationId xmlns:a16="http://schemas.microsoft.com/office/drawing/2014/main" id="{E2B5E98A-C542-4995-B5CB-06624A6A8CD0}"/>
+                <a16:creationId xmlns:a16="http://schemas.microsoft.com/office/drawing/2014/main" id="{1131A34A-E20E-404F-ACA4-7A7EB07E6F42}"/>
               </a:ext>
             </a:extLst>
           </p:cNvPr>
@@ -3450,7 +3198,7 @@
           <p:cNvPr id="10" name="spectrum-axis-arrow">
             <a:extLst xmlns:a="http://schemas.openxmlformats.org/drawingml/2006/main">
               <a:ext uri="{FF2B5EF4-FFF2-40B4-BE49-F238E27FC236}">
-                <a16:creationId xmlns:a16="http://schemas.microsoft.com/office/drawing/2014/main" id="{4134A2E2-DCF1-46D2-9AAD-F79CB8A987AD}"/>
+                <a16:creationId xmlns:a16="http://schemas.microsoft.com/office/drawing/2014/main" id="{5BF86116-D15E-4D03-9416-66EC967FA7C4}"/>
               </a:ext>
             </a:extLst>
           </p:cNvPr>
@@ -3583,7 +3331,7 @@
           <p:cNvPr id="11" name="spectrum-axis-low">
             <a:extLst xmlns:a="http://schemas.openxmlformats.org/drawingml/2006/main">
               <a:ext uri="{FF2B5EF4-FFF2-40B4-BE49-F238E27FC236}">
-                <a16:creationId xmlns:a16="http://schemas.microsoft.com/office/drawing/2014/main" id="{E7DCD08B-E727-4529-8BBC-CC6161A1EA80}"/>
+                <a16:creationId xmlns:a16="http://schemas.microsoft.com/office/drawing/2014/main" id="{010A9925-6930-4183-AE7A-4659037D227C}"/>
               </a:ext>
             </a:extLst>
           </p:cNvPr>
@@ -3645,7 +3393,7 @@
           <p:cNvPr id="12" name="spectrum-axis-label">
             <a:extLst xmlns:a="http://schemas.openxmlformats.org/drawingml/2006/main">
               <a:ext uri="{FF2B5EF4-FFF2-40B4-BE49-F238E27FC236}">
-                <a16:creationId xmlns:a16="http://schemas.microsoft.com/office/drawing/2014/main" id="{B8F1B133-5B2B-4C51-8B09-D5EE320184D4}"/>
+                <a16:creationId xmlns:a16="http://schemas.microsoft.com/office/drawing/2014/main" id="{31F056D6-3ECE-43F8-8D8B-B8866BBE84C2}"/>
               </a:ext>
             </a:extLst>
           </p:cNvPr>
@@ -3707,7 +3455,7 @@
           <p:cNvPr id="13" name="spectrum-axis-high">
             <a:extLst xmlns:a="http://schemas.openxmlformats.org/drawingml/2006/main">
               <a:ext uri="{FF2B5EF4-FFF2-40B4-BE49-F238E27FC236}">
-                <a16:creationId xmlns:a16="http://schemas.microsoft.com/office/drawing/2014/main" id="{92198C9D-BD58-4421-B4CB-9DA5F2AA16F4}"/>
+                <a16:creationId xmlns:a16="http://schemas.microsoft.com/office/drawing/2014/main" id="{CB3F50A7-91C0-4A2E-A08B-48671FF6E137}"/>
               </a:ext>
             </a:extLst>
           </p:cNvPr>
@@ -3769,7 +3517,7 @@
           <p:cNvPr id="14" name="spectrum-order-0">
             <a:extLst xmlns:a="http://schemas.openxmlformats.org/drawingml/2006/main">
               <a:ext uri="{FF2B5EF4-FFF2-40B4-BE49-F238E27FC236}">
-                <a16:creationId xmlns:a16="http://schemas.microsoft.com/office/drawing/2014/main" id="{21381BA3-B4F0-4445-B29D-4529C39C7438}"/>
+                <a16:creationId xmlns:a16="http://schemas.microsoft.com/office/drawing/2014/main" id="{3A242688-80D8-4236-A98F-87A29F7920F9}"/>
               </a:ext>
             </a:extLst>
           </p:cNvPr>
@@ -3831,7 +3579,7 @@
           <p:cNvPr id="15" name="spectrum-title-0">
             <a:extLst xmlns:a="http://schemas.openxmlformats.org/drawingml/2006/main">
               <a:ext uri="{FF2B5EF4-FFF2-40B4-BE49-F238E27FC236}">
-                <a16:creationId xmlns:a16="http://schemas.microsoft.com/office/drawing/2014/main" id="{81C90536-BFF4-418D-8840-BC82FCC4C1F4}"/>
+                <a16:creationId xmlns:a16="http://schemas.microsoft.com/office/drawing/2014/main" id="{32D4C75A-01D7-42FF-99B2-435311123887}"/>
               </a:ext>
             </a:extLst>
           </p:cNvPr>
@@ -3842,7 +3590,7 @@
         </p:nvSpPr>
         <p:spPr>
           <a:xfrm xmlns:a="http://schemas.openxmlformats.org/drawingml/2006/main" rot="0">
-            <a:off x="1590675" y="3497313"/>
+            <a:off x="1590675" y="3541519"/>
             <a:ext cx="2571750" cy="333375"/>
           </a:xfrm>
           <a:prstGeom xmlns:a="http://schemas.openxmlformats.org/drawingml/2006/main" prst="rect">
@@ -3855,7 +3603,7 @@
           </a:ln>
         </p:spPr>
         <p:txBody>
-          <a:bodyPr xmlns:a="http://schemas.openxmlformats.org/drawingml/2006/main" wrap="square" lIns="0" tIns="0" rIns="0" bIns="0" anchor="ctr">
+          <a:bodyPr xmlns:a="http://schemas.openxmlformats.org/drawingml/2006/main" wrap="none" lIns="0" tIns="0" rIns="0" bIns="0" anchor="ctr">
             <a:noAutofit/>
           </a:bodyPr>
           <a:lstStyle xmlns:a="http://schemas.openxmlformats.org/drawingml/2006/main"/>
@@ -3893,7 +3641,7 @@
           <p:cNvPr id="16" name="spectrum-body-0">
             <a:extLst xmlns:a="http://schemas.openxmlformats.org/drawingml/2006/main">
               <a:ext uri="{FF2B5EF4-FFF2-40B4-BE49-F238E27FC236}">
-                <a16:creationId xmlns:a16="http://schemas.microsoft.com/office/drawing/2014/main" id="{D8950CB2-C114-4EEE-9C3B-E6B7544DA309}"/>
+                <a16:creationId xmlns:a16="http://schemas.microsoft.com/office/drawing/2014/main" id="{2A38A936-D2C7-4E2B-8C19-D697E4D37AB9}"/>
               </a:ext>
             </a:extLst>
           </p:cNvPr>
@@ -3904,8 +3652,8 @@
         </p:nvSpPr>
         <p:spPr>
           <a:xfrm xmlns:a="http://schemas.openxmlformats.org/drawingml/2006/main" rot="0">
-            <a:off x="1590675" y="3944988"/>
-            <a:ext cx="2571750" cy="587273"/>
+            <a:off x="1590675" y="3970144"/>
+            <a:ext cx="2571750" cy="517922"/>
           </a:xfrm>
           <a:prstGeom xmlns:a="http://schemas.openxmlformats.org/drawingml/2006/main" prst="rect">
             <a:avLst/>
@@ -3927,7 +3675,7 @@
                 <a:spcPct val="136000"/>
               </a:lnSpc>
               <a:buNone/>
-              <a:defRPr sz="1700" b="0" i="0">
+              <a:defRPr sz="1500" b="0" i="0">
                 <a:solidFill>
                   <a:srgbClr val="526174"/>
                 </a:solidFill>
@@ -3937,7 +3685,7 @@
               </a:defRPr>
             </a:pPr>
             <a:r>
-              <a:rPr sz="1700" b="0" i="0">
+              <a:rPr sz="1500" b="0" i="0">
                 <a:solidFill>
                   <a:srgbClr val="526174"/>
                 </a:solidFill>
@@ -3945,7 +3693,7 @@
                 <a:ea typeface="Microsoft YaHei"/>
                 <a:cs typeface="Microsoft YaHei"/>
               </a:rPr>
-              <a:t>不重视版式，直接堆放文</a:t>
+              <a:t>不重视版式，直接堆放文字也</a:t>
             </a:r>
           </a:p>
           <a:p xmlns:a="http://schemas.openxmlformats.org/drawingml/2006/main">
@@ -3954,7 +3702,7 @@
                 <a:spcPct val="136000"/>
               </a:lnSpc>
               <a:buNone/>
-              <a:defRPr sz="1700" b="0" i="0">
+              <a:defRPr sz="1500" b="0" i="0">
                 <a:solidFill>
                   <a:srgbClr val="526174"/>
                 </a:solidFill>
@@ -3964,7 +3712,7 @@
               </a:defRPr>
             </a:pPr>
             <a:r>
-              <a:rPr sz="1700" b="0" i="0">
+              <a:rPr sz="1500" b="0" i="0">
                 <a:solidFill>
                   <a:srgbClr val="526174"/>
                 </a:solidFill>
@@ -3972,7 +3720,7 @@
                 <a:ea typeface="Microsoft YaHei"/>
                 <a:cs typeface="Microsoft YaHei"/>
               </a:rPr>
-              <a:t>字也能接受</a:t>
+              <a:t>能接受</a:t>
             </a:r>
           </a:p>
         </p:txBody>
@@ -3982,7 +3730,7 @@
           <p:cNvPr id="17" name="spectrum-order-1">
             <a:extLst xmlns:a="http://schemas.openxmlformats.org/drawingml/2006/main">
               <a:ext uri="{FF2B5EF4-FFF2-40B4-BE49-F238E27FC236}">
-                <a16:creationId xmlns:a16="http://schemas.microsoft.com/office/drawing/2014/main" id="{67D349A0-1987-4AC2-8170-BA62A36384BA}"/>
+                <a16:creationId xmlns:a16="http://schemas.microsoft.com/office/drawing/2014/main" id="{9B3B1A5C-8B99-4C8A-9EE2-0AF5691C49B7}"/>
               </a:ext>
             </a:extLst>
           </p:cNvPr>
@@ -4044,7 +3792,7 @@
           <p:cNvPr id="18" name="spectrum-title-1">
             <a:extLst xmlns:a="http://schemas.openxmlformats.org/drawingml/2006/main">
               <a:ext uri="{FF2B5EF4-FFF2-40B4-BE49-F238E27FC236}">
-                <a16:creationId xmlns:a16="http://schemas.microsoft.com/office/drawing/2014/main" id="{E1991528-B971-406E-B674-F97124B2B8D2}"/>
+                <a16:creationId xmlns:a16="http://schemas.microsoft.com/office/drawing/2014/main" id="{61318DA6-DACC-42BF-90C8-A14EB338D8BA}"/>
               </a:ext>
             </a:extLst>
           </p:cNvPr>
@@ -4055,7 +3803,7 @@
         </p:nvSpPr>
         <p:spPr>
           <a:xfrm xmlns:a="http://schemas.openxmlformats.org/drawingml/2006/main" rot="0">
-            <a:off x="4810125" y="3354438"/>
+            <a:off x="4810125" y="3398644"/>
             <a:ext cx="2571750" cy="333375"/>
           </a:xfrm>
           <a:prstGeom xmlns:a="http://schemas.openxmlformats.org/drawingml/2006/main" prst="rect">
@@ -4068,7 +3816,7 @@
           </a:ln>
         </p:spPr>
         <p:txBody>
-          <a:bodyPr xmlns:a="http://schemas.openxmlformats.org/drawingml/2006/main" wrap="square" lIns="0" tIns="0" rIns="0" bIns="0" anchor="ctr">
+          <a:bodyPr xmlns:a="http://schemas.openxmlformats.org/drawingml/2006/main" wrap="none" lIns="0" tIns="0" rIns="0" bIns="0" anchor="ctr">
             <a:noAutofit/>
           </a:bodyPr>
           <a:lstStyle xmlns:a="http://schemas.openxmlformats.org/drawingml/2006/main"/>
@@ -4106,7 +3854,7 @@
           <p:cNvPr id="19" name="spectrum-body-1">
             <a:extLst xmlns:a="http://schemas.openxmlformats.org/drawingml/2006/main">
               <a:ext uri="{FF2B5EF4-FFF2-40B4-BE49-F238E27FC236}">
-                <a16:creationId xmlns:a16="http://schemas.microsoft.com/office/drawing/2014/main" id="{84DDC5B3-2B58-4CA0-AB52-DB57F9710917}"/>
+                <a16:creationId xmlns:a16="http://schemas.microsoft.com/office/drawing/2014/main" id="{A48401D3-37CF-4658-8877-D720E5ACBED1}"/>
               </a:ext>
             </a:extLst>
           </p:cNvPr>
@@ -4117,8 +3865,8 @@
         </p:nvSpPr>
         <p:spPr>
           <a:xfrm xmlns:a="http://schemas.openxmlformats.org/drawingml/2006/main" rot="0">
-            <a:off x="4810125" y="3802113"/>
-            <a:ext cx="2571750" cy="587273"/>
+            <a:off x="4810125" y="3827269"/>
+            <a:ext cx="2571750" cy="517922"/>
           </a:xfrm>
           <a:prstGeom xmlns:a="http://schemas.openxmlformats.org/drawingml/2006/main" prst="rect">
             <a:avLst/>
@@ -4140,7 +3888,7 @@
                 <a:spcPct val="136000"/>
               </a:lnSpc>
               <a:buNone/>
-              <a:defRPr sz="1700" b="0" i="0">
+              <a:defRPr sz="1500" b="0" i="0">
                 <a:solidFill>
                   <a:srgbClr val="FFFFFF"/>
                 </a:solidFill>
@@ -4150,7 +3898,7 @@
               </a:defRPr>
             </a:pPr>
             <a:r>
-              <a:rPr sz="1700" b="0" i="0">
+              <a:rPr sz="1500" b="0" i="0">
                 <a:solidFill>
                   <a:srgbClr val="FFFFFF"/>
                 </a:solidFill>
@@ -4158,7 +3906,7 @@
                 <a:ea typeface="Microsoft YaHei"/>
                 <a:cs typeface="Microsoft YaHei"/>
               </a:rPr>
-              <a:t>结构清楚、视觉规范、稳</a:t>
+              <a:t>结构清楚、视觉规范、稳定可</a:t>
             </a:r>
           </a:p>
           <a:p xmlns:a="http://schemas.openxmlformats.org/drawingml/2006/main">
@@ -4167,7 +3915,7 @@
                 <a:spcPct val="136000"/>
               </a:lnSpc>
               <a:buNone/>
-              <a:defRPr sz="1700" b="0" i="0">
+              <a:defRPr sz="1500" b="0" i="0">
                 <a:solidFill>
                   <a:srgbClr val="FFFFFF"/>
                 </a:solidFill>
@@ -4177,7 +3925,7 @@
               </a:defRPr>
             </a:pPr>
             <a:r>
-              <a:rPr sz="1700" b="0" i="0">
+              <a:rPr sz="1500" b="0" i="0">
                 <a:solidFill>
                   <a:srgbClr val="FFFFFF"/>
                 </a:solidFill>
@@ -4185,7 +3933,7 @@
                 <a:ea typeface="Microsoft YaHei"/>
                 <a:cs typeface="Microsoft YaHei"/>
               </a:rPr>
-              <a:t>定可靠且可修改</a:t>
+              <a:t>靠且可修改</a:t>
             </a:r>
           </a:p>
         </p:txBody>
@@ -4195,7 +3943,7 @@
           <p:cNvPr id="20" name="spectrum-order-2">
             <a:extLst xmlns:a="http://schemas.openxmlformats.org/drawingml/2006/main">
               <a:ext uri="{FF2B5EF4-FFF2-40B4-BE49-F238E27FC236}">
-                <a16:creationId xmlns:a16="http://schemas.microsoft.com/office/drawing/2014/main" id="{02E4C853-3FED-48F1-BF0A-3B9FDD0268E6}"/>
+                <a16:creationId xmlns:a16="http://schemas.microsoft.com/office/drawing/2014/main" id="{5C02A2E0-D22E-446F-B0BD-62E43B104965}"/>
               </a:ext>
             </a:extLst>
           </p:cNvPr>
@@ -4257,7 +4005,7 @@
           <p:cNvPr id="21" name="spectrum-title-2">
             <a:extLst xmlns:a="http://schemas.openxmlformats.org/drawingml/2006/main">
               <a:ext uri="{FF2B5EF4-FFF2-40B4-BE49-F238E27FC236}">
-                <a16:creationId xmlns:a16="http://schemas.microsoft.com/office/drawing/2014/main" id="{E78D4D1C-6862-4172-86FC-4D0680EAD75C}"/>
+                <a16:creationId xmlns:a16="http://schemas.microsoft.com/office/drawing/2014/main" id="{FF64534A-29E4-40A2-8B22-223F96797E75}"/>
               </a:ext>
             </a:extLst>
           </p:cNvPr>
@@ -4268,7 +4016,7 @@
         </p:nvSpPr>
         <p:spPr>
           <a:xfrm xmlns:a="http://schemas.openxmlformats.org/drawingml/2006/main" rot="0">
-            <a:off x="8029575" y="3497313"/>
+            <a:off x="8029575" y="3541519"/>
             <a:ext cx="2571750" cy="333375"/>
           </a:xfrm>
           <a:prstGeom xmlns:a="http://schemas.openxmlformats.org/drawingml/2006/main" prst="rect">
@@ -4281,7 +4029,7 @@
           </a:ln>
         </p:spPr>
         <p:txBody>
-          <a:bodyPr xmlns:a="http://schemas.openxmlformats.org/drawingml/2006/main" wrap="square" lIns="0" tIns="0" rIns="0" bIns="0" anchor="ctr">
+          <a:bodyPr xmlns:a="http://schemas.openxmlformats.org/drawingml/2006/main" wrap="none" lIns="0" tIns="0" rIns="0" bIns="0" anchor="ctr">
             <a:noAutofit/>
           </a:bodyPr>
           <a:lstStyle xmlns:a="http://schemas.openxmlformats.org/drawingml/2006/main"/>
@@ -4319,7 +4067,7 @@
           <p:cNvPr id="22" name="spectrum-body-2">
             <a:extLst xmlns:a="http://schemas.openxmlformats.org/drawingml/2006/main">
               <a:ext uri="{FF2B5EF4-FFF2-40B4-BE49-F238E27FC236}">
-                <a16:creationId xmlns:a16="http://schemas.microsoft.com/office/drawing/2014/main" id="{2EFDEC23-8EAC-4D2C-A106-35F1A454A83F}"/>
+                <a16:creationId xmlns:a16="http://schemas.microsoft.com/office/drawing/2014/main" id="{535A8A33-A286-42AF-B486-9AEF1054ED84}"/>
               </a:ext>
             </a:extLst>
           </p:cNvPr>
@@ -4330,8 +4078,8 @@
         </p:nvSpPr>
         <p:spPr>
           <a:xfrm xmlns:a="http://schemas.openxmlformats.org/drawingml/2006/main" rot="0">
-            <a:off x="8029575" y="3944988"/>
-            <a:ext cx="2571750" cy="587273"/>
+            <a:off x="8029575" y="3970144"/>
+            <a:ext cx="2571750" cy="517922"/>
           </a:xfrm>
           <a:prstGeom xmlns:a="http://schemas.openxmlformats.org/drawingml/2006/main" prst="rect">
             <a:avLst/>
@@ -4353,7 +4101,7 @@
                 <a:spcPct val="136000"/>
               </a:lnSpc>
               <a:buNone/>
-              <a:defRPr sz="1700" b="0" i="0">
+              <a:defRPr sz="1500" b="0" i="0">
                 <a:solidFill>
                   <a:srgbClr val="526174"/>
                 </a:solidFill>
@@ -4363,7 +4111,7 @@
               </a:defRPr>
             </a:pPr>
             <a:r>
-              <a:rPr sz="1700" b="0" i="0">
+              <a:rPr sz="1500" b="0" i="0">
                 <a:solidFill>
                   <a:srgbClr val="526174"/>
                 </a:solidFill>
@@ -4371,7 +4119,7 @@
                 <a:ea typeface="Microsoft YaHei"/>
                 <a:cs typeface="Microsoft YaHei"/>
               </a:rPr>
-              <a:t>发布会、路演和比赛需要</a:t>
+              <a:t>发布会、路演和比赛需要高度</a:t>
             </a:r>
           </a:p>
           <a:p xmlns:a="http://schemas.openxmlformats.org/drawingml/2006/main">
@@ -4380,7 +4128,7 @@
                 <a:spcPct val="136000"/>
               </a:lnSpc>
               <a:buNone/>
-              <a:defRPr sz="1700" b="0" i="0">
+              <a:defRPr sz="1500" b="0" i="0">
                 <a:solidFill>
                   <a:srgbClr val="526174"/>
                 </a:solidFill>
@@ -4390,7 +4138,7 @@
               </a:defRPr>
             </a:pPr>
             <a:r>
-              <a:rPr sz="1700" b="0" i="0">
+              <a:rPr sz="1500" b="0" i="0">
                 <a:solidFill>
                   <a:srgbClr val="526174"/>
                 </a:solidFill>
@@ -4398,7 +4146,7 @@
                 <a:ea typeface="Microsoft YaHei"/>
                 <a:cs typeface="Microsoft YaHei"/>
               </a:rPr>
-              <a:t>高度视觉创意</a:t>
+              <a:t>视觉创意</a:t>
             </a:r>
           </a:p>
         </p:txBody>
@@ -4408,7 +4156,7 @@
           <p:cNvPr id="23" name="spectrum-focus-label-bg">
             <a:extLst xmlns:a="http://schemas.openxmlformats.org/drawingml/2006/main">
               <a:ext uri="{FF2B5EF4-FFF2-40B4-BE49-F238E27FC236}">
-                <a16:creationId xmlns:a16="http://schemas.microsoft.com/office/drawing/2014/main" id="{20136F41-B251-4A5E-9790-0AFAE9BAFA24}"/>
+                <a16:creationId xmlns:a16="http://schemas.microsoft.com/office/drawing/2014/main" id="{B15C3CEF-2D7E-431F-B3C9-33B67AC23525}"/>
               </a:ext>
             </a:extLst>
           </p:cNvPr>
@@ -4441,7 +4189,7 @@
           <p:cNvPr id="24" name="spectrum-focus-label">
             <a:extLst xmlns:a="http://schemas.openxmlformats.org/drawingml/2006/main">
               <a:ext uri="{FF2B5EF4-FFF2-40B4-BE49-F238E27FC236}">
-                <a16:creationId xmlns:a16="http://schemas.microsoft.com/office/drawing/2014/main" id="{FBF2279C-5DAA-452B-AC46-E085A27A36D6}"/>
+                <a16:creationId xmlns:a16="http://schemas.microsoft.com/office/drawing/2014/main" id="{04ED6012-6C1E-4DBA-BD55-2CE5E935E6A6}"/>
               </a:ext>
             </a:extLst>
           </p:cNvPr>
@@ -4501,7 +4249,7 @@
     </p:spTree>
     <p:extLst>
       <p:ext uri="{BB962C8B-B14F-4D97-AF65-F5344CB8AC3E}">
-        <p14:creationId xmlns:p14="http://schemas.microsoft.com/office/powerpoint/2010/main" val="673347969"/>
+        <p14:creationId xmlns:p14="http://schemas.microsoft.com/office/powerpoint/2010/main" val="1685132881"/>
       </p:ext>
     </p:extLst>
   </p:cSld>
@@ -4532,7 +4280,7 @@
           <p:cNvPr id="25" name="spectrum-density-fill">
             <a:extLst xmlns:a="http://schemas.openxmlformats.org/drawingml/2006/main">
               <a:ext uri="{FF2B5EF4-FFF2-40B4-BE49-F238E27FC236}">
-                <a16:creationId xmlns:a16="http://schemas.microsoft.com/office/drawing/2014/main" id="{CF67AEB7-1E86-4A6B-8668-A529B9C926B5}"/>
+                <a16:creationId xmlns:a16="http://schemas.microsoft.com/office/drawing/2014/main" id="{B4222B72-F653-47ED-B562-D7AED79841F3}"/>
               </a:ext>
             </a:extLst>
           </p:cNvPr>
@@ -5290,7 +5038,7 @@
           <p:cNvPr id="2" name="spectrum-density-curve">
             <a:extLst xmlns:a="http://schemas.openxmlformats.org/drawingml/2006/main">
               <a:ext uri="{FF2B5EF4-FFF2-40B4-BE49-F238E27FC236}">
-                <a16:creationId xmlns:a16="http://schemas.microsoft.com/office/drawing/2014/main" id="{B3BEE3F2-2411-44B0-A356-E7CDEB72A079}"/>
+                <a16:creationId xmlns:a16="http://schemas.microsoft.com/office/drawing/2014/main" id="{3A0DEBE4-F565-46EA-AC7A-3E66C6DE217B}"/>
               </a:ext>
             </a:extLst>
           </p:cNvPr>
@@ -6047,7 +5795,7 @@
           <p:cNvPr id="3" name="spectrum-underlay-0">
             <a:extLst xmlns:a="http://schemas.openxmlformats.org/drawingml/2006/main">
               <a:ext uri="{FF2B5EF4-FFF2-40B4-BE49-F238E27FC236}">
-                <a16:creationId xmlns:a16="http://schemas.microsoft.com/office/drawing/2014/main" id="{B72F7477-1241-41D7-8CCC-0FCB73A6EECE}"/>
+                <a16:creationId xmlns:a16="http://schemas.microsoft.com/office/drawing/2014/main" id="{CB503D0D-3E10-4CF0-A0FC-19A5DE14E4C3}"/>
               </a:ext>
             </a:extLst>
           </p:cNvPr>
@@ -6080,7 +5828,7 @@
           <p:cNvPr id="4" name="spectrum-card-0">
             <a:extLst xmlns:a="http://schemas.openxmlformats.org/drawingml/2006/main">
               <a:ext uri="{FF2B5EF4-FFF2-40B4-BE49-F238E27FC236}">
-                <a16:creationId xmlns:a16="http://schemas.microsoft.com/office/drawing/2014/main" id="{FD2CFC69-6471-4525-B00F-0114B0BC72CD}"/>
+                <a16:creationId xmlns:a16="http://schemas.microsoft.com/office/drawing/2014/main" id="{8C4BD16D-0F09-4861-9AE2-0346D9ABA600}"/>
               </a:ext>
             </a:extLst>
           </p:cNvPr>
@@ -6112,7 +5860,7 @@
         <p:style>
           <a:lnRef xmlns:a="http://schemas.openxmlformats.org/drawingml/2006/main" idx="0"/>
           <a:fillRef xmlns:a="http://schemas.openxmlformats.org/drawingml/2006/main" idx="0"/>
-          <a:effectRef xmlns:a="http://schemas.openxmlformats.org/drawingml/2006/main" idx="24"/>
+          <a:effectRef xmlns:a="http://schemas.openxmlformats.org/drawingml/2006/main" idx="10"/>
           <a:fontRef xmlns:a="http://schemas.openxmlformats.org/drawingml/2006/main" idx="major"/>
         </p:style>
       </p:sp>
@@ -6121,7 +5869,7 @@
           <p:cNvPr id="5" name="spectrum-underlay-1">
             <a:extLst xmlns:a="http://schemas.openxmlformats.org/drawingml/2006/main">
               <a:ext uri="{FF2B5EF4-FFF2-40B4-BE49-F238E27FC236}">
-                <a16:creationId xmlns:a16="http://schemas.microsoft.com/office/drawing/2014/main" id="{ACC80F8D-F705-460E-987B-3FEC1F66D14F}"/>
+                <a16:creationId xmlns:a16="http://schemas.microsoft.com/office/drawing/2014/main" id="{DE4B41C8-A55D-421A-AF5C-5EA6A01647A8}"/>
               </a:ext>
             </a:extLst>
           </p:cNvPr>
@@ -6154,7 +5902,7 @@
           <p:cNvPr id="6" name="spectrum-card-1">
             <a:extLst xmlns:a="http://schemas.openxmlformats.org/drawingml/2006/main">
               <a:ext uri="{FF2B5EF4-FFF2-40B4-BE49-F238E27FC236}">
-                <a16:creationId xmlns:a16="http://schemas.microsoft.com/office/drawing/2014/main" id="{881CCF6E-669A-4D97-B1BF-70C3CCF33DB1}"/>
+                <a16:creationId xmlns:a16="http://schemas.microsoft.com/office/drawing/2014/main" id="{9F41CB47-576E-41EE-BC3F-08696A05D1F4}"/>
               </a:ext>
             </a:extLst>
           </p:cNvPr>
@@ -6186,7 +5934,7 @@
         <p:style>
           <a:lnRef xmlns:a="http://schemas.openxmlformats.org/drawingml/2006/main" idx="0"/>
           <a:fillRef xmlns:a="http://schemas.openxmlformats.org/drawingml/2006/main" idx="0"/>
-          <a:effectRef xmlns:a="http://schemas.openxmlformats.org/drawingml/2006/main" idx="25"/>
+          <a:effectRef xmlns:a="http://schemas.openxmlformats.org/drawingml/2006/main" idx="11"/>
           <a:fontRef xmlns:a="http://schemas.openxmlformats.org/drawingml/2006/main" idx="major"/>
         </p:style>
       </p:sp>
@@ -6195,7 +5943,7 @@
           <p:cNvPr id="7" name="spectrum-underlay-2">
             <a:extLst xmlns:a="http://schemas.openxmlformats.org/drawingml/2006/main">
               <a:ext uri="{FF2B5EF4-FFF2-40B4-BE49-F238E27FC236}">
-                <a16:creationId xmlns:a16="http://schemas.microsoft.com/office/drawing/2014/main" id="{173E9269-10E8-4013-8B6A-E6FA59255A30}"/>
+                <a16:creationId xmlns:a16="http://schemas.microsoft.com/office/drawing/2014/main" id="{C81BD797-C2A8-4F8D-A02F-F341A368D207}"/>
               </a:ext>
             </a:extLst>
           </p:cNvPr>
@@ -6228,7 +5976,7 @@
           <p:cNvPr id="8" name="spectrum-card-2">
             <a:extLst xmlns:a="http://schemas.openxmlformats.org/drawingml/2006/main">
               <a:ext uri="{FF2B5EF4-FFF2-40B4-BE49-F238E27FC236}">
-                <a16:creationId xmlns:a16="http://schemas.microsoft.com/office/drawing/2014/main" id="{7DEAD309-E12C-4DED-9CDA-1FB075FFEA21}"/>
+                <a16:creationId xmlns:a16="http://schemas.microsoft.com/office/drawing/2014/main" id="{36533DEE-F7FA-4CB5-AD52-4E2AE8A5BE9C}"/>
               </a:ext>
             </a:extLst>
           </p:cNvPr>
@@ -6260,7 +6008,7 @@
         <p:style>
           <a:lnRef xmlns:a="http://schemas.openxmlformats.org/drawingml/2006/main" idx="0"/>
           <a:fillRef xmlns:a="http://schemas.openxmlformats.org/drawingml/2006/main" idx="0"/>
-          <a:effectRef xmlns:a="http://schemas.openxmlformats.org/drawingml/2006/main" idx="24"/>
+          <a:effectRef xmlns:a="http://schemas.openxmlformats.org/drawingml/2006/main" idx="10"/>
           <a:fontRef xmlns:a="http://schemas.openxmlformats.org/drawingml/2006/main" idx="major"/>
         </p:style>
       </p:sp>
@@ -6269,7 +6017,7 @@
           <p:cNvPr id="9" name="spectrum-axis">
             <a:extLst xmlns:a="http://schemas.openxmlformats.org/drawingml/2006/main">
               <a:ext uri="{FF2B5EF4-FFF2-40B4-BE49-F238E27FC236}">
-                <a16:creationId xmlns:a16="http://schemas.microsoft.com/office/drawing/2014/main" id="{6C1233F6-8723-4F9F-B36A-30EE5F40205A}"/>
+                <a16:creationId xmlns:a16="http://schemas.microsoft.com/office/drawing/2014/main" id="{CD473331-F99B-43B6-AFC6-174B79F1E7E3}"/>
               </a:ext>
             </a:extLst>
           </p:cNvPr>
@@ -6302,7 +6050,7 @@
           <p:cNvPr id="10" name="spectrum-axis-arrow">
             <a:extLst xmlns:a="http://schemas.openxmlformats.org/drawingml/2006/main">
               <a:ext uri="{FF2B5EF4-FFF2-40B4-BE49-F238E27FC236}">
-                <a16:creationId xmlns:a16="http://schemas.microsoft.com/office/drawing/2014/main" id="{714437B9-EC95-4261-A760-B087A0759771}"/>
+                <a16:creationId xmlns:a16="http://schemas.microsoft.com/office/drawing/2014/main" id="{1BCFE054-09DC-403D-911C-52EA163B5C9F}"/>
               </a:ext>
             </a:extLst>
           </p:cNvPr>
@@ -6435,7 +6183,7 @@
           <p:cNvPr id="11" name="spectrum-axis-low">
             <a:extLst xmlns:a="http://schemas.openxmlformats.org/drawingml/2006/main">
               <a:ext uri="{FF2B5EF4-FFF2-40B4-BE49-F238E27FC236}">
-                <a16:creationId xmlns:a16="http://schemas.microsoft.com/office/drawing/2014/main" id="{0CCD8F82-8EE4-4552-B27F-22FC70F4560B}"/>
+                <a16:creationId xmlns:a16="http://schemas.microsoft.com/office/drawing/2014/main" id="{F0D8C465-ECE5-461C-A53D-E177E8BB79EC}"/>
               </a:ext>
             </a:extLst>
           </p:cNvPr>
@@ -6497,7 +6245,7 @@
           <p:cNvPr id="12" name="spectrum-axis-label">
             <a:extLst xmlns:a="http://schemas.openxmlformats.org/drawingml/2006/main">
               <a:ext uri="{FF2B5EF4-FFF2-40B4-BE49-F238E27FC236}">
-                <a16:creationId xmlns:a16="http://schemas.microsoft.com/office/drawing/2014/main" id="{E436A829-6D99-4A28-B149-9ED3110CD627}"/>
+                <a16:creationId xmlns:a16="http://schemas.microsoft.com/office/drawing/2014/main" id="{4A2D51BB-10D4-4BEA-82C2-ACA57E82D281}"/>
               </a:ext>
             </a:extLst>
           </p:cNvPr>
@@ -6559,7 +6307,7 @@
           <p:cNvPr id="13" name="spectrum-axis-high">
             <a:extLst xmlns:a="http://schemas.openxmlformats.org/drawingml/2006/main">
               <a:ext uri="{FF2B5EF4-FFF2-40B4-BE49-F238E27FC236}">
-                <a16:creationId xmlns:a16="http://schemas.microsoft.com/office/drawing/2014/main" id="{66573D98-1266-4A10-A506-D541265A6545}"/>
+                <a16:creationId xmlns:a16="http://schemas.microsoft.com/office/drawing/2014/main" id="{DF393E80-612A-47A9-9234-19BB9B13EBB6}"/>
               </a:ext>
             </a:extLst>
           </p:cNvPr>
@@ -6621,7 +6369,7 @@
           <p:cNvPr id="14" name="spectrum-order-0">
             <a:extLst xmlns:a="http://schemas.openxmlformats.org/drawingml/2006/main">
               <a:ext uri="{FF2B5EF4-FFF2-40B4-BE49-F238E27FC236}">
-                <a16:creationId xmlns:a16="http://schemas.microsoft.com/office/drawing/2014/main" id="{E2E937AF-677E-4B1D-9923-390B26252B1D}"/>
+                <a16:creationId xmlns:a16="http://schemas.microsoft.com/office/drawing/2014/main" id="{998784DE-A79D-4134-BB4B-0F0E36FA7AAB}"/>
               </a:ext>
             </a:extLst>
           </p:cNvPr>
@@ -6683,7 +6431,7 @@
           <p:cNvPr id="15" name="spectrum-title-0">
             <a:extLst xmlns:a="http://schemas.openxmlformats.org/drawingml/2006/main">
               <a:ext uri="{FF2B5EF4-FFF2-40B4-BE49-F238E27FC236}">
-                <a16:creationId xmlns:a16="http://schemas.microsoft.com/office/drawing/2014/main" id="{F46F530A-2C35-4364-928C-F9DA0FD66FF1}"/>
+                <a16:creationId xmlns:a16="http://schemas.microsoft.com/office/drawing/2014/main" id="{BE0E7F79-C339-431F-93FF-8E4FB1C1ED36}"/>
               </a:ext>
             </a:extLst>
           </p:cNvPr>
@@ -6694,7 +6442,7 @@
         </p:nvSpPr>
         <p:spPr>
           <a:xfrm xmlns:a="http://schemas.openxmlformats.org/drawingml/2006/main" rot="0">
-            <a:off x="1590675" y="3497313"/>
+            <a:off x="1590675" y="3541519"/>
             <a:ext cx="2571750" cy="333375"/>
           </a:xfrm>
           <a:prstGeom xmlns:a="http://schemas.openxmlformats.org/drawingml/2006/main" prst="rect">
@@ -6707,7 +6455,7 @@
           </a:ln>
         </p:spPr>
         <p:txBody>
-          <a:bodyPr xmlns:a="http://schemas.openxmlformats.org/drawingml/2006/main" wrap="square" lIns="0" tIns="0" rIns="0" bIns="0" anchor="ctr">
+          <a:bodyPr xmlns:a="http://schemas.openxmlformats.org/drawingml/2006/main" wrap="none" lIns="0" tIns="0" rIns="0" bIns="0" anchor="ctr">
             <a:noAutofit/>
           </a:bodyPr>
           <a:lstStyle xmlns:a="http://schemas.openxmlformats.org/drawingml/2006/main"/>
@@ -6745,7 +6493,7 @@
           <p:cNvPr id="16" name="spectrum-body-0">
             <a:extLst xmlns:a="http://schemas.openxmlformats.org/drawingml/2006/main">
               <a:ext uri="{FF2B5EF4-FFF2-40B4-BE49-F238E27FC236}">
-                <a16:creationId xmlns:a16="http://schemas.microsoft.com/office/drawing/2014/main" id="{1D90BD2C-9294-490E-8577-10623C410966}"/>
+                <a16:creationId xmlns:a16="http://schemas.microsoft.com/office/drawing/2014/main" id="{F24C21DC-16A7-4F10-993E-FE854A84200D}"/>
               </a:ext>
             </a:extLst>
           </p:cNvPr>
@@ -6756,8 +6504,8 @@
         </p:nvSpPr>
         <p:spPr>
           <a:xfrm xmlns:a="http://schemas.openxmlformats.org/drawingml/2006/main" rot="0">
-            <a:off x="1590675" y="3944988"/>
-            <a:ext cx="2571750" cy="587273"/>
+            <a:off x="1590675" y="3970144"/>
+            <a:ext cx="2571750" cy="517922"/>
           </a:xfrm>
           <a:prstGeom xmlns:a="http://schemas.openxmlformats.org/drawingml/2006/main" prst="rect">
             <a:avLst/>
@@ -6779,7 +6527,7 @@
                 <a:spcPct val="136000"/>
               </a:lnSpc>
               <a:buNone/>
-              <a:defRPr sz="1700" b="0" i="0">
+              <a:defRPr sz="1500" b="0" i="0">
                 <a:solidFill>
                   <a:srgbClr val="526174"/>
                 </a:solidFill>
@@ -6789,7 +6537,7 @@
               </a:defRPr>
             </a:pPr>
             <a:r>
-              <a:rPr sz="1700" b="0" i="0">
+              <a:rPr sz="1500" b="0" i="0">
                 <a:solidFill>
                   <a:srgbClr val="526174"/>
                 </a:solidFill>
@@ -6797,7 +6545,7 @@
                 <a:ea typeface="Microsoft YaHei"/>
                 <a:cs typeface="Microsoft YaHei"/>
               </a:rPr>
-              <a:t>不重视版式，直接堆放文</a:t>
+              <a:t>不重视版式，直接堆放文字也</a:t>
             </a:r>
           </a:p>
           <a:p xmlns:a="http://schemas.openxmlformats.org/drawingml/2006/main">
@@ -6806,7 +6554,7 @@
                 <a:spcPct val="136000"/>
               </a:lnSpc>
               <a:buNone/>
-              <a:defRPr sz="1700" b="0" i="0">
+              <a:defRPr sz="1500" b="0" i="0">
                 <a:solidFill>
                   <a:srgbClr val="526174"/>
                 </a:solidFill>
@@ -6816,7 +6564,7 @@
               </a:defRPr>
             </a:pPr>
             <a:r>
-              <a:rPr sz="1700" b="0" i="0">
+              <a:rPr sz="1500" b="0" i="0">
                 <a:solidFill>
                   <a:srgbClr val="526174"/>
                 </a:solidFill>
@@ -6824,7 +6572,7 @@
                 <a:ea typeface="Microsoft YaHei"/>
                 <a:cs typeface="Microsoft YaHei"/>
               </a:rPr>
-              <a:t>字也能接受</a:t>
+              <a:t>能接受</a:t>
             </a:r>
           </a:p>
         </p:txBody>
@@ -6834,7 +6582,7 @@
           <p:cNvPr id="17" name="spectrum-order-1">
             <a:extLst xmlns:a="http://schemas.openxmlformats.org/drawingml/2006/main">
               <a:ext uri="{FF2B5EF4-FFF2-40B4-BE49-F238E27FC236}">
-                <a16:creationId xmlns:a16="http://schemas.microsoft.com/office/drawing/2014/main" id="{A10031BB-50A4-4D56-939E-17FB7FDE1EF2}"/>
+                <a16:creationId xmlns:a16="http://schemas.microsoft.com/office/drawing/2014/main" id="{D7325F80-C1D2-4018-BEB4-1C98CCE2AFF3}"/>
               </a:ext>
             </a:extLst>
           </p:cNvPr>
@@ -6896,7 +6644,7 @@
           <p:cNvPr id="18" name="spectrum-title-1">
             <a:extLst xmlns:a="http://schemas.openxmlformats.org/drawingml/2006/main">
               <a:ext uri="{FF2B5EF4-FFF2-40B4-BE49-F238E27FC236}">
-                <a16:creationId xmlns:a16="http://schemas.microsoft.com/office/drawing/2014/main" id="{E9182526-1BF3-4ABB-87A5-CFD579A47632}"/>
+                <a16:creationId xmlns:a16="http://schemas.microsoft.com/office/drawing/2014/main" id="{BBFE21B5-800B-43A2-8E23-36496A0FEA34}"/>
               </a:ext>
             </a:extLst>
           </p:cNvPr>
@@ -6907,7 +6655,7 @@
         </p:nvSpPr>
         <p:spPr>
           <a:xfrm xmlns:a="http://schemas.openxmlformats.org/drawingml/2006/main" rot="0">
-            <a:off x="4810125" y="3354438"/>
+            <a:off x="4810125" y="3398644"/>
             <a:ext cx="2571750" cy="333375"/>
           </a:xfrm>
           <a:prstGeom xmlns:a="http://schemas.openxmlformats.org/drawingml/2006/main" prst="rect">
@@ -6920,7 +6668,7 @@
           </a:ln>
         </p:spPr>
         <p:txBody>
-          <a:bodyPr xmlns:a="http://schemas.openxmlformats.org/drawingml/2006/main" wrap="square" lIns="0" tIns="0" rIns="0" bIns="0" anchor="ctr">
+          <a:bodyPr xmlns:a="http://schemas.openxmlformats.org/drawingml/2006/main" wrap="none" lIns="0" tIns="0" rIns="0" bIns="0" anchor="ctr">
             <a:noAutofit/>
           </a:bodyPr>
           <a:lstStyle xmlns:a="http://schemas.openxmlformats.org/drawingml/2006/main"/>
@@ -6958,7 +6706,7 @@
           <p:cNvPr id="19" name="spectrum-body-1">
             <a:extLst xmlns:a="http://schemas.openxmlformats.org/drawingml/2006/main">
               <a:ext uri="{FF2B5EF4-FFF2-40B4-BE49-F238E27FC236}">
-                <a16:creationId xmlns:a16="http://schemas.microsoft.com/office/drawing/2014/main" id="{8AE967A6-D221-4607-AB2B-C32ED7284FFF}"/>
+                <a16:creationId xmlns:a16="http://schemas.microsoft.com/office/drawing/2014/main" id="{CAEC52FB-923C-4458-A548-2202FC7C0373}"/>
               </a:ext>
             </a:extLst>
           </p:cNvPr>
@@ -6969,8 +6717,8 @@
         </p:nvSpPr>
         <p:spPr>
           <a:xfrm xmlns:a="http://schemas.openxmlformats.org/drawingml/2006/main" rot="0">
-            <a:off x="4810125" y="3802113"/>
-            <a:ext cx="2571750" cy="587273"/>
+            <a:off x="4810125" y="3827269"/>
+            <a:ext cx="2571750" cy="517922"/>
           </a:xfrm>
           <a:prstGeom xmlns:a="http://schemas.openxmlformats.org/drawingml/2006/main" prst="rect">
             <a:avLst/>
@@ -6992,7 +6740,7 @@
                 <a:spcPct val="136000"/>
               </a:lnSpc>
               <a:buNone/>
-              <a:defRPr sz="1700" b="0" i="0">
+              <a:defRPr sz="1500" b="0" i="0">
                 <a:solidFill>
                   <a:srgbClr val="FFFFFF"/>
                 </a:solidFill>
@@ -7002,7 +6750,7 @@
               </a:defRPr>
             </a:pPr>
             <a:r>
-              <a:rPr sz="1700" b="0" i="0">
+              <a:rPr sz="1500" b="0" i="0">
                 <a:solidFill>
                   <a:srgbClr val="FFFFFF"/>
                 </a:solidFill>
@@ -7010,7 +6758,7 @@
                 <a:ea typeface="Microsoft YaHei"/>
                 <a:cs typeface="Microsoft YaHei"/>
               </a:rPr>
-              <a:t>结构清楚、视觉规范、稳</a:t>
+              <a:t>结构清楚、视觉规范、稳定可</a:t>
             </a:r>
           </a:p>
           <a:p xmlns:a="http://schemas.openxmlformats.org/drawingml/2006/main">
@@ -7019,7 +6767,7 @@
                 <a:spcPct val="136000"/>
               </a:lnSpc>
               <a:buNone/>
-              <a:defRPr sz="1700" b="0" i="0">
+              <a:defRPr sz="1500" b="0" i="0">
                 <a:solidFill>
                   <a:srgbClr val="FFFFFF"/>
                 </a:solidFill>
@@ -7029,7 +6777,7 @@
               </a:defRPr>
             </a:pPr>
             <a:r>
-              <a:rPr sz="1700" b="0" i="0">
+              <a:rPr sz="1500" b="0" i="0">
                 <a:solidFill>
                   <a:srgbClr val="FFFFFF"/>
                 </a:solidFill>
@@ -7037,7 +6785,7 @@
                 <a:ea typeface="Microsoft YaHei"/>
                 <a:cs typeface="Microsoft YaHei"/>
               </a:rPr>
-              <a:t>定可靠且可修改</a:t>
+              <a:t>靠且可修改</a:t>
             </a:r>
           </a:p>
         </p:txBody>
@@ -7047,7 +6795,7 @@
           <p:cNvPr id="20" name="spectrum-order-2">
             <a:extLst xmlns:a="http://schemas.openxmlformats.org/drawingml/2006/main">
               <a:ext uri="{FF2B5EF4-FFF2-40B4-BE49-F238E27FC236}">
-                <a16:creationId xmlns:a16="http://schemas.microsoft.com/office/drawing/2014/main" id="{A562F462-1832-4381-ACAA-12E95830CED9}"/>
+                <a16:creationId xmlns:a16="http://schemas.microsoft.com/office/drawing/2014/main" id="{D1248E2B-9715-4638-B64C-B073A6FA7B14}"/>
               </a:ext>
             </a:extLst>
           </p:cNvPr>
@@ -7109,7 +6857,7 @@
           <p:cNvPr id="21" name="spectrum-title-2">
             <a:extLst xmlns:a="http://schemas.openxmlformats.org/drawingml/2006/main">
               <a:ext uri="{FF2B5EF4-FFF2-40B4-BE49-F238E27FC236}">
-                <a16:creationId xmlns:a16="http://schemas.microsoft.com/office/drawing/2014/main" id="{4402E3F5-8856-4D84-A561-15FD8E20168C}"/>
+                <a16:creationId xmlns:a16="http://schemas.microsoft.com/office/drawing/2014/main" id="{6A7EF2D1-6A4B-49C7-AF20-F684FA3A203D}"/>
               </a:ext>
             </a:extLst>
           </p:cNvPr>
@@ -7120,7 +6868,7 @@
         </p:nvSpPr>
         <p:spPr>
           <a:xfrm xmlns:a="http://schemas.openxmlformats.org/drawingml/2006/main" rot="0">
-            <a:off x="8029575" y="3497313"/>
+            <a:off x="8029575" y="3541519"/>
             <a:ext cx="2571750" cy="333375"/>
           </a:xfrm>
           <a:prstGeom xmlns:a="http://schemas.openxmlformats.org/drawingml/2006/main" prst="rect">
@@ -7133,7 +6881,7 @@
           </a:ln>
         </p:spPr>
         <p:txBody>
-          <a:bodyPr xmlns:a="http://schemas.openxmlformats.org/drawingml/2006/main" wrap="square" lIns="0" tIns="0" rIns="0" bIns="0" anchor="ctr">
+          <a:bodyPr xmlns:a="http://schemas.openxmlformats.org/drawingml/2006/main" wrap="none" lIns="0" tIns="0" rIns="0" bIns="0" anchor="ctr">
             <a:noAutofit/>
           </a:bodyPr>
           <a:lstStyle xmlns:a="http://schemas.openxmlformats.org/drawingml/2006/main"/>
@@ -7171,7 +6919,7 @@
           <p:cNvPr id="22" name="spectrum-body-2">
             <a:extLst xmlns:a="http://schemas.openxmlformats.org/drawingml/2006/main">
               <a:ext uri="{FF2B5EF4-FFF2-40B4-BE49-F238E27FC236}">
-                <a16:creationId xmlns:a16="http://schemas.microsoft.com/office/drawing/2014/main" id="{92BE2E8D-A63D-415B-AD74-AAA50FF68355}"/>
+                <a16:creationId xmlns:a16="http://schemas.microsoft.com/office/drawing/2014/main" id="{9A83095B-E8AA-48E5-BB70-529F2BB4851E}"/>
               </a:ext>
             </a:extLst>
           </p:cNvPr>
@@ -7182,8 +6930,8 @@
         </p:nvSpPr>
         <p:spPr>
           <a:xfrm xmlns:a="http://schemas.openxmlformats.org/drawingml/2006/main" rot="0">
-            <a:off x="8029575" y="3944988"/>
-            <a:ext cx="2571750" cy="587273"/>
+            <a:off x="8029575" y="3970144"/>
+            <a:ext cx="2571750" cy="517922"/>
           </a:xfrm>
           <a:prstGeom xmlns:a="http://schemas.openxmlformats.org/drawingml/2006/main" prst="rect">
             <a:avLst/>
@@ -7205,7 +6953,7 @@
                 <a:spcPct val="136000"/>
               </a:lnSpc>
               <a:buNone/>
-              <a:defRPr sz="1700" b="0" i="0">
+              <a:defRPr sz="1500" b="0" i="0">
                 <a:solidFill>
                   <a:srgbClr val="526174"/>
                 </a:solidFill>
@@ -7215,7 +6963,7 @@
               </a:defRPr>
             </a:pPr>
             <a:r>
-              <a:rPr sz="1700" b="0" i="0">
+              <a:rPr sz="1500" b="0" i="0">
                 <a:solidFill>
                   <a:srgbClr val="526174"/>
                 </a:solidFill>
@@ -7223,7 +6971,7 @@
                 <a:ea typeface="Microsoft YaHei"/>
                 <a:cs typeface="Microsoft YaHei"/>
               </a:rPr>
-              <a:t>发布会、路演和比赛需要</a:t>
+              <a:t>发布会、路演和比赛需要高度</a:t>
             </a:r>
           </a:p>
           <a:p xmlns:a="http://schemas.openxmlformats.org/drawingml/2006/main">
@@ -7232,7 +6980,7 @@
                 <a:spcPct val="136000"/>
               </a:lnSpc>
               <a:buNone/>
-              <a:defRPr sz="1700" b="0" i="0">
+              <a:defRPr sz="1500" b="0" i="0">
                 <a:solidFill>
                   <a:srgbClr val="526174"/>
                 </a:solidFill>
@@ -7242,7 +6990,7 @@
               </a:defRPr>
             </a:pPr>
             <a:r>
-              <a:rPr sz="1700" b="0" i="0">
+              <a:rPr sz="1500" b="0" i="0">
                 <a:solidFill>
                   <a:srgbClr val="526174"/>
                 </a:solidFill>
@@ -7250,7 +6998,7 @@
                 <a:ea typeface="Microsoft YaHei"/>
                 <a:cs typeface="Microsoft YaHei"/>
               </a:rPr>
-              <a:t>高度视觉创意</a:t>
+              <a:t>视觉创意</a:t>
             </a:r>
           </a:p>
         </p:txBody>
@@ -7260,7 +7008,7 @@
           <p:cNvPr id="23" name="spectrum-focus-label-bg">
             <a:extLst xmlns:a="http://schemas.openxmlformats.org/drawingml/2006/main">
               <a:ext uri="{FF2B5EF4-FFF2-40B4-BE49-F238E27FC236}">
-                <a16:creationId xmlns:a16="http://schemas.microsoft.com/office/drawing/2014/main" id="{2A094E7F-1F37-496B-B8EC-A16DEE32F942}"/>
+                <a16:creationId xmlns:a16="http://schemas.microsoft.com/office/drawing/2014/main" id="{57F05593-DFB3-4CE4-BA0F-BDA2B40EF715}"/>
               </a:ext>
             </a:extLst>
           </p:cNvPr>
@@ -7293,7 +7041,7 @@
           <p:cNvPr id="24" name="spectrum-focus-label">
             <a:extLst xmlns:a="http://schemas.openxmlformats.org/drawingml/2006/main">
               <a:ext uri="{FF2B5EF4-FFF2-40B4-BE49-F238E27FC236}">
-                <a16:creationId xmlns:a16="http://schemas.microsoft.com/office/drawing/2014/main" id="{5013DF98-853B-489B-BC59-56ED484C02C9}"/>
+                <a16:creationId xmlns:a16="http://schemas.microsoft.com/office/drawing/2014/main" id="{B890378A-0200-4820-99C7-7C2EAD8ECA1A}"/>
               </a:ext>
             </a:extLst>
           </p:cNvPr>
@@ -7353,7 +7101,7 @@
     </p:spTree>
     <p:extLst>
       <p:ext uri="{BB962C8B-B14F-4D97-AF65-F5344CB8AC3E}">
-        <p14:creationId xmlns:p14="http://schemas.microsoft.com/office/powerpoint/2010/main" val="1771679996"/>
+        <p14:creationId xmlns:p14="http://schemas.microsoft.com/office/powerpoint/2010/main" val="2128564406"/>
       </p:ext>
     </p:extLst>
   </p:cSld>
@@ -7384,7 +7132,7 @@
           <p:cNvPr id="30" name="spectrum-density-fill">
             <a:extLst xmlns:a="http://schemas.openxmlformats.org/drawingml/2006/main">
               <a:ext uri="{FF2B5EF4-FFF2-40B4-BE49-F238E27FC236}">
-                <a16:creationId xmlns:a16="http://schemas.microsoft.com/office/drawing/2014/main" id="{8E7AB571-DA2B-4AB5-8B62-57F817338E22}"/>
+                <a16:creationId xmlns:a16="http://schemas.microsoft.com/office/drawing/2014/main" id="{22692338-FBAC-495D-8245-011D21DAAC33}"/>
               </a:ext>
             </a:extLst>
           </p:cNvPr>
@@ -8142,7 +7890,7 @@
           <p:cNvPr id="2" name="spectrum-density-curve">
             <a:extLst xmlns:a="http://schemas.openxmlformats.org/drawingml/2006/main">
               <a:ext uri="{FF2B5EF4-FFF2-40B4-BE49-F238E27FC236}">
-                <a16:creationId xmlns:a16="http://schemas.microsoft.com/office/drawing/2014/main" id="{20AB54D1-2330-42B5-9436-ED64F2C3870B}"/>
+                <a16:creationId xmlns:a16="http://schemas.microsoft.com/office/drawing/2014/main" id="{0E03F5D3-6120-434C-B738-4A04A02FA470}"/>
               </a:ext>
             </a:extLst>
           </p:cNvPr>
@@ -8899,7 +8647,7 @@
           <p:cNvPr id="3" name="spectrum-underlay-0">
             <a:extLst xmlns:a="http://schemas.openxmlformats.org/drawingml/2006/main">
               <a:ext uri="{FF2B5EF4-FFF2-40B4-BE49-F238E27FC236}">
-                <a16:creationId xmlns:a16="http://schemas.microsoft.com/office/drawing/2014/main" id="{788A3B28-13A8-43CF-9595-FE3DB87E620C}"/>
+                <a16:creationId xmlns:a16="http://schemas.microsoft.com/office/drawing/2014/main" id="{C626DD6A-D431-475A-B886-836F62C3505A}"/>
               </a:ext>
             </a:extLst>
           </p:cNvPr>
@@ -8932,7 +8680,7 @@
           <p:cNvPr id="4" name="spectrum-card-0">
             <a:extLst xmlns:a="http://schemas.openxmlformats.org/drawingml/2006/main">
               <a:ext uri="{FF2B5EF4-FFF2-40B4-BE49-F238E27FC236}">
-                <a16:creationId xmlns:a16="http://schemas.microsoft.com/office/drawing/2014/main" id="{C8F8792C-419B-43EB-B06C-083331860A20}"/>
+                <a16:creationId xmlns:a16="http://schemas.microsoft.com/office/drawing/2014/main" id="{BA2B4EEA-41C8-406C-B1AD-C8113A56D2B0}"/>
               </a:ext>
             </a:extLst>
           </p:cNvPr>
@@ -8964,7 +8712,7 @@
         <p:style>
           <a:lnRef xmlns:a="http://schemas.openxmlformats.org/drawingml/2006/main" idx="0"/>
           <a:fillRef xmlns:a="http://schemas.openxmlformats.org/drawingml/2006/main" idx="0"/>
-          <a:effectRef xmlns:a="http://schemas.openxmlformats.org/drawingml/2006/main" idx="24"/>
+          <a:effectRef xmlns:a="http://schemas.openxmlformats.org/drawingml/2006/main" idx="10"/>
           <a:fontRef xmlns:a="http://schemas.openxmlformats.org/drawingml/2006/main" idx="major"/>
         </p:style>
       </p:sp>
@@ -8973,7 +8721,7 @@
           <p:cNvPr id="5" name="spectrum-underlay-1">
             <a:extLst xmlns:a="http://schemas.openxmlformats.org/drawingml/2006/main">
               <a:ext uri="{FF2B5EF4-FFF2-40B4-BE49-F238E27FC236}">
-                <a16:creationId xmlns:a16="http://schemas.microsoft.com/office/drawing/2014/main" id="{F4FBBA03-5480-43C4-81A6-BE3DD83084FF}"/>
+                <a16:creationId xmlns:a16="http://schemas.microsoft.com/office/drawing/2014/main" id="{5A58902D-6956-4767-B699-DCE5127A2E21}"/>
               </a:ext>
             </a:extLst>
           </p:cNvPr>
@@ -9006,7 +8754,7 @@
           <p:cNvPr id="6" name="spectrum-card-1">
             <a:extLst xmlns:a="http://schemas.openxmlformats.org/drawingml/2006/main">
               <a:ext uri="{FF2B5EF4-FFF2-40B4-BE49-F238E27FC236}">
-                <a16:creationId xmlns:a16="http://schemas.microsoft.com/office/drawing/2014/main" id="{C0AB5767-FB59-4672-A316-9BFD39EAD898}"/>
+                <a16:creationId xmlns:a16="http://schemas.microsoft.com/office/drawing/2014/main" id="{4F93AE9E-6D5C-4666-8B06-E187E5365C32}"/>
               </a:ext>
             </a:extLst>
           </p:cNvPr>
@@ -9038,7 +8786,7 @@
         <p:style>
           <a:lnRef xmlns:a="http://schemas.openxmlformats.org/drawingml/2006/main" idx="0"/>
           <a:fillRef xmlns:a="http://schemas.openxmlformats.org/drawingml/2006/main" idx="0"/>
-          <a:effectRef xmlns:a="http://schemas.openxmlformats.org/drawingml/2006/main" idx="25"/>
+          <a:effectRef xmlns:a="http://schemas.openxmlformats.org/drawingml/2006/main" idx="11"/>
           <a:fontRef xmlns:a="http://schemas.openxmlformats.org/drawingml/2006/main" idx="major"/>
         </p:style>
       </p:sp>
@@ -9047,7 +8795,7 @@
           <p:cNvPr id="7" name="spectrum-underlay-2">
             <a:extLst xmlns:a="http://schemas.openxmlformats.org/drawingml/2006/main">
               <a:ext uri="{FF2B5EF4-FFF2-40B4-BE49-F238E27FC236}">
-                <a16:creationId xmlns:a16="http://schemas.microsoft.com/office/drawing/2014/main" id="{BFE83373-7823-4C64-B17B-7FA839342036}"/>
+                <a16:creationId xmlns:a16="http://schemas.microsoft.com/office/drawing/2014/main" id="{5067A77C-CCE5-491E-A1E8-510BDD9F2387}"/>
               </a:ext>
             </a:extLst>
           </p:cNvPr>
@@ -9080,7 +8828,7 @@
           <p:cNvPr id="8" name="spectrum-card-2">
             <a:extLst xmlns:a="http://schemas.openxmlformats.org/drawingml/2006/main">
               <a:ext uri="{FF2B5EF4-FFF2-40B4-BE49-F238E27FC236}">
-                <a16:creationId xmlns:a16="http://schemas.microsoft.com/office/drawing/2014/main" id="{55D9F89C-3FDB-4F7C-9071-8D940A04A835}"/>
+                <a16:creationId xmlns:a16="http://schemas.microsoft.com/office/drawing/2014/main" id="{C035703C-D853-434B-8613-10ED01F19290}"/>
               </a:ext>
             </a:extLst>
           </p:cNvPr>
@@ -9112,7 +8860,7 @@
         <p:style>
           <a:lnRef xmlns:a="http://schemas.openxmlformats.org/drawingml/2006/main" idx="0"/>
           <a:fillRef xmlns:a="http://schemas.openxmlformats.org/drawingml/2006/main" idx="0"/>
-          <a:effectRef xmlns:a="http://schemas.openxmlformats.org/drawingml/2006/main" idx="24"/>
+          <a:effectRef xmlns:a="http://schemas.openxmlformats.org/drawingml/2006/main" idx="10"/>
           <a:fontRef xmlns:a="http://schemas.openxmlformats.org/drawingml/2006/main" idx="major"/>
         </p:style>
       </p:sp>
@@ -9121,7 +8869,7 @@
           <p:cNvPr id="9" name="spectrum-underlay-3">
             <a:extLst xmlns:a="http://schemas.openxmlformats.org/drawingml/2006/main">
               <a:ext uri="{FF2B5EF4-FFF2-40B4-BE49-F238E27FC236}">
-                <a16:creationId xmlns:a16="http://schemas.microsoft.com/office/drawing/2014/main" id="{861BBF34-3FC8-4C64-9F2D-13E133ED8FED}"/>
+                <a16:creationId xmlns:a16="http://schemas.microsoft.com/office/drawing/2014/main" id="{16824C26-73AC-4C59-81D4-80631CBC4752}"/>
               </a:ext>
             </a:extLst>
           </p:cNvPr>
@@ -9154,7 +8902,7 @@
           <p:cNvPr id="10" name="spectrum-card-3">
             <a:extLst xmlns:a="http://schemas.openxmlformats.org/drawingml/2006/main">
               <a:ext uri="{FF2B5EF4-FFF2-40B4-BE49-F238E27FC236}">
-                <a16:creationId xmlns:a16="http://schemas.microsoft.com/office/drawing/2014/main" id="{02710BE4-B81A-4D39-9596-CE3ECCDD226F}"/>
+                <a16:creationId xmlns:a16="http://schemas.microsoft.com/office/drawing/2014/main" id="{F6417434-A1C6-4DA7-B806-24DABDD0F051}"/>
               </a:ext>
             </a:extLst>
           </p:cNvPr>
@@ -9186,7 +8934,7 @@
         <p:style>
           <a:lnRef xmlns:a="http://schemas.openxmlformats.org/drawingml/2006/main" idx="0"/>
           <a:fillRef xmlns:a="http://schemas.openxmlformats.org/drawingml/2006/main" idx="0"/>
-          <a:effectRef xmlns:a="http://schemas.openxmlformats.org/drawingml/2006/main" idx="24"/>
+          <a:effectRef xmlns:a="http://schemas.openxmlformats.org/drawingml/2006/main" idx="10"/>
           <a:fontRef xmlns:a="http://schemas.openxmlformats.org/drawingml/2006/main" idx="major"/>
         </p:style>
       </p:sp>
@@ -9195,7 +8943,7 @@
           <p:cNvPr id="11" name="spectrum-axis">
             <a:extLst xmlns:a="http://schemas.openxmlformats.org/drawingml/2006/main">
               <a:ext uri="{FF2B5EF4-FFF2-40B4-BE49-F238E27FC236}">
-                <a16:creationId xmlns:a16="http://schemas.microsoft.com/office/drawing/2014/main" id="{78A3D1B2-76E9-4C3B-9F15-940EC1E9E88F}"/>
+                <a16:creationId xmlns:a16="http://schemas.microsoft.com/office/drawing/2014/main" id="{6B8EF5FD-A859-4B94-A207-CDB9FD5F30F9}"/>
               </a:ext>
             </a:extLst>
           </p:cNvPr>
@@ -9228,7 +8976,7 @@
           <p:cNvPr id="12" name="spectrum-axis-arrow">
             <a:extLst xmlns:a="http://schemas.openxmlformats.org/drawingml/2006/main">
               <a:ext uri="{FF2B5EF4-FFF2-40B4-BE49-F238E27FC236}">
-                <a16:creationId xmlns:a16="http://schemas.microsoft.com/office/drawing/2014/main" id="{54925710-7184-40C0-B9E0-25B39D3FF498}"/>
+                <a16:creationId xmlns:a16="http://schemas.microsoft.com/office/drawing/2014/main" id="{58D26DF8-653E-467D-ABF1-3D39153C967D}"/>
               </a:ext>
             </a:extLst>
           </p:cNvPr>
@@ -9361,7 +9109,7 @@
           <p:cNvPr id="13" name="spectrum-axis-low">
             <a:extLst xmlns:a="http://schemas.openxmlformats.org/drawingml/2006/main">
               <a:ext uri="{FF2B5EF4-FFF2-40B4-BE49-F238E27FC236}">
-                <a16:creationId xmlns:a16="http://schemas.microsoft.com/office/drawing/2014/main" id="{E84CF766-2C23-41F2-82FF-AC66C2C50664}"/>
+                <a16:creationId xmlns:a16="http://schemas.microsoft.com/office/drawing/2014/main" id="{DCE8CB22-4B8B-493D-9C14-0B0905064715}"/>
               </a:ext>
             </a:extLst>
           </p:cNvPr>
@@ -9423,7 +9171,7 @@
           <p:cNvPr id="14" name="spectrum-axis-label">
             <a:extLst xmlns:a="http://schemas.openxmlformats.org/drawingml/2006/main">
               <a:ext uri="{FF2B5EF4-FFF2-40B4-BE49-F238E27FC236}">
-                <a16:creationId xmlns:a16="http://schemas.microsoft.com/office/drawing/2014/main" id="{F09B9D80-3930-4EC1-8E5C-71E3350690AB}"/>
+                <a16:creationId xmlns:a16="http://schemas.microsoft.com/office/drawing/2014/main" id="{7A301F02-8C4E-490E-B2F4-94EC7BEEA0EF}"/>
               </a:ext>
             </a:extLst>
           </p:cNvPr>
@@ -9485,7 +9233,7 @@
           <p:cNvPr id="15" name="spectrum-axis-high">
             <a:extLst xmlns:a="http://schemas.openxmlformats.org/drawingml/2006/main">
               <a:ext uri="{FF2B5EF4-FFF2-40B4-BE49-F238E27FC236}">
-                <a16:creationId xmlns:a16="http://schemas.microsoft.com/office/drawing/2014/main" id="{5800C76F-E745-4F71-B87D-6E34E0BFBAFD}"/>
+                <a16:creationId xmlns:a16="http://schemas.microsoft.com/office/drawing/2014/main" id="{A842E004-18E7-4B37-98A5-EDE54512DB11}"/>
               </a:ext>
             </a:extLst>
           </p:cNvPr>
@@ -9547,7 +9295,7 @@
           <p:cNvPr id="16" name="spectrum-order-0">
             <a:extLst xmlns:a="http://schemas.openxmlformats.org/drawingml/2006/main">
               <a:ext uri="{FF2B5EF4-FFF2-40B4-BE49-F238E27FC236}">
-                <a16:creationId xmlns:a16="http://schemas.microsoft.com/office/drawing/2014/main" id="{8FDC088F-EA98-4475-8C58-44E2E08D7604}"/>
+                <a16:creationId xmlns:a16="http://schemas.microsoft.com/office/drawing/2014/main" id="{6D7A4D1E-50E1-4624-A1E3-373819443715}"/>
               </a:ext>
             </a:extLst>
           </p:cNvPr>
@@ -9609,7 +9357,7 @@
           <p:cNvPr id="17" name="spectrum-title-0">
             <a:extLst xmlns:a="http://schemas.openxmlformats.org/drawingml/2006/main">
               <a:ext uri="{FF2B5EF4-FFF2-40B4-BE49-F238E27FC236}">
-                <a16:creationId xmlns:a16="http://schemas.microsoft.com/office/drawing/2014/main" id="{B17DAAF1-DA25-43E7-940D-DADFD0107B83}"/>
+                <a16:creationId xmlns:a16="http://schemas.microsoft.com/office/drawing/2014/main" id="{3C1E1832-4CC8-43A9-859F-3132FF168A72}"/>
               </a:ext>
             </a:extLst>
           </p:cNvPr>
@@ -9620,7 +9368,7 @@
         </p:nvSpPr>
         <p:spPr>
           <a:xfrm xmlns:a="http://schemas.openxmlformats.org/drawingml/2006/main" rot="0">
-            <a:off x="1266825" y="3497313"/>
+            <a:off x="1266825" y="3541519"/>
             <a:ext cx="1985963" cy="333375"/>
           </a:xfrm>
           <a:prstGeom xmlns:a="http://schemas.openxmlformats.org/drawingml/2006/main" prst="rect">
@@ -9633,7 +9381,7 @@
           </a:ln>
         </p:spPr>
         <p:txBody>
-          <a:bodyPr xmlns:a="http://schemas.openxmlformats.org/drawingml/2006/main" wrap="square" lIns="0" tIns="0" rIns="0" bIns="0" anchor="ctr">
+          <a:bodyPr xmlns:a="http://schemas.openxmlformats.org/drawingml/2006/main" wrap="none" lIns="0" tIns="0" rIns="0" bIns="0" anchor="ctr">
             <a:noAutofit/>
           </a:bodyPr>
           <a:lstStyle xmlns:a="http://schemas.openxmlformats.org/drawingml/2006/main"/>
@@ -9671,7 +9419,7 @@
           <p:cNvPr id="18" name="spectrum-body-0">
             <a:extLst xmlns:a="http://schemas.openxmlformats.org/drawingml/2006/main">
               <a:ext uri="{FF2B5EF4-FFF2-40B4-BE49-F238E27FC236}">
-                <a16:creationId xmlns:a16="http://schemas.microsoft.com/office/drawing/2014/main" id="{247A21E2-68F4-4516-AF9A-58F124C93297}"/>
+                <a16:creationId xmlns:a16="http://schemas.microsoft.com/office/drawing/2014/main" id="{380059D9-4765-44BE-A7A3-945353D2DD7A}"/>
               </a:ext>
             </a:extLst>
           </p:cNvPr>
@@ -9682,8 +9430,8 @@
         </p:nvSpPr>
         <p:spPr>
           <a:xfrm xmlns:a="http://schemas.openxmlformats.org/drawingml/2006/main" rot="0">
-            <a:off x="1266825" y="3944988"/>
-            <a:ext cx="1985963" cy="587273"/>
+            <a:off x="1266825" y="3970144"/>
+            <a:ext cx="1985963" cy="517922"/>
           </a:xfrm>
           <a:prstGeom xmlns:a="http://schemas.openxmlformats.org/drawingml/2006/main" prst="rect">
             <a:avLst/>
@@ -9705,7 +9453,7 @@
                 <a:spcPct val="136000"/>
               </a:lnSpc>
               <a:buNone/>
-              <a:defRPr sz="1700" b="0" i="0">
+              <a:defRPr sz="1500" b="0" i="0">
                 <a:solidFill>
                   <a:srgbClr val="526174"/>
                 </a:solidFill>
@@ -9715,7 +9463,7 @@
               </a:defRPr>
             </a:pPr>
             <a:r>
-              <a:rPr sz="1700" b="0" i="0">
+              <a:rPr sz="1500" b="0" i="0">
                 <a:solidFill>
                   <a:srgbClr val="526174"/>
                 </a:solidFill>
@@ -9723,7 +9471,7 @@
                 <a:ea typeface="Microsoft YaHei"/>
                 <a:cs typeface="Microsoft YaHei"/>
               </a:rPr>
-              <a:t>不重视版式，直接堆</a:t>
+              <a:t>不重视版式，直接堆放</a:t>
             </a:r>
           </a:p>
           <a:p xmlns:a="http://schemas.openxmlformats.org/drawingml/2006/main">
@@ -9732,7 +9480,7 @@
                 <a:spcPct val="136000"/>
               </a:lnSpc>
               <a:buNone/>
-              <a:defRPr sz="1700" b="0" i="0">
+              <a:defRPr sz="1500" b="0" i="0">
                 <a:solidFill>
                   <a:srgbClr val="526174"/>
                 </a:solidFill>
@@ -9742,7 +9490,7 @@
               </a:defRPr>
             </a:pPr>
             <a:r>
-              <a:rPr sz="1700" b="0" i="0">
+              <a:rPr sz="1500" b="0" i="0">
                 <a:solidFill>
                   <a:srgbClr val="526174"/>
                 </a:solidFill>
@@ -9750,7 +9498,7 @@
                 <a:ea typeface="Microsoft YaHei"/>
                 <a:cs typeface="Microsoft YaHei"/>
               </a:rPr>
-              <a:t>放文字也能接受</a:t>
+              <a:t>文字也能接受</a:t>
             </a:r>
           </a:p>
         </p:txBody>
@@ -9760,7 +9508,7 @@
           <p:cNvPr id="19" name="spectrum-order-1">
             <a:extLst xmlns:a="http://schemas.openxmlformats.org/drawingml/2006/main">
               <a:ext uri="{FF2B5EF4-FFF2-40B4-BE49-F238E27FC236}">
-                <a16:creationId xmlns:a16="http://schemas.microsoft.com/office/drawing/2014/main" id="{D2C6BB88-BA9E-4B39-90D1-CD0C2DE244EC}"/>
+                <a16:creationId xmlns:a16="http://schemas.microsoft.com/office/drawing/2014/main" id="{5625E979-5485-4A24-AC5A-0A68E942C3E5}"/>
               </a:ext>
             </a:extLst>
           </p:cNvPr>
@@ -9822,7 +9570,7 @@
           <p:cNvPr id="20" name="spectrum-title-1">
             <a:extLst xmlns:a="http://schemas.openxmlformats.org/drawingml/2006/main">
               <a:ext uri="{FF2B5EF4-FFF2-40B4-BE49-F238E27FC236}">
-                <a16:creationId xmlns:a16="http://schemas.microsoft.com/office/drawing/2014/main" id="{98DCD9DD-959E-4276-9368-80083209A4C7}"/>
+                <a16:creationId xmlns:a16="http://schemas.microsoft.com/office/drawing/2014/main" id="{49B9EC7D-45A4-49E8-8ABA-96D3F2BF83AD}"/>
               </a:ext>
             </a:extLst>
           </p:cNvPr>
@@ -9833,7 +9581,7 @@
         </p:nvSpPr>
         <p:spPr>
           <a:xfrm xmlns:a="http://schemas.openxmlformats.org/drawingml/2006/main" rot="0">
-            <a:off x="3824288" y="3207544"/>
+            <a:off x="3824288" y="3398644"/>
             <a:ext cx="1985963" cy="333375"/>
           </a:xfrm>
           <a:prstGeom xmlns:a="http://schemas.openxmlformats.org/drawingml/2006/main" prst="rect">
@@ -9846,7 +9594,7 @@
           </a:ln>
         </p:spPr>
         <p:txBody>
-          <a:bodyPr xmlns:a="http://schemas.openxmlformats.org/drawingml/2006/main" wrap="square" lIns="0" tIns="0" rIns="0" bIns="0" anchor="ctr">
+          <a:bodyPr xmlns:a="http://schemas.openxmlformats.org/drawingml/2006/main" wrap="none" lIns="0" tIns="0" rIns="0" bIns="0" anchor="ctr">
             <a:noAutofit/>
           </a:bodyPr>
           <a:lstStyle xmlns:a="http://schemas.openxmlformats.org/drawingml/2006/main"/>
@@ -9884,7 +9632,7 @@
           <p:cNvPr id="21" name="spectrum-body-1">
             <a:extLst xmlns:a="http://schemas.openxmlformats.org/drawingml/2006/main">
               <a:ext uri="{FF2B5EF4-FFF2-40B4-BE49-F238E27FC236}">
-                <a16:creationId xmlns:a16="http://schemas.microsoft.com/office/drawing/2014/main" id="{E8019EA3-7931-4174-AED0-A9A8E60D1C60}"/>
+                <a16:creationId xmlns:a16="http://schemas.microsoft.com/office/drawing/2014/main" id="{33B68788-7DE6-4AFE-AD81-C61500A9F2B4}"/>
               </a:ext>
             </a:extLst>
           </p:cNvPr>
@@ -9895,8 +9643,8 @@
         </p:nvSpPr>
         <p:spPr>
           <a:xfrm xmlns:a="http://schemas.openxmlformats.org/drawingml/2006/main" rot="0">
-            <a:off x="3824288" y="3655219"/>
-            <a:ext cx="1985963" cy="880910"/>
+            <a:off x="3824288" y="3827269"/>
+            <a:ext cx="1985963" cy="517922"/>
           </a:xfrm>
           <a:prstGeom xmlns:a="http://schemas.openxmlformats.org/drawingml/2006/main" prst="rect">
             <a:avLst/>
@@ -9918,7 +9666,7 @@
                 <a:spcPct val="136000"/>
               </a:lnSpc>
               <a:buNone/>
-              <a:defRPr sz="1700" b="0" i="0">
+              <a:defRPr sz="1500" b="0" i="0">
                 <a:solidFill>
                   <a:srgbClr val="FFFFFF"/>
                 </a:solidFill>
@@ -9928,7 +9676,7 @@
               </a:defRPr>
             </a:pPr>
             <a:r>
-              <a:rPr sz="1700" b="0" i="0">
+              <a:rPr sz="1500" b="0" i="0">
                 <a:solidFill>
                   <a:srgbClr val="FFFFFF"/>
                 </a:solidFill>
@@ -9936,7 +9684,7 @@
                 <a:ea typeface="Microsoft YaHei"/>
                 <a:cs typeface="Microsoft YaHei"/>
               </a:rPr>
-              <a:t>结构清楚、视觉规</a:t>
+              <a:t>结构清楚、视觉规范、</a:t>
             </a:r>
           </a:p>
           <a:p xmlns:a="http://schemas.openxmlformats.org/drawingml/2006/main">
@@ -9945,7 +9693,7 @@
                 <a:spcPct val="136000"/>
               </a:lnSpc>
               <a:buNone/>
-              <a:defRPr sz="1700" b="0" i="0">
+              <a:defRPr sz="1500" b="0" i="0">
                 <a:solidFill>
                   <a:srgbClr val="FFFFFF"/>
                 </a:solidFill>
@@ -9955,7 +9703,7 @@
               </a:defRPr>
             </a:pPr>
             <a:r>
-              <a:rPr sz="1700" b="0" i="0">
+              <a:rPr sz="1500" b="0" i="0">
                 <a:solidFill>
                   <a:srgbClr val="FFFFFF"/>
                 </a:solidFill>
@@ -9963,34 +9711,7 @@
                 <a:ea typeface="Microsoft YaHei"/>
                 <a:cs typeface="Microsoft YaHei"/>
               </a:rPr>
-              <a:t>范、稳定可靠且可修</a:t>
-            </a:r>
-          </a:p>
-          <a:p xmlns:a="http://schemas.openxmlformats.org/drawingml/2006/main">
-            <a:pPr algn="ctr">
-              <a:lnSpc>
-                <a:spcPct val="136000"/>
-              </a:lnSpc>
-              <a:buNone/>
-              <a:defRPr sz="1700" b="0" i="0">
-                <a:solidFill>
-                  <a:srgbClr val="FFFFFF"/>
-                </a:solidFill>
-                <a:latin typeface="Microsoft YaHei"/>
-                <a:ea typeface="Microsoft YaHei"/>
-                <a:cs typeface="Microsoft YaHei"/>
-              </a:defRPr>
-            </a:pPr>
-            <a:r>
-              <a:rPr sz="1700" b="0" i="0">
-                <a:solidFill>
-                  <a:srgbClr val="FFFFFF"/>
-                </a:solidFill>
-                <a:latin typeface="Microsoft YaHei"/>
-                <a:ea typeface="Microsoft YaHei"/>
-                <a:cs typeface="Microsoft YaHei"/>
-              </a:rPr>
-              <a:t>改</a:t>
+              <a:t>稳定可靠且可修改</a:t>
             </a:r>
           </a:p>
         </p:txBody>
@@ -10000,7 +9721,7 @@
           <p:cNvPr id="22" name="spectrum-order-2">
             <a:extLst xmlns:a="http://schemas.openxmlformats.org/drawingml/2006/main">
               <a:ext uri="{FF2B5EF4-FFF2-40B4-BE49-F238E27FC236}">
-                <a16:creationId xmlns:a16="http://schemas.microsoft.com/office/drawing/2014/main" id="{7F052D41-B526-45B4-A312-3D58C7555C1D}"/>
+                <a16:creationId xmlns:a16="http://schemas.microsoft.com/office/drawing/2014/main" id="{1F030D5A-0B36-45A5-975D-C021D8CA9729}"/>
               </a:ext>
             </a:extLst>
           </p:cNvPr>
@@ -10062,7 +9783,7 @@
           <p:cNvPr id="23" name="spectrum-title-2">
             <a:extLst xmlns:a="http://schemas.openxmlformats.org/drawingml/2006/main">
               <a:ext uri="{FF2B5EF4-FFF2-40B4-BE49-F238E27FC236}">
-                <a16:creationId xmlns:a16="http://schemas.microsoft.com/office/drawing/2014/main" id="{AFEE65D9-FEE3-43C3-9664-42CF87ECFAE2}"/>
+                <a16:creationId xmlns:a16="http://schemas.microsoft.com/office/drawing/2014/main" id="{F54C6AAD-DB5D-48D9-B026-9A2DF6B783A3}"/>
               </a:ext>
             </a:extLst>
           </p:cNvPr>
@@ -10073,7 +9794,7 @@
         </p:nvSpPr>
         <p:spPr>
           <a:xfrm xmlns:a="http://schemas.openxmlformats.org/drawingml/2006/main" rot="0">
-            <a:off x="6381750" y="3497313"/>
+            <a:off x="6381750" y="3541519"/>
             <a:ext cx="1985963" cy="333375"/>
           </a:xfrm>
           <a:prstGeom xmlns:a="http://schemas.openxmlformats.org/drawingml/2006/main" prst="rect">
@@ -10086,7 +9807,7 @@
           </a:ln>
         </p:spPr>
         <p:txBody>
-          <a:bodyPr xmlns:a="http://schemas.openxmlformats.org/drawingml/2006/main" wrap="square" lIns="0" tIns="0" rIns="0" bIns="0" anchor="ctr">
+          <a:bodyPr xmlns:a="http://schemas.openxmlformats.org/drawingml/2006/main" wrap="none" lIns="0" tIns="0" rIns="0" bIns="0" anchor="ctr">
             <a:noAutofit/>
           </a:bodyPr>
           <a:lstStyle xmlns:a="http://schemas.openxmlformats.org/drawingml/2006/main"/>
@@ -10124,7 +9845,7 @@
           <p:cNvPr id="24" name="spectrum-body-2">
             <a:extLst xmlns:a="http://schemas.openxmlformats.org/drawingml/2006/main">
               <a:ext uri="{FF2B5EF4-FFF2-40B4-BE49-F238E27FC236}">
-                <a16:creationId xmlns:a16="http://schemas.microsoft.com/office/drawing/2014/main" id="{22AF5140-C617-41CD-B34A-895D5AC64D63}"/>
+                <a16:creationId xmlns:a16="http://schemas.microsoft.com/office/drawing/2014/main" id="{DF2F715B-B6E7-4098-8A54-B31E067C96B9}"/>
               </a:ext>
             </a:extLst>
           </p:cNvPr>
@@ -10135,8 +9856,8 @@
         </p:nvSpPr>
         <p:spPr>
           <a:xfrm xmlns:a="http://schemas.openxmlformats.org/drawingml/2006/main" rot="0">
-            <a:off x="6381750" y="3944988"/>
-            <a:ext cx="1985963" cy="587273"/>
+            <a:off x="6381750" y="3970144"/>
+            <a:ext cx="1985963" cy="517922"/>
           </a:xfrm>
           <a:prstGeom xmlns:a="http://schemas.openxmlformats.org/drawingml/2006/main" prst="rect">
             <a:avLst/>
@@ -10158,7 +9879,7 @@
                 <a:spcPct val="136000"/>
               </a:lnSpc>
               <a:buNone/>
-              <a:defRPr sz="1700" b="0" i="0">
+              <a:defRPr sz="1500" b="0" i="0">
                 <a:solidFill>
                   <a:srgbClr val="526174"/>
                 </a:solidFill>
@@ -10168,7 +9889,7 @@
               </a:defRPr>
             </a:pPr>
             <a:r>
-              <a:rPr sz="1700" b="0" i="0">
+              <a:rPr sz="1500" b="0" i="0">
                 <a:solidFill>
                   <a:srgbClr val="526174"/>
                 </a:solidFill>
@@ -10176,7 +9897,7 @@
                 <a:ea typeface="Microsoft YaHei"/>
                 <a:cs typeface="Microsoft YaHei"/>
               </a:rPr>
-              <a:t>发布会、路演和比赛</a:t>
+              <a:t>发布会、路演和比赛需</a:t>
             </a:r>
           </a:p>
           <a:p xmlns:a="http://schemas.openxmlformats.org/drawingml/2006/main">
@@ -10185,7 +9906,7 @@
                 <a:spcPct val="136000"/>
               </a:lnSpc>
               <a:buNone/>
-              <a:defRPr sz="1700" b="0" i="0">
+              <a:defRPr sz="1500" b="0" i="0">
                 <a:solidFill>
                   <a:srgbClr val="526174"/>
                 </a:solidFill>
@@ -10195,7 +9916,7 @@
               </a:defRPr>
             </a:pPr>
             <a:r>
-              <a:rPr sz="1700" b="0" i="0">
+              <a:rPr sz="1500" b="0" i="0">
                 <a:solidFill>
                   <a:srgbClr val="526174"/>
                 </a:solidFill>
@@ -10203,7 +9924,7 @@
                 <a:ea typeface="Microsoft YaHei"/>
                 <a:cs typeface="Microsoft YaHei"/>
               </a:rPr>
-              <a:t>需要高度视觉创意</a:t>
+              <a:t>要高度视觉创意</a:t>
             </a:r>
           </a:p>
         </p:txBody>
@@ -10213,7 +9934,7 @@
           <p:cNvPr id="25" name="spectrum-order-3">
             <a:extLst xmlns:a="http://schemas.openxmlformats.org/drawingml/2006/main">
               <a:ext uri="{FF2B5EF4-FFF2-40B4-BE49-F238E27FC236}">
-                <a16:creationId xmlns:a16="http://schemas.microsoft.com/office/drawing/2014/main" id="{6E2F89D5-7E23-4379-BC20-8C0EF90752C5}"/>
+                <a16:creationId xmlns:a16="http://schemas.microsoft.com/office/drawing/2014/main" id="{AB7D3B9A-39E5-4C19-B5BD-50D2D3680E53}"/>
               </a:ext>
             </a:extLst>
           </p:cNvPr>
@@ -10275,7 +9996,7 @@
           <p:cNvPr id="26" name="spectrum-title-3">
             <a:extLst xmlns:a="http://schemas.openxmlformats.org/drawingml/2006/main">
               <a:ext uri="{FF2B5EF4-FFF2-40B4-BE49-F238E27FC236}">
-                <a16:creationId xmlns:a16="http://schemas.microsoft.com/office/drawing/2014/main" id="{1AAFF18B-4946-4978-9F92-D4A1C7F022DB}"/>
+                <a16:creationId xmlns:a16="http://schemas.microsoft.com/office/drawing/2014/main" id="{CACF14D9-7402-4919-844C-E7B8D3349E42}"/>
               </a:ext>
             </a:extLst>
           </p:cNvPr>
@@ -10286,7 +10007,7 @@
         </p:nvSpPr>
         <p:spPr>
           <a:xfrm xmlns:a="http://schemas.openxmlformats.org/drawingml/2006/main" rot="0">
-            <a:off x="8939213" y="3497313"/>
+            <a:off x="8939213" y="3541519"/>
             <a:ext cx="1985963" cy="333375"/>
           </a:xfrm>
           <a:prstGeom xmlns:a="http://schemas.openxmlformats.org/drawingml/2006/main" prst="rect">
@@ -10299,7 +10020,7 @@
           </a:ln>
         </p:spPr>
         <p:txBody>
-          <a:bodyPr xmlns:a="http://schemas.openxmlformats.org/drawingml/2006/main" wrap="square" lIns="0" tIns="0" rIns="0" bIns="0" anchor="ctr">
+          <a:bodyPr xmlns:a="http://schemas.openxmlformats.org/drawingml/2006/main" wrap="none" lIns="0" tIns="0" rIns="0" bIns="0" anchor="ctr">
             <a:noAutofit/>
           </a:bodyPr>
           <a:lstStyle xmlns:a="http://schemas.openxmlformats.org/drawingml/2006/main"/>
@@ -10337,7 +10058,7 @@
           <p:cNvPr id="27" name="spectrum-body-3">
             <a:extLst xmlns:a="http://schemas.openxmlformats.org/drawingml/2006/main">
               <a:ext uri="{FF2B5EF4-FFF2-40B4-BE49-F238E27FC236}">
-                <a16:creationId xmlns:a16="http://schemas.microsoft.com/office/drawing/2014/main" id="{22395958-3275-449C-A6B5-96B14390F173}"/>
+                <a16:creationId xmlns:a16="http://schemas.microsoft.com/office/drawing/2014/main" id="{7F751567-2798-4B61-A5C6-B65FE70A7945}"/>
               </a:ext>
             </a:extLst>
           </p:cNvPr>
@@ -10348,8 +10069,8 @@
         </p:nvSpPr>
         <p:spPr>
           <a:xfrm xmlns:a="http://schemas.openxmlformats.org/drawingml/2006/main" rot="0">
-            <a:off x="8939213" y="3944988"/>
-            <a:ext cx="1985963" cy="587273"/>
+            <a:off x="8939213" y="3970144"/>
+            <a:ext cx="1985963" cy="517922"/>
           </a:xfrm>
           <a:prstGeom xmlns:a="http://schemas.openxmlformats.org/drawingml/2006/main" prst="rect">
             <a:avLst/>
@@ -10371,7 +10092,7 @@
                 <a:spcPct val="136000"/>
               </a:lnSpc>
               <a:buNone/>
-              <a:defRPr sz="1700" b="0" i="0">
+              <a:defRPr sz="1500" b="0" i="0">
                 <a:solidFill>
                   <a:srgbClr val="526174"/>
                 </a:solidFill>
@@ -10381,7 +10102,7 @@
               </a:defRPr>
             </a:pPr>
             <a:r>
-              <a:rPr sz="1700" b="0" i="0">
+              <a:rPr sz="1500" b="0" i="0">
                 <a:solidFill>
                   <a:srgbClr val="526174"/>
                 </a:solidFill>
@@ -10389,7 +10110,7 @@
                 <a:ea typeface="Microsoft YaHei"/>
                 <a:cs typeface="Microsoft YaHei"/>
               </a:rPr>
-              <a:t>需要专门设计与品牌</a:t>
+              <a:t>需要专门设计与品牌化</a:t>
             </a:r>
           </a:p>
           <a:p xmlns:a="http://schemas.openxmlformats.org/drawingml/2006/main">
@@ -10398,7 +10119,7 @@
                 <a:spcPct val="136000"/>
               </a:lnSpc>
               <a:buNone/>
-              <a:defRPr sz="1700" b="0" i="0">
+              <a:defRPr sz="1500" b="0" i="0">
                 <a:solidFill>
                   <a:srgbClr val="526174"/>
                 </a:solidFill>
@@ -10408,7 +10129,7 @@
               </a:defRPr>
             </a:pPr>
             <a:r>
-              <a:rPr sz="1700" b="0" i="0">
+              <a:rPr sz="1500" b="0" i="0">
                 <a:solidFill>
                   <a:srgbClr val="526174"/>
                 </a:solidFill>
@@ -10416,7 +10137,7 @@
                 <a:ea typeface="Microsoft YaHei"/>
                 <a:cs typeface="Microsoft YaHei"/>
               </a:rPr>
-              <a:t>化表达</a:t>
+              <a:t>表达</a:t>
             </a:r>
           </a:p>
         </p:txBody>
@@ -10426,7 +10147,7 @@
           <p:cNvPr id="28" name="spectrum-focus-label-bg">
             <a:extLst xmlns:a="http://schemas.openxmlformats.org/drawingml/2006/main">
               <a:ext uri="{FF2B5EF4-FFF2-40B4-BE49-F238E27FC236}">
-                <a16:creationId xmlns:a16="http://schemas.microsoft.com/office/drawing/2014/main" id="{C55CBD0E-ECC1-4642-B12E-258247FD6989}"/>
+                <a16:creationId xmlns:a16="http://schemas.microsoft.com/office/drawing/2014/main" id="{56A38AC6-88C7-41F1-A251-703005329B8E}"/>
               </a:ext>
             </a:extLst>
           </p:cNvPr>
@@ -10459,7 +10180,7 @@
           <p:cNvPr id="29" name="spectrum-focus-label">
             <a:extLst xmlns:a="http://schemas.openxmlformats.org/drawingml/2006/main">
               <a:ext uri="{FF2B5EF4-FFF2-40B4-BE49-F238E27FC236}">
-                <a16:creationId xmlns:a16="http://schemas.microsoft.com/office/drawing/2014/main" id="{12477FCB-F9BC-4F77-8131-BBD0687FEA78}"/>
+                <a16:creationId xmlns:a16="http://schemas.microsoft.com/office/drawing/2014/main" id="{30D205F9-738B-4566-8FD7-F1A41DA1BBD0}"/>
               </a:ext>
             </a:extLst>
           </p:cNvPr>
@@ -10519,7 +10240,7 @@
     </p:spTree>
     <p:extLst>
       <p:ext uri="{BB962C8B-B14F-4D97-AF65-F5344CB8AC3E}">
-        <p14:creationId xmlns:p14="http://schemas.microsoft.com/office/powerpoint/2010/main" val="1043148030"/>
+        <p14:creationId xmlns:p14="http://schemas.microsoft.com/office/powerpoint/2010/main" val="554800759"/>
       </p:ext>
     </p:extLst>
   </p:cSld>
@@ -10550,7 +10271,7 @@
           <p:cNvPr id="30" name="spectrum-density-fill">
             <a:extLst xmlns:a="http://schemas.openxmlformats.org/drawingml/2006/main">
               <a:ext uri="{FF2B5EF4-FFF2-40B4-BE49-F238E27FC236}">
-                <a16:creationId xmlns:a16="http://schemas.microsoft.com/office/drawing/2014/main" id="{936FABE0-52C9-449B-A0D9-881C048B3210}"/>
+                <a16:creationId xmlns:a16="http://schemas.microsoft.com/office/drawing/2014/main" id="{646D3DAD-B098-41A4-A009-66F1B8CEFA85}"/>
               </a:ext>
             </a:extLst>
           </p:cNvPr>
@@ -11308,7 +11029,7 @@
           <p:cNvPr id="2" name="spectrum-density-curve">
             <a:extLst xmlns:a="http://schemas.openxmlformats.org/drawingml/2006/main">
               <a:ext uri="{FF2B5EF4-FFF2-40B4-BE49-F238E27FC236}">
-                <a16:creationId xmlns:a16="http://schemas.microsoft.com/office/drawing/2014/main" id="{832A589F-F303-49D1-9E67-3F7D918B82E4}"/>
+                <a16:creationId xmlns:a16="http://schemas.microsoft.com/office/drawing/2014/main" id="{ECC67C52-BFED-4738-A08D-762EBEB0095D}"/>
               </a:ext>
             </a:extLst>
           </p:cNvPr>
@@ -12065,7 +11786,7 @@
           <p:cNvPr id="3" name="spectrum-underlay-0">
             <a:extLst xmlns:a="http://schemas.openxmlformats.org/drawingml/2006/main">
               <a:ext uri="{FF2B5EF4-FFF2-40B4-BE49-F238E27FC236}">
-                <a16:creationId xmlns:a16="http://schemas.microsoft.com/office/drawing/2014/main" id="{4056EAC5-3AD7-4ACF-AB96-4FCA28B5595C}"/>
+                <a16:creationId xmlns:a16="http://schemas.microsoft.com/office/drawing/2014/main" id="{4672AF8D-C49B-4AEE-A862-F651F0DD7483}"/>
               </a:ext>
             </a:extLst>
           </p:cNvPr>
@@ -12098,7 +11819,7 @@
           <p:cNvPr id="4" name="spectrum-card-0">
             <a:extLst xmlns:a="http://schemas.openxmlformats.org/drawingml/2006/main">
               <a:ext uri="{FF2B5EF4-FFF2-40B4-BE49-F238E27FC236}">
-                <a16:creationId xmlns:a16="http://schemas.microsoft.com/office/drawing/2014/main" id="{CC47F100-6604-47C9-BE1A-54880880F4AB}"/>
+                <a16:creationId xmlns:a16="http://schemas.microsoft.com/office/drawing/2014/main" id="{D2DBD11A-666E-4A28-950E-9791057FB7AF}"/>
               </a:ext>
             </a:extLst>
           </p:cNvPr>
@@ -12130,7 +11851,7 @@
         <p:style>
           <a:lnRef xmlns:a="http://schemas.openxmlformats.org/drawingml/2006/main" idx="0"/>
           <a:fillRef xmlns:a="http://schemas.openxmlformats.org/drawingml/2006/main" idx="0"/>
-          <a:effectRef xmlns:a="http://schemas.openxmlformats.org/drawingml/2006/main" idx="24"/>
+          <a:effectRef xmlns:a="http://schemas.openxmlformats.org/drawingml/2006/main" idx="10"/>
           <a:fontRef xmlns:a="http://schemas.openxmlformats.org/drawingml/2006/main" idx="major"/>
         </p:style>
       </p:sp>
@@ -12139,7 +11860,7 @@
           <p:cNvPr id="5" name="spectrum-underlay-1">
             <a:extLst xmlns:a="http://schemas.openxmlformats.org/drawingml/2006/main">
               <a:ext uri="{FF2B5EF4-FFF2-40B4-BE49-F238E27FC236}">
-                <a16:creationId xmlns:a16="http://schemas.microsoft.com/office/drawing/2014/main" id="{421A2F7A-13FA-460E-BE7B-DFB75351C4FF}"/>
+                <a16:creationId xmlns:a16="http://schemas.microsoft.com/office/drawing/2014/main" id="{2F4E7303-D4FD-4F65-BFD4-A3AA73E752C8}"/>
               </a:ext>
             </a:extLst>
           </p:cNvPr>
@@ -12172,7 +11893,7 @@
           <p:cNvPr id="6" name="spectrum-card-1">
             <a:extLst xmlns:a="http://schemas.openxmlformats.org/drawingml/2006/main">
               <a:ext uri="{FF2B5EF4-FFF2-40B4-BE49-F238E27FC236}">
-                <a16:creationId xmlns:a16="http://schemas.microsoft.com/office/drawing/2014/main" id="{D5A68762-2E60-4A1D-903B-966EA0865659}"/>
+                <a16:creationId xmlns:a16="http://schemas.microsoft.com/office/drawing/2014/main" id="{1996BAD8-B73C-433C-9AAD-F01E47381629}"/>
               </a:ext>
             </a:extLst>
           </p:cNvPr>
@@ -12204,7 +11925,7 @@
         <p:style>
           <a:lnRef xmlns:a="http://schemas.openxmlformats.org/drawingml/2006/main" idx="0"/>
           <a:fillRef xmlns:a="http://schemas.openxmlformats.org/drawingml/2006/main" idx="0"/>
-          <a:effectRef xmlns:a="http://schemas.openxmlformats.org/drawingml/2006/main" idx="24"/>
+          <a:effectRef xmlns:a="http://schemas.openxmlformats.org/drawingml/2006/main" idx="10"/>
           <a:fontRef xmlns:a="http://schemas.openxmlformats.org/drawingml/2006/main" idx="major"/>
         </p:style>
       </p:sp>
@@ -12213,7 +11934,7 @@
           <p:cNvPr id="7" name="spectrum-underlay-2">
             <a:extLst xmlns:a="http://schemas.openxmlformats.org/drawingml/2006/main">
               <a:ext uri="{FF2B5EF4-FFF2-40B4-BE49-F238E27FC236}">
-                <a16:creationId xmlns:a16="http://schemas.microsoft.com/office/drawing/2014/main" id="{F216AF8B-2ACE-4937-B4DA-D67CE5CA2474}"/>
+                <a16:creationId xmlns:a16="http://schemas.microsoft.com/office/drawing/2014/main" id="{0F2079A9-E3C1-476B-956E-DA85F45D3C4E}"/>
               </a:ext>
             </a:extLst>
           </p:cNvPr>
@@ -12246,7 +11967,7 @@
           <p:cNvPr id="8" name="spectrum-card-2">
             <a:extLst xmlns:a="http://schemas.openxmlformats.org/drawingml/2006/main">
               <a:ext uri="{FF2B5EF4-FFF2-40B4-BE49-F238E27FC236}">
-                <a16:creationId xmlns:a16="http://schemas.microsoft.com/office/drawing/2014/main" id="{FA263F82-4948-40D0-AA9C-0ECC254C5A80}"/>
+                <a16:creationId xmlns:a16="http://schemas.microsoft.com/office/drawing/2014/main" id="{FB570CB1-A8F7-4EE6-9AA3-6D65FB49E7FD}"/>
               </a:ext>
             </a:extLst>
           </p:cNvPr>
@@ -12278,7 +11999,7 @@
         <p:style>
           <a:lnRef xmlns:a="http://schemas.openxmlformats.org/drawingml/2006/main" idx="0"/>
           <a:fillRef xmlns:a="http://schemas.openxmlformats.org/drawingml/2006/main" idx="0"/>
-          <a:effectRef xmlns:a="http://schemas.openxmlformats.org/drawingml/2006/main" idx="25"/>
+          <a:effectRef xmlns:a="http://schemas.openxmlformats.org/drawingml/2006/main" idx="11"/>
           <a:fontRef xmlns:a="http://schemas.openxmlformats.org/drawingml/2006/main" idx="major"/>
         </p:style>
       </p:sp>
@@ -12287,7 +12008,7 @@
           <p:cNvPr id="9" name="spectrum-underlay-3">
             <a:extLst xmlns:a="http://schemas.openxmlformats.org/drawingml/2006/main">
               <a:ext uri="{FF2B5EF4-FFF2-40B4-BE49-F238E27FC236}">
-                <a16:creationId xmlns:a16="http://schemas.microsoft.com/office/drawing/2014/main" id="{6D0BACE5-C85E-4A2C-8494-124E2330BDC3}"/>
+                <a16:creationId xmlns:a16="http://schemas.microsoft.com/office/drawing/2014/main" id="{57DD1D90-75ED-4E9B-8779-EC1542132DDD}"/>
               </a:ext>
             </a:extLst>
           </p:cNvPr>
@@ -12320,7 +12041,7 @@
           <p:cNvPr id="10" name="spectrum-card-3">
             <a:extLst xmlns:a="http://schemas.openxmlformats.org/drawingml/2006/main">
               <a:ext uri="{FF2B5EF4-FFF2-40B4-BE49-F238E27FC236}">
-                <a16:creationId xmlns:a16="http://schemas.microsoft.com/office/drawing/2014/main" id="{4B6511ED-0DA2-4CAF-BBBF-CDB837AEBB36}"/>
+                <a16:creationId xmlns:a16="http://schemas.microsoft.com/office/drawing/2014/main" id="{94AF91E6-CFF8-4B1D-89BF-19701A242FDF}"/>
               </a:ext>
             </a:extLst>
           </p:cNvPr>
@@ -12352,7 +12073,7 @@
         <p:style>
           <a:lnRef xmlns:a="http://schemas.openxmlformats.org/drawingml/2006/main" idx="0"/>
           <a:fillRef xmlns:a="http://schemas.openxmlformats.org/drawingml/2006/main" idx="0"/>
-          <a:effectRef xmlns:a="http://schemas.openxmlformats.org/drawingml/2006/main" idx="24"/>
+          <a:effectRef xmlns:a="http://schemas.openxmlformats.org/drawingml/2006/main" idx="10"/>
           <a:fontRef xmlns:a="http://schemas.openxmlformats.org/drawingml/2006/main" idx="major"/>
         </p:style>
       </p:sp>
@@ -12361,7 +12082,7 @@
           <p:cNvPr id="11" name="spectrum-axis">
             <a:extLst xmlns:a="http://schemas.openxmlformats.org/drawingml/2006/main">
               <a:ext uri="{FF2B5EF4-FFF2-40B4-BE49-F238E27FC236}">
-                <a16:creationId xmlns:a16="http://schemas.microsoft.com/office/drawing/2014/main" id="{05357DAA-6A18-4913-9C0C-5708EC7A6CFB}"/>
+                <a16:creationId xmlns:a16="http://schemas.microsoft.com/office/drawing/2014/main" id="{3DAB5A60-5A3A-4450-AB47-CA6FE8DB0A5A}"/>
               </a:ext>
             </a:extLst>
           </p:cNvPr>
@@ -12394,7 +12115,7 @@
           <p:cNvPr id="12" name="spectrum-axis-arrow">
             <a:extLst xmlns:a="http://schemas.openxmlformats.org/drawingml/2006/main">
               <a:ext uri="{FF2B5EF4-FFF2-40B4-BE49-F238E27FC236}">
-                <a16:creationId xmlns:a16="http://schemas.microsoft.com/office/drawing/2014/main" id="{413780B9-6E4F-406C-9189-E87A819C3469}"/>
+                <a16:creationId xmlns:a16="http://schemas.microsoft.com/office/drawing/2014/main" id="{4053C243-7984-4C6E-BB02-ACA814BA7A59}"/>
               </a:ext>
             </a:extLst>
           </p:cNvPr>
@@ -12527,7 +12248,7 @@
           <p:cNvPr id="13" name="spectrum-axis-low">
             <a:extLst xmlns:a="http://schemas.openxmlformats.org/drawingml/2006/main">
               <a:ext uri="{FF2B5EF4-FFF2-40B4-BE49-F238E27FC236}">
-                <a16:creationId xmlns:a16="http://schemas.microsoft.com/office/drawing/2014/main" id="{5CB0877A-DDDF-423F-8C7E-2F6D6EDD8836}"/>
+                <a16:creationId xmlns:a16="http://schemas.microsoft.com/office/drawing/2014/main" id="{B6D1D48D-B416-4716-88CB-69C15608B738}"/>
               </a:ext>
             </a:extLst>
           </p:cNvPr>
@@ -12589,7 +12310,7 @@
           <p:cNvPr id="14" name="spectrum-axis-label">
             <a:extLst xmlns:a="http://schemas.openxmlformats.org/drawingml/2006/main">
               <a:ext uri="{FF2B5EF4-FFF2-40B4-BE49-F238E27FC236}">
-                <a16:creationId xmlns:a16="http://schemas.microsoft.com/office/drawing/2014/main" id="{267510D2-A7E4-405A-BCF3-FC13BE92D331}"/>
+                <a16:creationId xmlns:a16="http://schemas.microsoft.com/office/drawing/2014/main" id="{EB064BE2-1D73-4627-AEDC-42AF54B9C95F}"/>
               </a:ext>
             </a:extLst>
           </p:cNvPr>
@@ -12651,7 +12372,7 @@
           <p:cNvPr id="15" name="spectrum-axis-high">
             <a:extLst xmlns:a="http://schemas.openxmlformats.org/drawingml/2006/main">
               <a:ext uri="{FF2B5EF4-FFF2-40B4-BE49-F238E27FC236}">
-                <a16:creationId xmlns:a16="http://schemas.microsoft.com/office/drawing/2014/main" id="{60910264-EDC7-4545-A3C7-C658BF1EBC45}"/>
+                <a16:creationId xmlns:a16="http://schemas.microsoft.com/office/drawing/2014/main" id="{A61756A6-4B0C-4276-B98E-6DB1FDA11DA9}"/>
               </a:ext>
             </a:extLst>
           </p:cNvPr>
@@ -12713,7 +12434,7 @@
           <p:cNvPr id="16" name="spectrum-order-0">
             <a:extLst xmlns:a="http://schemas.openxmlformats.org/drawingml/2006/main">
               <a:ext uri="{FF2B5EF4-FFF2-40B4-BE49-F238E27FC236}">
-                <a16:creationId xmlns:a16="http://schemas.microsoft.com/office/drawing/2014/main" id="{410011ED-D594-49B5-8BE8-823AD0CA4218}"/>
+                <a16:creationId xmlns:a16="http://schemas.microsoft.com/office/drawing/2014/main" id="{7A7EF8A1-9AA9-4A3A-88AA-D490B215BFBB}"/>
               </a:ext>
             </a:extLst>
           </p:cNvPr>
@@ -12775,7 +12496,7 @@
           <p:cNvPr id="17" name="spectrum-title-0">
             <a:extLst xmlns:a="http://schemas.openxmlformats.org/drawingml/2006/main">
               <a:ext uri="{FF2B5EF4-FFF2-40B4-BE49-F238E27FC236}">
-                <a16:creationId xmlns:a16="http://schemas.microsoft.com/office/drawing/2014/main" id="{F2C90ED9-3849-41BF-BD83-9DDFDA737FBB}"/>
+                <a16:creationId xmlns:a16="http://schemas.microsoft.com/office/drawing/2014/main" id="{37A1270A-589F-45F8-828A-1C8BE7617D90}"/>
               </a:ext>
             </a:extLst>
           </p:cNvPr>
@@ -12786,7 +12507,7 @@
         </p:nvSpPr>
         <p:spPr>
           <a:xfrm xmlns:a="http://schemas.openxmlformats.org/drawingml/2006/main" rot="0">
-            <a:off x="1266825" y="3497313"/>
+            <a:off x="1266825" y="3541519"/>
             <a:ext cx="1985963" cy="333375"/>
           </a:xfrm>
           <a:prstGeom xmlns:a="http://schemas.openxmlformats.org/drawingml/2006/main" prst="rect">
@@ -12799,7 +12520,7 @@
           </a:ln>
         </p:spPr>
         <p:txBody>
-          <a:bodyPr xmlns:a="http://schemas.openxmlformats.org/drawingml/2006/main" wrap="square" lIns="0" tIns="0" rIns="0" bIns="0" anchor="ctr">
+          <a:bodyPr xmlns:a="http://schemas.openxmlformats.org/drawingml/2006/main" wrap="none" lIns="0" tIns="0" rIns="0" bIns="0" anchor="ctr">
             <a:noAutofit/>
           </a:bodyPr>
           <a:lstStyle xmlns:a="http://schemas.openxmlformats.org/drawingml/2006/main"/>
@@ -12837,7 +12558,7 @@
           <p:cNvPr id="18" name="spectrum-body-0">
             <a:extLst xmlns:a="http://schemas.openxmlformats.org/drawingml/2006/main">
               <a:ext uri="{FF2B5EF4-FFF2-40B4-BE49-F238E27FC236}">
-                <a16:creationId xmlns:a16="http://schemas.microsoft.com/office/drawing/2014/main" id="{913C203A-960D-428A-AC76-974F40744152}"/>
+                <a16:creationId xmlns:a16="http://schemas.microsoft.com/office/drawing/2014/main" id="{6337B4DE-88F5-425A-8B9E-740CFA450D6B}"/>
               </a:ext>
             </a:extLst>
           </p:cNvPr>
@@ -12848,8 +12569,8 @@
         </p:nvSpPr>
         <p:spPr>
           <a:xfrm xmlns:a="http://schemas.openxmlformats.org/drawingml/2006/main" rot="0">
-            <a:off x="1266825" y="3944988"/>
-            <a:ext cx="1985963" cy="587273"/>
+            <a:off x="1266825" y="3970144"/>
+            <a:ext cx="1985963" cy="517922"/>
           </a:xfrm>
           <a:prstGeom xmlns:a="http://schemas.openxmlformats.org/drawingml/2006/main" prst="rect">
             <a:avLst/>
@@ -12871,7 +12592,7 @@
                 <a:spcPct val="136000"/>
               </a:lnSpc>
               <a:buNone/>
-              <a:defRPr sz="1700" b="0" i="0">
+              <a:defRPr sz="1500" b="0" i="0">
                 <a:solidFill>
                   <a:srgbClr val="526174"/>
                 </a:solidFill>
@@ -12881,7 +12602,7 @@
               </a:defRPr>
             </a:pPr>
             <a:r>
-              <a:rPr sz="1700" b="0" i="0">
+              <a:rPr sz="1500" b="0" i="0">
                 <a:solidFill>
                   <a:srgbClr val="526174"/>
                 </a:solidFill>
@@ -12889,7 +12610,7 @@
                 <a:ea typeface="Microsoft YaHei"/>
                 <a:cs typeface="Microsoft YaHei"/>
               </a:rPr>
-              <a:t>不重视版式，直接堆</a:t>
+              <a:t>不重视版式，直接堆放</a:t>
             </a:r>
           </a:p>
           <a:p xmlns:a="http://schemas.openxmlformats.org/drawingml/2006/main">
@@ -12898,7 +12619,7 @@
                 <a:spcPct val="136000"/>
               </a:lnSpc>
               <a:buNone/>
-              <a:defRPr sz="1700" b="0" i="0">
+              <a:defRPr sz="1500" b="0" i="0">
                 <a:solidFill>
                   <a:srgbClr val="526174"/>
                 </a:solidFill>
@@ -12908,7 +12629,7 @@
               </a:defRPr>
             </a:pPr>
             <a:r>
-              <a:rPr sz="1700" b="0" i="0">
+              <a:rPr sz="1500" b="0" i="0">
                 <a:solidFill>
                   <a:srgbClr val="526174"/>
                 </a:solidFill>
@@ -12916,7 +12637,7 @@
                 <a:ea typeface="Microsoft YaHei"/>
                 <a:cs typeface="Microsoft YaHei"/>
               </a:rPr>
-              <a:t>放文字也能接受</a:t>
+              <a:t>文字也能接受</a:t>
             </a:r>
           </a:p>
         </p:txBody>
@@ -12926,7 +12647,7 @@
           <p:cNvPr id="19" name="spectrum-order-1">
             <a:extLst xmlns:a="http://schemas.openxmlformats.org/drawingml/2006/main">
               <a:ext uri="{FF2B5EF4-FFF2-40B4-BE49-F238E27FC236}">
-                <a16:creationId xmlns:a16="http://schemas.microsoft.com/office/drawing/2014/main" id="{85E0DB9C-780D-4892-B109-8C055196EC90}"/>
+                <a16:creationId xmlns:a16="http://schemas.microsoft.com/office/drawing/2014/main" id="{C1C2CE42-7351-419D-A93F-BD7041F7CF2E}"/>
               </a:ext>
             </a:extLst>
           </p:cNvPr>
@@ -12988,7 +12709,7 @@
           <p:cNvPr id="20" name="spectrum-title-1">
             <a:extLst xmlns:a="http://schemas.openxmlformats.org/drawingml/2006/main">
               <a:ext uri="{FF2B5EF4-FFF2-40B4-BE49-F238E27FC236}">
-                <a16:creationId xmlns:a16="http://schemas.microsoft.com/office/drawing/2014/main" id="{E94EA5BB-6FB0-41DD-A928-D0CEB013268C}"/>
+                <a16:creationId xmlns:a16="http://schemas.microsoft.com/office/drawing/2014/main" id="{D5487D95-4EC4-4E6C-B3FD-E6D8A371F103}"/>
               </a:ext>
             </a:extLst>
           </p:cNvPr>
@@ -12999,7 +12720,7 @@
         </p:nvSpPr>
         <p:spPr>
           <a:xfrm xmlns:a="http://schemas.openxmlformats.org/drawingml/2006/main" rot="0">
-            <a:off x="3824288" y="3531994"/>
+            <a:off x="3824288" y="3541519"/>
             <a:ext cx="1985963" cy="333375"/>
           </a:xfrm>
           <a:prstGeom xmlns:a="http://schemas.openxmlformats.org/drawingml/2006/main" prst="rect">
@@ -13012,7 +12733,7 @@
           </a:ln>
         </p:spPr>
         <p:txBody>
-          <a:bodyPr xmlns:a="http://schemas.openxmlformats.org/drawingml/2006/main" wrap="square" lIns="0" tIns="0" rIns="0" bIns="0" anchor="ctr">
+          <a:bodyPr xmlns:a="http://schemas.openxmlformats.org/drawingml/2006/main" wrap="none" lIns="0" tIns="0" rIns="0" bIns="0" anchor="ctr">
             <a:noAutofit/>
           </a:bodyPr>
           <a:lstStyle xmlns:a="http://schemas.openxmlformats.org/drawingml/2006/main"/>
@@ -13050,7 +12771,7 @@
           <p:cNvPr id="21" name="spectrum-body-1">
             <a:extLst xmlns:a="http://schemas.openxmlformats.org/drawingml/2006/main">
               <a:ext uri="{FF2B5EF4-FFF2-40B4-BE49-F238E27FC236}">
-                <a16:creationId xmlns:a16="http://schemas.microsoft.com/office/drawing/2014/main" id="{B3B196C6-0AF4-411A-9420-D294AF795B24}"/>
+                <a16:creationId xmlns:a16="http://schemas.microsoft.com/office/drawing/2014/main" id="{0FE5DF9A-1B1F-4D91-8553-980F90191F48}"/>
               </a:ext>
             </a:extLst>
           </p:cNvPr>
@@ -13061,7 +12782,7 @@
         </p:nvSpPr>
         <p:spPr>
           <a:xfrm xmlns:a="http://schemas.openxmlformats.org/drawingml/2006/main" rot="0">
-            <a:off x="3824288" y="3979669"/>
+            <a:off x="3824288" y="3970144"/>
             <a:ext cx="1985963" cy="517922"/>
           </a:xfrm>
           <a:prstGeom xmlns:a="http://schemas.openxmlformats.org/drawingml/2006/main" prst="rect">
@@ -13139,7 +12860,7 @@
           <p:cNvPr id="22" name="spectrum-order-2">
             <a:extLst xmlns:a="http://schemas.openxmlformats.org/drawingml/2006/main">
               <a:ext uri="{FF2B5EF4-FFF2-40B4-BE49-F238E27FC236}">
-                <a16:creationId xmlns:a16="http://schemas.microsoft.com/office/drawing/2014/main" id="{67190F0C-F0F7-46D8-9998-8F496DDF464D}"/>
+                <a16:creationId xmlns:a16="http://schemas.microsoft.com/office/drawing/2014/main" id="{7D07136F-DE97-4096-BA3F-BED00FA211BA}"/>
               </a:ext>
             </a:extLst>
           </p:cNvPr>
@@ -13201,7 +12922,7 @@
           <p:cNvPr id="23" name="spectrum-title-2">
             <a:extLst xmlns:a="http://schemas.openxmlformats.org/drawingml/2006/main">
               <a:ext uri="{FF2B5EF4-FFF2-40B4-BE49-F238E27FC236}">
-                <a16:creationId xmlns:a16="http://schemas.microsoft.com/office/drawing/2014/main" id="{F1D32CF9-5BE2-41A2-8D92-E8FF14AD9CA0}"/>
+                <a16:creationId xmlns:a16="http://schemas.microsoft.com/office/drawing/2014/main" id="{045B07DC-AE5C-4A44-A8DA-1F3CEE6F8681}"/>
               </a:ext>
             </a:extLst>
           </p:cNvPr>
@@ -13212,7 +12933,7 @@
         </p:nvSpPr>
         <p:spPr>
           <a:xfrm xmlns:a="http://schemas.openxmlformats.org/drawingml/2006/main" rot="0">
-            <a:off x="6381750" y="3354438"/>
+            <a:off x="6381750" y="3398644"/>
             <a:ext cx="1985963" cy="333375"/>
           </a:xfrm>
           <a:prstGeom xmlns:a="http://schemas.openxmlformats.org/drawingml/2006/main" prst="rect">
@@ -13225,7 +12946,7 @@
           </a:ln>
         </p:spPr>
         <p:txBody>
-          <a:bodyPr xmlns:a="http://schemas.openxmlformats.org/drawingml/2006/main" wrap="square" lIns="0" tIns="0" rIns="0" bIns="0" anchor="ctr">
+          <a:bodyPr xmlns:a="http://schemas.openxmlformats.org/drawingml/2006/main" wrap="none" lIns="0" tIns="0" rIns="0" bIns="0" anchor="ctr">
             <a:noAutofit/>
           </a:bodyPr>
           <a:lstStyle xmlns:a="http://schemas.openxmlformats.org/drawingml/2006/main"/>
@@ -13263,7 +12984,7 @@
           <p:cNvPr id="24" name="spectrum-body-2">
             <a:extLst xmlns:a="http://schemas.openxmlformats.org/drawingml/2006/main">
               <a:ext uri="{FF2B5EF4-FFF2-40B4-BE49-F238E27FC236}">
-                <a16:creationId xmlns:a16="http://schemas.microsoft.com/office/drawing/2014/main" id="{7AAE7317-7205-46C6-919C-F5D7C14549C4}"/>
+                <a16:creationId xmlns:a16="http://schemas.microsoft.com/office/drawing/2014/main" id="{3DF0E153-AF97-4DFC-8F36-3C261E00A363}"/>
               </a:ext>
             </a:extLst>
           </p:cNvPr>
@@ -13274,8 +12995,8 @@
         </p:nvSpPr>
         <p:spPr>
           <a:xfrm xmlns:a="http://schemas.openxmlformats.org/drawingml/2006/main" rot="0">
-            <a:off x="6381750" y="3802113"/>
-            <a:ext cx="1985963" cy="587273"/>
+            <a:off x="6381750" y="3827269"/>
+            <a:ext cx="1985963" cy="517922"/>
           </a:xfrm>
           <a:prstGeom xmlns:a="http://schemas.openxmlformats.org/drawingml/2006/main" prst="rect">
             <a:avLst/>
@@ -13297,7 +13018,7 @@
                 <a:spcPct val="136000"/>
               </a:lnSpc>
               <a:buNone/>
-              <a:defRPr sz="1700" b="0" i="0">
+              <a:defRPr sz="1500" b="0" i="0">
                 <a:solidFill>
                   <a:srgbClr val="FFFFFF"/>
                 </a:solidFill>
@@ -13307,7 +13028,7 @@
               </a:defRPr>
             </a:pPr>
             <a:r>
-              <a:rPr sz="1700" b="0" i="0">
+              <a:rPr sz="1500" b="0" i="0">
                 <a:solidFill>
                   <a:srgbClr val="FFFFFF"/>
                 </a:solidFill>
@@ -13315,7 +13036,7 @@
                 <a:ea typeface="Microsoft YaHei"/>
                 <a:cs typeface="Microsoft YaHei"/>
               </a:rPr>
-              <a:t>发布会、路演和比赛</a:t>
+              <a:t>发布会、路演和比赛需</a:t>
             </a:r>
           </a:p>
           <a:p xmlns:a="http://schemas.openxmlformats.org/drawingml/2006/main">
@@ -13324,7 +13045,7 @@
                 <a:spcPct val="136000"/>
               </a:lnSpc>
               <a:buNone/>
-              <a:defRPr sz="1700" b="0" i="0">
+              <a:defRPr sz="1500" b="0" i="0">
                 <a:solidFill>
                   <a:srgbClr val="FFFFFF"/>
                 </a:solidFill>
@@ -13334,7 +13055,7 @@
               </a:defRPr>
             </a:pPr>
             <a:r>
-              <a:rPr sz="1700" b="0" i="0">
+              <a:rPr sz="1500" b="0" i="0">
                 <a:solidFill>
                   <a:srgbClr val="FFFFFF"/>
                 </a:solidFill>
@@ -13342,7 +13063,7 @@
                 <a:ea typeface="Microsoft YaHei"/>
                 <a:cs typeface="Microsoft YaHei"/>
               </a:rPr>
-              <a:t>需要高度视觉创意</a:t>
+              <a:t>要高度视觉创意</a:t>
             </a:r>
           </a:p>
         </p:txBody>
@@ -13352,7 +13073,7 @@
           <p:cNvPr id="25" name="spectrum-order-3">
             <a:extLst xmlns:a="http://schemas.openxmlformats.org/drawingml/2006/main">
               <a:ext uri="{FF2B5EF4-FFF2-40B4-BE49-F238E27FC236}">
-                <a16:creationId xmlns:a16="http://schemas.microsoft.com/office/drawing/2014/main" id="{4B1223F6-DCD3-4D1A-85B8-925BF5838FD6}"/>
+                <a16:creationId xmlns:a16="http://schemas.microsoft.com/office/drawing/2014/main" id="{7129F124-412B-44C7-B1E4-1377FDB3FA77}"/>
               </a:ext>
             </a:extLst>
           </p:cNvPr>
@@ -13414,7 +13135,7 @@
           <p:cNvPr id="26" name="spectrum-title-3">
             <a:extLst xmlns:a="http://schemas.openxmlformats.org/drawingml/2006/main">
               <a:ext uri="{FF2B5EF4-FFF2-40B4-BE49-F238E27FC236}">
-                <a16:creationId xmlns:a16="http://schemas.microsoft.com/office/drawing/2014/main" id="{3B7A1FB9-8843-450A-A7FA-C52AC5F487BB}"/>
+                <a16:creationId xmlns:a16="http://schemas.microsoft.com/office/drawing/2014/main" id="{1F5D9C94-B490-4996-8A37-96A2F4A7325B}"/>
               </a:ext>
             </a:extLst>
           </p:cNvPr>
@@ -13425,7 +13146,7 @@
         </p:nvSpPr>
         <p:spPr>
           <a:xfrm xmlns:a="http://schemas.openxmlformats.org/drawingml/2006/main" rot="0">
-            <a:off x="8939213" y="3497313"/>
+            <a:off x="8939213" y="3541519"/>
             <a:ext cx="1985963" cy="333375"/>
           </a:xfrm>
           <a:prstGeom xmlns:a="http://schemas.openxmlformats.org/drawingml/2006/main" prst="rect">
@@ -13438,7 +13159,7 @@
           </a:ln>
         </p:spPr>
         <p:txBody>
-          <a:bodyPr xmlns:a="http://schemas.openxmlformats.org/drawingml/2006/main" wrap="square" lIns="0" tIns="0" rIns="0" bIns="0" anchor="ctr">
+          <a:bodyPr xmlns:a="http://schemas.openxmlformats.org/drawingml/2006/main" wrap="none" lIns="0" tIns="0" rIns="0" bIns="0" anchor="ctr">
             <a:noAutofit/>
           </a:bodyPr>
           <a:lstStyle xmlns:a="http://schemas.openxmlformats.org/drawingml/2006/main"/>
@@ -13476,7 +13197,7 @@
           <p:cNvPr id="27" name="spectrum-body-3">
             <a:extLst xmlns:a="http://schemas.openxmlformats.org/drawingml/2006/main">
               <a:ext uri="{FF2B5EF4-FFF2-40B4-BE49-F238E27FC236}">
-                <a16:creationId xmlns:a16="http://schemas.microsoft.com/office/drawing/2014/main" id="{641655AF-97AB-44A7-876D-0D286002FB8B}"/>
+                <a16:creationId xmlns:a16="http://schemas.microsoft.com/office/drawing/2014/main" id="{0D35C9EC-27A9-4F1D-8CE0-9554162E5732}"/>
               </a:ext>
             </a:extLst>
           </p:cNvPr>
@@ -13487,8 +13208,8 @@
         </p:nvSpPr>
         <p:spPr>
           <a:xfrm xmlns:a="http://schemas.openxmlformats.org/drawingml/2006/main" rot="0">
-            <a:off x="8939213" y="3944988"/>
-            <a:ext cx="1985963" cy="587273"/>
+            <a:off x="8939213" y="3970144"/>
+            <a:ext cx="1985963" cy="517922"/>
           </a:xfrm>
           <a:prstGeom xmlns:a="http://schemas.openxmlformats.org/drawingml/2006/main" prst="rect">
             <a:avLst/>
@@ -13510,7 +13231,7 @@
                 <a:spcPct val="136000"/>
               </a:lnSpc>
               <a:buNone/>
-              <a:defRPr sz="1700" b="0" i="0">
+              <a:defRPr sz="1500" b="0" i="0">
                 <a:solidFill>
                   <a:srgbClr val="526174"/>
                 </a:solidFill>
@@ -13520,7 +13241,7 @@
               </a:defRPr>
             </a:pPr>
             <a:r>
-              <a:rPr sz="1700" b="0" i="0">
+              <a:rPr sz="1500" b="0" i="0">
                 <a:solidFill>
                   <a:srgbClr val="526174"/>
                 </a:solidFill>
@@ -13528,7 +13249,7 @@
                 <a:ea typeface="Microsoft YaHei"/>
                 <a:cs typeface="Microsoft YaHei"/>
               </a:rPr>
-              <a:t>需要专门设计与品牌</a:t>
+              <a:t>需要专门设计与品牌化</a:t>
             </a:r>
           </a:p>
           <a:p xmlns:a="http://schemas.openxmlformats.org/drawingml/2006/main">
@@ -13537,7 +13258,7 @@
                 <a:spcPct val="136000"/>
               </a:lnSpc>
               <a:buNone/>
-              <a:defRPr sz="1700" b="0" i="0">
+              <a:defRPr sz="1500" b="0" i="0">
                 <a:solidFill>
                   <a:srgbClr val="526174"/>
                 </a:solidFill>
@@ -13547,7 +13268,7 @@
               </a:defRPr>
             </a:pPr>
             <a:r>
-              <a:rPr sz="1700" b="0" i="0">
+              <a:rPr sz="1500" b="0" i="0">
                 <a:solidFill>
                   <a:srgbClr val="526174"/>
                 </a:solidFill>
@@ -13555,7 +13276,7 @@
                 <a:ea typeface="Microsoft YaHei"/>
                 <a:cs typeface="Microsoft YaHei"/>
               </a:rPr>
-              <a:t>化表达</a:t>
+              <a:t>表达</a:t>
             </a:r>
           </a:p>
         </p:txBody>
@@ -13565,7 +13286,7 @@
           <p:cNvPr id="28" name="spectrum-focus-label-bg">
             <a:extLst xmlns:a="http://schemas.openxmlformats.org/drawingml/2006/main">
               <a:ext uri="{FF2B5EF4-FFF2-40B4-BE49-F238E27FC236}">
-                <a16:creationId xmlns:a16="http://schemas.microsoft.com/office/drawing/2014/main" id="{0B2729A8-D150-4FF6-B6FB-7F6EE14587A0}"/>
+                <a16:creationId xmlns:a16="http://schemas.microsoft.com/office/drawing/2014/main" id="{E7930BB7-2D15-409B-AA00-3800F4E14D34}"/>
               </a:ext>
             </a:extLst>
           </p:cNvPr>
@@ -13598,7 +13319,7 @@
           <p:cNvPr id="29" name="spectrum-focus-label">
             <a:extLst xmlns:a="http://schemas.openxmlformats.org/drawingml/2006/main">
               <a:ext uri="{FF2B5EF4-FFF2-40B4-BE49-F238E27FC236}">
-                <a16:creationId xmlns:a16="http://schemas.microsoft.com/office/drawing/2014/main" id="{E52F656E-442D-43A6-8CA9-EBCA01CD29BD}"/>
+                <a16:creationId xmlns:a16="http://schemas.microsoft.com/office/drawing/2014/main" id="{9BFAE2DC-9BA5-45AB-92C8-BCEEFE5FA085}"/>
               </a:ext>
             </a:extLst>
           </p:cNvPr>
@@ -13658,7 +13379,7 @@
     </p:spTree>
     <p:extLst>
       <p:ext uri="{BB962C8B-B14F-4D97-AF65-F5344CB8AC3E}">
-        <p14:creationId xmlns:p14="http://schemas.microsoft.com/office/powerpoint/2010/main" val="75493799"/>
+        <p14:creationId xmlns:p14="http://schemas.microsoft.com/office/powerpoint/2010/main" val="2057082441"/>
       </p:ext>
     </p:extLst>
   </p:cSld>
@@ -13689,7 +13410,7 @@
           <p:cNvPr id="35" name="spectrum-density-fill">
             <a:extLst xmlns:a="http://schemas.openxmlformats.org/drawingml/2006/main">
               <a:ext uri="{FF2B5EF4-FFF2-40B4-BE49-F238E27FC236}">
-                <a16:creationId xmlns:a16="http://schemas.microsoft.com/office/drawing/2014/main" id="{46ABB1A3-DCE9-45A5-BA1B-A502FE23DE8C}"/>
+                <a16:creationId xmlns:a16="http://schemas.microsoft.com/office/drawing/2014/main" id="{53EC02AB-A6BD-46DE-ADBD-6B213D8117D9}"/>
               </a:ext>
             </a:extLst>
           </p:cNvPr>
@@ -14447,7 +14168,7 @@
           <p:cNvPr id="2" name="spectrum-density-curve">
             <a:extLst xmlns:a="http://schemas.openxmlformats.org/drawingml/2006/main">
               <a:ext uri="{FF2B5EF4-FFF2-40B4-BE49-F238E27FC236}">
-                <a16:creationId xmlns:a16="http://schemas.microsoft.com/office/drawing/2014/main" id="{1172026E-B99C-48F5-8472-E6EA8C364BFD}"/>
+                <a16:creationId xmlns:a16="http://schemas.microsoft.com/office/drawing/2014/main" id="{AE6CC814-A8DF-4B7B-B85B-5616610DA8EB}"/>
               </a:ext>
             </a:extLst>
           </p:cNvPr>
@@ -15204,7 +14925,7 @@
           <p:cNvPr id="3" name="spectrum-underlay-0">
             <a:extLst xmlns:a="http://schemas.openxmlformats.org/drawingml/2006/main">
               <a:ext uri="{FF2B5EF4-FFF2-40B4-BE49-F238E27FC236}">
-                <a16:creationId xmlns:a16="http://schemas.microsoft.com/office/drawing/2014/main" id="{F298A386-EA0D-4282-905E-38CF81148292}"/>
+                <a16:creationId xmlns:a16="http://schemas.microsoft.com/office/drawing/2014/main" id="{A3DF64D3-6C67-477A-8A71-89551E665436}"/>
               </a:ext>
             </a:extLst>
           </p:cNvPr>
@@ -15237,7 +14958,7 @@
           <p:cNvPr id="4" name="spectrum-card-0">
             <a:extLst xmlns:a="http://schemas.openxmlformats.org/drawingml/2006/main">
               <a:ext uri="{FF2B5EF4-FFF2-40B4-BE49-F238E27FC236}">
-                <a16:creationId xmlns:a16="http://schemas.microsoft.com/office/drawing/2014/main" id="{75DADFBF-1E3A-46DA-A713-BC3E94C8A12E}"/>
+                <a16:creationId xmlns:a16="http://schemas.microsoft.com/office/drawing/2014/main" id="{5C1B2DC2-CB48-4748-A567-FDDFEA03EA56}"/>
               </a:ext>
             </a:extLst>
           </p:cNvPr>
@@ -15269,7 +14990,7 @@
         <p:style>
           <a:lnRef xmlns:a="http://schemas.openxmlformats.org/drawingml/2006/main" idx="0"/>
           <a:fillRef xmlns:a="http://schemas.openxmlformats.org/drawingml/2006/main" idx="0"/>
-          <a:effectRef xmlns:a="http://schemas.openxmlformats.org/drawingml/2006/main" idx="24"/>
+          <a:effectRef xmlns:a="http://schemas.openxmlformats.org/drawingml/2006/main" idx="10"/>
           <a:fontRef xmlns:a="http://schemas.openxmlformats.org/drawingml/2006/main" idx="major"/>
         </p:style>
       </p:sp>
@@ -15278,7 +14999,7 @@
           <p:cNvPr id="5" name="spectrum-underlay-1">
             <a:extLst xmlns:a="http://schemas.openxmlformats.org/drawingml/2006/main">
               <a:ext uri="{FF2B5EF4-FFF2-40B4-BE49-F238E27FC236}">
-                <a16:creationId xmlns:a16="http://schemas.microsoft.com/office/drawing/2014/main" id="{B4B825EF-E80C-4D52-864B-F74E6B106835}"/>
+                <a16:creationId xmlns:a16="http://schemas.microsoft.com/office/drawing/2014/main" id="{FCD60210-A253-40B0-9F63-564BCD1AF749}"/>
               </a:ext>
             </a:extLst>
           </p:cNvPr>
@@ -15311,7 +15032,7 @@
           <p:cNvPr id="6" name="spectrum-card-1">
             <a:extLst xmlns:a="http://schemas.openxmlformats.org/drawingml/2006/main">
               <a:ext uri="{FF2B5EF4-FFF2-40B4-BE49-F238E27FC236}">
-                <a16:creationId xmlns:a16="http://schemas.microsoft.com/office/drawing/2014/main" id="{486B12C6-52C1-4604-A7AD-D4D20DED4C0F}"/>
+                <a16:creationId xmlns:a16="http://schemas.microsoft.com/office/drawing/2014/main" id="{C58BF99C-5C6E-4362-A5B3-BF7AFD5A1961}"/>
               </a:ext>
             </a:extLst>
           </p:cNvPr>
@@ -15343,7 +15064,7 @@
         <p:style>
           <a:lnRef xmlns:a="http://schemas.openxmlformats.org/drawingml/2006/main" idx="0"/>
           <a:fillRef xmlns:a="http://schemas.openxmlformats.org/drawingml/2006/main" idx="0"/>
-          <a:effectRef xmlns:a="http://schemas.openxmlformats.org/drawingml/2006/main" idx="24"/>
+          <a:effectRef xmlns:a="http://schemas.openxmlformats.org/drawingml/2006/main" idx="10"/>
           <a:fontRef xmlns:a="http://schemas.openxmlformats.org/drawingml/2006/main" idx="major"/>
         </p:style>
       </p:sp>
@@ -15352,7 +15073,7 @@
           <p:cNvPr id="7" name="spectrum-underlay-2">
             <a:extLst xmlns:a="http://schemas.openxmlformats.org/drawingml/2006/main">
               <a:ext uri="{FF2B5EF4-FFF2-40B4-BE49-F238E27FC236}">
-                <a16:creationId xmlns:a16="http://schemas.microsoft.com/office/drawing/2014/main" id="{AADF30BF-E9C5-465E-849B-61E29BA07F67}"/>
+                <a16:creationId xmlns:a16="http://schemas.microsoft.com/office/drawing/2014/main" id="{FA6A56C4-925A-4CE7-B7D5-249FF791899D}"/>
               </a:ext>
             </a:extLst>
           </p:cNvPr>
@@ -15385,7 +15106,7 @@
           <p:cNvPr id="8" name="spectrum-card-2">
             <a:extLst xmlns:a="http://schemas.openxmlformats.org/drawingml/2006/main">
               <a:ext uri="{FF2B5EF4-FFF2-40B4-BE49-F238E27FC236}">
-                <a16:creationId xmlns:a16="http://schemas.microsoft.com/office/drawing/2014/main" id="{215C6FEA-F982-4B02-947D-57B13FE8843D}"/>
+                <a16:creationId xmlns:a16="http://schemas.microsoft.com/office/drawing/2014/main" id="{9C709CC8-570A-4C82-A901-42D677796A20}"/>
               </a:ext>
             </a:extLst>
           </p:cNvPr>
@@ -15417,7 +15138,7 @@
         <p:style>
           <a:lnRef xmlns:a="http://schemas.openxmlformats.org/drawingml/2006/main" idx="0"/>
           <a:fillRef xmlns:a="http://schemas.openxmlformats.org/drawingml/2006/main" idx="0"/>
-          <a:effectRef xmlns:a="http://schemas.openxmlformats.org/drawingml/2006/main" idx="25"/>
+          <a:effectRef xmlns:a="http://schemas.openxmlformats.org/drawingml/2006/main" idx="11"/>
           <a:fontRef xmlns:a="http://schemas.openxmlformats.org/drawingml/2006/main" idx="major"/>
         </p:style>
       </p:sp>
@@ -15426,7 +15147,7 @@
           <p:cNvPr id="9" name="spectrum-underlay-3">
             <a:extLst xmlns:a="http://schemas.openxmlformats.org/drawingml/2006/main">
               <a:ext uri="{FF2B5EF4-FFF2-40B4-BE49-F238E27FC236}">
-                <a16:creationId xmlns:a16="http://schemas.microsoft.com/office/drawing/2014/main" id="{22AB76E1-98A5-4382-80A8-1D88397548BF}"/>
+                <a16:creationId xmlns:a16="http://schemas.microsoft.com/office/drawing/2014/main" id="{39E1C07E-63F0-4FCD-B031-787F99DC75D4}"/>
               </a:ext>
             </a:extLst>
           </p:cNvPr>
@@ -15459,7 +15180,7 @@
           <p:cNvPr id="10" name="spectrum-card-3">
             <a:extLst xmlns:a="http://schemas.openxmlformats.org/drawingml/2006/main">
               <a:ext uri="{FF2B5EF4-FFF2-40B4-BE49-F238E27FC236}">
-                <a16:creationId xmlns:a16="http://schemas.microsoft.com/office/drawing/2014/main" id="{AE23D9B1-4580-45B1-BED6-204824A7B900}"/>
+                <a16:creationId xmlns:a16="http://schemas.microsoft.com/office/drawing/2014/main" id="{4FB85913-C58C-4B12-8B95-645823FB627F}"/>
               </a:ext>
             </a:extLst>
           </p:cNvPr>
@@ -15491,7 +15212,7 @@
         <p:style>
           <a:lnRef xmlns:a="http://schemas.openxmlformats.org/drawingml/2006/main" idx="0"/>
           <a:fillRef xmlns:a="http://schemas.openxmlformats.org/drawingml/2006/main" idx="0"/>
-          <a:effectRef xmlns:a="http://schemas.openxmlformats.org/drawingml/2006/main" idx="24"/>
+          <a:effectRef xmlns:a="http://schemas.openxmlformats.org/drawingml/2006/main" idx="10"/>
           <a:fontRef xmlns:a="http://schemas.openxmlformats.org/drawingml/2006/main" idx="major"/>
         </p:style>
       </p:sp>
@@ -15500,7 +15221,7 @@
           <p:cNvPr id="11" name="spectrum-underlay-4">
             <a:extLst xmlns:a="http://schemas.openxmlformats.org/drawingml/2006/main">
               <a:ext uri="{FF2B5EF4-FFF2-40B4-BE49-F238E27FC236}">
-                <a16:creationId xmlns:a16="http://schemas.microsoft.com/office/drawing/2014/main" id="{59D3FF11-8FC3-4377-A634-396BFC649CED}"/>
+                <a16:creationId xmlns:a16="http://schemas.microsoft.com/office/drawing/2014/main" id="{08C6E52A-DEEE-4DB7-9AB8-8BC6F5152393}"/>
               </a:ext>
             </a:extLst>
           </p:cNvPr>
@@ -15533,7 +15254,7 @@
           <p:cNvPr id="12" name="spectrum-card-4">
             <a:extLst xmlns:a="http://schemas.openxmlformats.org/drawingml/2006/main">
               <a:ext uri="{FF2B5EF4-FFF2-40B4-BE49-F238E27FC236}">
-                <a16:creationId xmlns:a16="http://schemas.microsoft.com/office/drawing/2014/main" id="{A9D7BCDC-74D7-4646-8284-14BA51E187B9}"/>
+                <a16:creationId xmlns:a16="http://schemas.microsoft.com/office/drawing/2014/main" id="{0E951B4F-D674-4F2D-B8FF-D2B5E870DFE4}"/>
               </a:ext>
             </a:extLst>
           </p:cNvPr>
@@ -15565,7 +15286,7 @@
         <p:style>
           <a:lnRef xmlns:a="http://schemas.openxmlformats.org/drawingml/2006/main" idx="0"/>
           <a:fillRef xmlns:a="http://schemas.openxmlformats.org/drawingml/2006/main" idx="0"/>
-          <a:effectRef xmlns:a="http://schemas.openxmlformats.org/drawingml/2006/main" idx="24"/>
+          <a:effectRef xmlns:a="http://schemas.openxmlformats.org/drawingml/2006/main" idx="10"/>
           <a:fontRef xmlns:a="http://schemas.openxmlformats.org/drawingml/2006/main" idx="major"/>
         </p:style>
       </p:sp>
@@ -15574,7 +15295,7 @@
           <p:cNvPr id="13" name="spectrum-axis">
             <a:extLst xmlns:a="http://schemas.openxmlformats.org/drawingml/2006/main">
               <a:ext uri="{FF2B5EF4-FFF2-40B4-BE49-F238E27FC236}">
-                <a16:creationId xmlns:a16="http://schemas.microsoft.com/office/drawing/2014/main" id="{42C83667-52C2-4955-9FE2-8BA49DA2603A}"/>
+                <a16:creationId xmlns:a16="http://schemas.microsoft.com/office/drawing/2014/main" id="{FD35C707-53FA-4413-A610-645C9C18802B}"/>
               </a:ext>
             </a:extLst>
           </p:cNvPr>
@@ -15607,7 +15328,7 @@
           <p:cNvPr id="14" name="spectrum-axis-arrow">
             <a:extLst xmlns:a="http://schemas.openxmlformats.org/drawingml/2006/main">
               <a:ext uri="{FF2B5EF4-FFF2-40B4-BE49-F238E27FC236}">
-                <a16:creationId xmlns:a16="http://schemas.microsoft.com/office/drawing/2014/main" id="{A1604EA3-47B2-41F0-90E0-1FDFE0B4E0A0}"/>
+                <a16:creationId xmlns:a16="http://schemas.microsoft.com/office/drawing/2014/main" id="{EB412F05-5C7E-48FB-A002-9888EB328F1D}"/>
               </a:ext>
             </a:extLst>
           </p:cNvPr>
@@ -15740,7 +15461,7 @@
           <p:cNvPr id="15" name="spectrum-axis-low">
             <a:extLst xmlns:a="http://schemas.openxmlformats.org/drawingml/2006/main">
               <a:ext uri="{FF2B5EF4-FFF2-40B4-BE49-F238E27FC236}">
-                <a16:creationId xmlns:a16="http://schemas.microsoft.com/office/drawing/2014/main" id="{30867DDD-CC2D-4A31-86E4-0CB48D49C2E9}"/>
+                <a16:creationId xmlns:a16="http://schemas.microsoft.com/office/drawing/2014/main" id="{FC12A7E6-25BC-490C-9FAF-3DC694F54EEB}"/>
               </a:ext>
             </a:extLst>
           </p:cNvPr>
@@ -15802,7 +15523,7 @@
           <p:cNvPr id="16" name="spectrum-axis-label">
             <a:extLst xmlns:a="http://schemas.openxmlformats.org/drawingml/2006/main">
               <a:ext uri="{FF2B5EF4-FFF2-40B4-BE49-F238E27FC236}">
-                <a16:creationId xmlns:a16="http://schemas.microsoft.com/office/drawing/2014/main" id="{87AF63C6-6B13-47A5-9273-A3335610D737}"/>
+                <a16:creationId xmlns:a16="http://schemas.microsoft.com/office/drawing/2014/main" id="{3ECC056A-7BFD-49D6-8FC5-D8AC1BB6596A}"/>
               </a:ext>
             </a:extLst>
           </p:cNvPr>
@@ -15864,7 +15585,7 @@
           <p:cNvPr id="17" name="spectrum-axis-high">
             <a:extLst xmlns:a="http://schemas.openxmlformats.org/drawingml/2006/main">
               <a:ext uri="{FF2B5EF4-FFF2-40B4-BE49-F238E27FC236}">
-                <a16:creationId xmlns:a16="http://schemas.microsoft.com/office/drawing/2014/main" id="{0CBD8172-9F8D-4BA7-B1E5-27E2B3BC30C8}"/>
+                <a16:creationId xmlns:a16="http://schemas.microsoft.com/office/drawing/2014/main" id="{082CC4C2-F308-4043-99CD-063167BFD671}"/>
               </a:ext>
             </a:extLst>
           </p:cNvPr>
@@ -15926,7 +15647,7 @@
           <p:cNvPr id="18" name="spectrum-order-0">
             <a:extLst xmlns:a="http://schemas.openxmlformats.org/drawingml/2006/main">
               <a:ext uri="{FF2B5EF4-FFF2-40B4-BE49-F238E27FC236}">
-                <a16:creationId xmlns:a16="http://schemas.microsoft.com/office/drawing/2014/main" id="{1286BC50-169A-431F-AEF2-5CADB5855F0E}"/>
+                <a16:creationId xmlns:a16="http://schemas.microsoft.com/office/drawing/2014/main" id="{5392D60D-F6F1-41AF-9EAD-21551C718A7C}"/>
               </a:ext>
             </a:extLst>
           </p:cNvPr>
@@ -15988,7 +15709,7 @@
           <p:cNvPr id="19" name="spectrum-title-0">
             <a:extLst xmlns:a="http://schemas.openxmlformats.org/drawingml/2006/main">
               <a:ext uri="{FF2B5EF4-FFF2-40B4-BE49-F238E27FC236}">
-                <a16:creationId xmlns:a16="http://schemas.microsoft.com/office/drawing/2014/main" id="{55738BAC-0E55-48DA-A7D9-D395A6F84178}"/>
+                <a16:creationId xmlns:a16="http://schemas.microsoft.com/office/drawing/2014/main" id="{E6C0770D-B884-47F6-AFD0-81B5BB89F0CD}"/>
               </a:ext>
             </a:extLst>
           </p:cNvPr>
@@ -15999,7 +15720,7 @@
         </p:nvSpPr>
         <p:spPr>
           <a:xfrm xmlns:a="http://schemas.openxmlformats.org/drawingml/2006/main" rot="0">
-            <a:off x="1000125" y="3531994"/>
+            <a:off x="1000125" y="3541519"/>
             <a:ext cx="1611516" cy="333375"/>
           </a:xfrm>
           <a:prstGeom xmlns:a="http://schemas.openxmlformats.org/drawingml/2006/main" prst="rect">
@@ -16012,7 +15733,7 @@
           </a:ln>
         </p:spPr>
         <p:txBody>
-          <a:bodyPr xmlns:a="http://schemas.openxmlformats.org/drawingml/2006/main" wrap="square" lIns="0" tIns="0" rIns="0" bIns="0" anchor="ctr">
+          <a:bodyPr xmlns:a="http://schemas.openxmlformats.org/drawingml/2006/main" wrap="none" lIns="0" tIns="0" rIns="0" bIns="0" anchor="ctr">
             <a:noAutofit/>
           </a:bodyPr>
           <a:lstStyle xmlns:a="http://schemas.openxmlformats.org/drawingml/2006/main"/>
@@ -16050,7 +15771,7 @@
           <p:cNvPr id="20" name="spectrum-body-0">
             <a:extLst xmlns:a="http://schemas.openxmlformats.org/drawingml/2006/main">
               <a:ext uri="{FF2B5EF4-FFF2-40B4-BE49-F238E27FC236}">
-                <a16:creationId xmlns:a16="http://schemas.microsoft.com/office/drawing/2014/main" id="{252C3C49-6716-4314-8645-6E9383E8352D}"/>
+                <a16:creationId xmlns:a16="http://schemas.microsoft.com/office/drawing/2014/main" id="{156E06A2-58BA-4981-B985-ED62F1EAE90E}"/>
               </a:ext>
             </a:extLst>
           </p:cNvPr>
@@ -16061,7 +15782,7 @@
         </p:nvSpPr>
         <p:spPr>
           <a:xfrm xmlns:a="http://schemas.openxmlformats.org/drawingml/2006/main" rot="0">
-            <a:off x="1000125" y="3979669"/>
+            <a:off x="1000125" y="3970144"/>
             <a:ext cx="1611516" cy="517922"/>
           </a:xfrm>
           <a:prstGeom xmlns:a="http://schemas.openxmlformats.org/drawingml/2006/main" prst="rect">
@@ -16139,7 +15860,7 @@
           <p:cNvPr id="21" name="spectrum-order-1">
             <a:extLst xmlns:a="http://schemas.openxmlformats.org/drawingml/2006/main">
               <a:ext uri="{FF2B5EF4-FFF2-40B4-BE49-F238E27FC236}">
-                <a16:creationId xmlns:a16="http://schemas.microsoft.com/office/drawing/2014/main" id="{6E34A1E1-B187-4678-8BE6-935A50129721}"/>
+                <a16:creationId xmlns:a16="http://schemas.microsoft.com/office/drawing/2014/main" id="{5682E08D-1CDF-4614-83D1-A44BAEEDB6C6}"/>
               </a:ext>
             </a:extLst>
           </p:cNvPr>
@@ -16201,7 +15922,7 @@
           <p:cNvPr id="22" name="spectrum-title-1">
             <a:extLst xmlns:a="http://schemas.openxmlformats.org/drawingml/2006/main">
               <a:ext uri="{FF2B5EF4-FFF2-40B4-BE49-F238E27FC236}">
-                <a16:creationId xmlns:a16="http://schemas.microsoft.com/office/drawing/2014/main" id="{32C89C0D-B44D-4692-BA9B-97401CC6C181}"/>
+                <a16:creationId xmlns:a16="http://schemas.microsoft.com/office/drawing/2014/main" id="{74FB0683-BFE2-46C8-9BB0-230CB73516EB}"/>
               </a:ext>
             </a:extLst>
           </p:cNvPr>
@@ -16212,8 +15933,8 @@
         </p:nvSpPr>
         <p:spPr>
           <a:xfrm xmlns:a="http://schemas.openxmlformats.org/drawingml/2006/main" rot="0">
-            <a:off x="3145041" y="3418437"/>
-            <a:ext cx="1611659" cy="301523"/>
+            <a:off x="3145041" y="3412036"/>
+            <a:ext cx="1611659" cy="333375"/>
           </a:xfrm>
           <a:prstGeom xmlns:a="http://schemas.openxmlformats.org/drawingml/2006/main" prst="rect">
             <a:avLst/>
@@ -16225,7 +15946,7 @@
           </a:ln>
         </p:spPr>
         <p:txBody>
-          <a:bodyPr xmlns:a="http://schemas.openxmlformats.org/drawingml/2006/main" wrap="square" lIns="0" tIns="0" rIns="0" bIns="0" anchor="ctr">
+          <a:bodyPr xmlns:a="http://schemas.openxmlformats.org/drawingml/2006/main" wrap="none" lIns="0" tIns="0" rIns="0" bIns="0" anchor="ctr">
             <a:noAutofit/>
           </a:bodyPr>
           <a:lstStyle xmlns:a="http://schemas.openxmlformats.org/drawingml/2006/main"/>
@@ -16235,7 +15956,7 @@
                 <a:spcPct val="125000"/>
               </a:lnSpc>
               <a:buNone/>
-              <a:defRPr sz="1900" b="1" i="0">
+              <a:defRPr sz="2100" b="1" i="0">
                 <a:solidFill>
                   <a:srgbClr val="254B7C"/>
                 </a:solidFill>
@@ -16245,7 +15966,7 @@
               </a:defRPr>
             </a:pPr>
             <a:r>
-              <a:rPr sz="1900" b="1" i="0">
+              <a:rPr sz="2100" b="1" i="0">
                 <a:solidFill>
                   <a:srgbClr val="254B7C"/>
                 </a:solidFill>
@@ -16263,7 +15984,7 @@
           <p:cNvPr id="23" name="spectrum-body-1">
             <a:extLst xmlns:a="http://schemas.openxmlformats.org/drawingml/2006/main">
               <a:ext uri="{FF2B5EF4-FFF2-40B4-BE49-F238E27FC236}">
-                <a16:creationId xmlns:a16="http://schemas.microsoft.com/office/drawing/2014/main" id="{589C7718-7F84-4777-9E41-F7DF0FDDE4F1}"/>
+                <a16:creationId xmlns:a16="http://schemas.microsoft.com/office/drawing/2014/main" id="{2DFCFA5D-BA99-467C-93F9-D7B26F73B472}"/>
               </a:ext>
             </a:extLst>
           </p:cNvPr>
@@ -16274,7 +15995,7 @@
         </p:nvSpPr>
         <p:spPr>
           <a:xfrm xmlns:a="http://schemas.openxmlformats.org/drawingml/2006/main" rot="0">
-            <a:off x="3145041" y="3834260"/>
+            <a:off x="3145041" y="3840661"/>
             <a:ext cx="1611659" cy="776888"/>
           </a:xfrm>
           <a:prstGeom xmlns:a="http://schemas.openxmlformats.org/drawingml/2006/main" prst="rect">
@@ -16379,7 +16100,7 @@
           <p:cNvPr id="24" name="spectrum-order-2">
             <a:extLst xmlns:a="http://schemas.openxmlformats.org/drawingml/2006/main">
               <a:ext uri="{FF2B5EF4-FFF2-40B4-BE49-F238E27FC236}">
-                <a16:creationId xmlns:a16="http://schemas.microsoft.com/office/drawing/2014/main" id="{9427B460-13B0-45B9-BEDE-50BF129BD642}"/>
+                <a16:creationId xmlns:a16="http://schemas.microsoft.com/office/drawing/2014/main" id="{ACEF4608-4C07-4FB7-B842-CA23F5D57ACB}"/>
               </a:ext>
             </a:extLst>
           </p:cNvPr>
@@ -16441,7 +16162,7 @@
           <p:cNvPr id="25" name="spectrum-title-2">
             <a:extLst xmlns:a="http://schemas.openxmlformats.org/drawingml/2006/main">
               <a:ext uri="{FF2B5EF4-FFF2-40B4-BE49-F238E27FC236}">
-                <a16:creationId xmlns:a16="http://schemas.microsoft.com/office/drawing/2014/main" id="{7710CD67-1049-4D07-B48F-A15B3A40BA38}"/>
+                <a16:creationId xmlns:a16="http://schemas.microsoft.com/office/drawing/2014/main" id="{3C1F7CBD-33BE-4698-B49E-C39904DE706F}"/>
               </a:ext>
             </a:extLst>
           </p:cNvPr>
@@ -16452,7 +16173,7 @@
         </p:nvSpPr>
         <p:spPr>
           <a:xfrm xmlns:a="http://schemas.openxmlformats.org/drawingml/2006/main" rot="0">
-            <a:off x="5290099" y="3207544"/>
+            <a:off x="5290099" y="3269161"/>
             <a:ext cx="1611659" cy="333375"/>
           </a:xfrm>
           <a:prstGeom xmlns:a="http://schemas.openxmlformats.org/drawingml/2006/main" prst="rect">
@@ -16465,7 +16186,7 @@
           </a:ln>
         </p:spPr>
         <p:txBody>
-          <a:bodyPr xmlns:a="http://schemas.openxmlformats.org/drawingml/2006/main" wrap="square" lIns="0" tIns="0" rIns="0" bIns="0" anchor="ctr">
+          <a:bodyPr xmlns:a="http://schemas.openxmlformats.org/drawingml/2006/main" wrap="none" lIns="0" tIns="0" rIns="0" bIns="0" anchor="ctr">
             <a:noAutofit/>
           </a:bodyPr>
           <a:lstStyle xmlns:a="http://schemas.openxmlformats.org/drawingml/2006/main"/>
@@ -16503,7 +16224,7 @@
           <p:cNvPr id="26" name="spectrum-body-2">
             <a:extLst xmlns:a="http://schemas.openxmlformats.org/drawingml/2006/main">
               <a:ext uri="{FF2B5EF4-FFF2-40B4-BE49-F238E27FC236}">
-                <a16:creationId xmlns:a16="http://schemas.microsoft.com/office/drawing/2014/main" id="{E60B4EFA-56C3-439D-AC54-96F2C6D665C7}"/>
+                <a16:creationId xmlns:a16="http://schemas.microsoft.com/office/drawing/2014/main" id="{232A1B2C-63C0-4533-80F6-34DE92D2697D}"/>
               </a:ext>
             </a:extLst>
           </p:cNvPr>
@@ -16514,8 +16235,8 @@
         </p:nvSpPr>
         <p:spPr>
           <a:xfrm xmlns:a="http://schemas.openxmlformats.org/drawingml/2006/main" rot="0">
-            <a:off x="5290099" y="3655219"/>
-            <a:ext cx="1611659" cy="880910"/>
+            <a:off x="5290099" y="3697786"/>
+            <a:ext cx="1611659" cy="776888"/>
           </a:xfrm>
           <a:prstGeom xmlns:a="http://schemas.openxmlformats.org/drawingml/2006/main" prst="rect">
             <a:avLst/>
@@ -16537,7 +16258,7 @@
                 <a:spcPct val="136000"/>
               </a:lnSpc>
               <a:buNone/>
-              <a:defRPr sz="1700" b="0" i="0">
+              <a:defRPr sz="1500" b="0" i="0">
                 <a:solidFill>
                   <a:srgbClr val="FFFFFF"/>
                 </a:solidFill>
@@ -16547,7 +16268,7 @@
               </a:defRPr>
             </a:pPr>
             <a:r>
-              <a:rPr sz="1700" b="0" i="0">
+              <a:rPr sz="1500" b="0" i="0">
                 <a:solidFill>
                   <a:srgbClr val="FFFFFF"/>
                 </a:solidFill>
@@ -16555,7 +16276,7 @@
                 <a:ea typeface="Microsoft YaHei"/>
                 <a:cs typeface="Microsoft YaHei"/>
               </a:rPr>
-              <a:t>发布会、路演和</a:t>
+              <a:t>发布会、路演和比</a:t>
             </a:r>
           </a:p>
           <a:p xmlns:a="http://schemas.openxmlformats.org/drawingml/2006/main">
@@ -16564,7 +16285,7 @@
                 <a:spcPct val="136000"/>
               </a:lnSpc>
               <a:buNone/>
-              <a:defRPr sz="1700" b="0" i="0">
+              <a:defRPr sz="1500" b="0" i="0">
                 <a:solidFill>
                   <a:srgbClr val="FFFFFF"/>
                 </a:solidFill>
@@ -16574,7 +16295,7 @@
               </a:defRPr>
             </a:pPr>
             <a:r>
-              <a:rPr sz="1700" b="0" i="0">
+              <a:rPr sz="1500" b="0" i="0">
                 <a:solidFill>
                   <a:srgbClr val="FFFFFF"/>
                 </a:solidFill>
@@ -16582,7 +16303,7 @@
                 <a:ea typeface="Microsoft YaHei"/>
                 <a:cs typeface="Microsoft YaHei"/>
               </a:rPr>
-              <a:t>比赛需要高度视</a:t>
+              <a:t>赛需要高度视觉创</a:t>
             </a:r>
           </a:p>
           <a:p xmlns:a="http://schemas.openxmlformats.org/drawingml/2006/main">
@@ -16591,7 +16312,7 @@
                 <a:spcPct val="136000"/>
               </a:lnSpc>
               <a:buNone/>
-              <a:defRPr sz="1700" b="0" i="0">
+              <a:defRPr sz="1500" b="0" i="0">
                 <a:solidFill>
                   <a:srgbClr val="FFFFFF"/>
                 </a:solidFill>
@@ -16601,7 +16322,7 @@
               </a:defRPr>
             </a:pPr>
             <a:r>
-              <a:rPr sz="1700" b="0" i="0">
+              <a:rPr sz="1500" b="0" i="0">
                 <a:solidFill>
                   <a:srgbClr val="FFFFFF"/>
                 </a:solidFill>
@@ -16609,7 +16330,7 @@
                 <a:ea typeface="Microsoft YaHei"/>
                 <a:cs typeface="Microsoft YaHei"/>
               </a:rPr>
-              <a:t>觉创意</a:t>
+              <a:t>意</a:t>
             </a:r>
           </a:p>
         </p:txBody>
@@ -16619,7 +16340,7 @@
           <p:cNvPr id="27" name="spectrum-order-3">
             <a:extLst xmlns:a="http://schemas.openxmlformats.org/drawingml/2006/main">
               <a:ext uri="{FF2B5EF4-FFF2-40B4-BE49-F238E27FC236}">
-                <a16:creationId xmlns:a16="http://schemas.microsoft.com/office/drawing/2014/main" id="{2060AD1C-F627-4694-B352-A439D78747F1}"/>
+                <a16:creationId xmlns:a16="http://schemas.microsoft.com/office/drawing/2014/main" id="{54B66A9E-8A8A-43D6-8B8D-C5AD05917450}"/>
               </a:ext>
             </a:extLst>
           </p:cNvPr>
@@ -16681,7 +16402,7 @@
           <p:cNvPr id="28" name="spectrum-title-3">
             <a:extLst xmlns:a="http://schemas.openxmlformats.org/drawingml/2006/main">
               <a:ext uri="{FF2B5EF4-FFF2-40B4-BE49-F238E27FC236}">
-                <a16:creationId xmlns:a16="http://schemas.microsoft.com/office/drawing/2014/main" id="{D6B5A5CE-7FED-4299-A9E2-E9DEDA4C8613}"/>
+                <a16:creationId xmlns:a16="http://schemas.microsoft.com/office/drawing/2014/main" id="{8583388F-FA68-4B62-B33C-32290042D187}"/>
               </a:ext>
             </a:extLst>
           </p:cNvPr>
@@ -16692,7 +16413,7 @@
         </p:nvSpPr>
         <p:spPr>
           <a:xfrm xmlns:a="http://schemas.openxmlformats.org/drawingml/2006/main" rot="0">
-            <a:off x="7435158" y="3497313"/>
+            <a:off x="7435158" y="3541519"/>
             <a:ext cx="1611659" cy="333375"/>
           </a:xfrm>
           <a:prstGeom xmlns:a="http://schemas.openxmlformats.org/drawingml/2006/main" prst="rect">
@@ -16705,7 +16426,7 @@
           </a:ln>
         </p:spPr>
         <p:txBody>
-          <a:bodyPr xmlns:a="http://schemas.openxmlformats.org/drawingml/2006/main" wrap="square" lIns="0" tIns="0" rIns="0" bIns="0" anchor="ctr">
+          <a:bodyPr xmlns:a="http://schemas.openxmlformats.org/drawingml/2006/main" wrap="none" lIns="0" tIns="0" rIns="0" bIns="0" anchor="ctr">
             <a:noAutofit/>
           </a:bodyPr>
           <a:lstStyle xmlns:a="http://schemas.openxmlformats.org/drawingml/2006/main"/>
@@ -16743,7 +16464,7 @@
           <p:cNvPr id="29" name="spectrum-body-3">
             <a:extLst xmlns:a="http://schemas.openxmlformats.org/drawingml/2006/main">
               <a:ext uri="{FF2B5EF4-FFF2-40B4-BE49-F238E27FC236}">
-                <a16:creationId xmlns:a16="http://schemas.microsoft.com/office/drawing/2014/main" id="{787CCD26-3E4C-4192-9F2D-E57A08D3F564}"/>
+                <a16:creationId xmlns:a16="http://schemas.microsoft.com/office/drawing/2014/main" id="{A5FE4E0C-A3EE-4A3B-8A6D-48BF72F9C331}"/>
               </a:ext>
             </a:extLst>
           </p:cNvPr>
@@ -16754,8 +16475,8 @@
         </p:nvSpPr>
         <p:spPr>
           <a:xfrm xmlns:a="http://schemas.openxmlformats.org/drawingml/2006/main" rot="0">
-            <a:off x="7435158" y="3944988"/>
-            <a:ext cx="1611659" cy="587273"/>
+            <a:off x="7435158" y="3970144"/>
+            <a:ext cx="1611659" cy="517922"/>
           </a:xfrm>
           <a:prstGeom xmlns:a="http://schemas.openxmlformats.org/drawingml/2006/main" prst="rect">
             <a:avLst/>
@@ -16777,7 +16498,7 @@
                 <a:spcPct val="136000"/>
               </a:lnSpc>
               <a:buNone/>
-              <a:defRPr sz="1700" b="0" i="0">
+              <a:defRPr sz="1500" b="0" i="0">
                 <a:solidFill>
                   <a:srgbClr val="526174"/>
                 </a:solidFill>
@@ -16787,7 +16508,7 @@
               </a:defRPr>
             </a:pPr>
             <a:r>
-              <a:rPr sz="1700" b="0" i="0">
+              <a:rPr sz="1500" b="0" i="0">
                 <a:solidFill>
                   <a:srgbClr val="526174"/>
                 </a:solidFill>
@@ -16795,7 +16516,7 @@
                 <a:ea typeface="Microsoft YaHei"/>
                 <a:cs typeface="Microsoft YaHei"/>
               </a:rPr>
-              <a:t>需要专门设计与</a:t>
+              <a:t>需要专门设计与品</a:t>
             </a:r>
           </a:p>
           <a:p xmlns:a="http://schemas.openxmlformats.org/drawingml/2006/main">
@@ -16804,7 +16525,7 @@
                 <a:spcPct val="136000"/>
               </a:lnSpc>
               <a:buNone/>
-              <a:defRPr sz="1700" b="0" i="0">
+              <a:defRPr sz="1500" b="0" i="0">
                 <a:solidFill>
                   <a:srgbClr val="526174"/>
                 </a:solidFill>
@@ -16814,7 +16535,7 @@
               </a:defRPr>
             </a:pPr>
             <a:r>
-              <a:rPr sz="1700" b="0" i="0">
+              <a:rPr sz="1500" b="0" i="0">
                 <a:solidFill>
                   <a:srgbClr val="526174"/>
                 </a:solidFill>
@@ -16822,7 +16543,7 @@
                 <a:ea typeface="Microsoft YaHei"/>
                 <a:cs typeface="Microsoft YaHei"/>
               </a:rPr>
-              <a:t>品牌化表达</a:t>
+              <a:t>牌化表达</a:t>
             </a:r>
           </a:p>
         </p:txBody>
@@ -16832,7 +16553,7 @@
           <p:cNvPr id="30" name="spectrum-order-4">
             <a:extLst xmlns:a="http://schemas.openxmlformats.org/drawingml/2006/main">
               <a:ext uri="{FF2B5EF4-FFF2-40B4-BE49-F238E27FC236}">
-                <a16:creationId xmlns:a16="http://schemas.microsoft.com/office/drawing/2014/main" id="{83C1FB21-0475-4632-843A-14070F906238}"/>
+                <a16:creationId xmlns:a16="http://schemas.microsoft.com/office/drawing/2014/main" id="{4AE92DD9-0376-4A65-87BA-4DA7AE1BE868}"/>
               </a:ext>
             </a:extLst>
           </p:cNvPr>
@@ -16894,7 +16615,7 @@
           <p:cNvPr id="31" name="spectrum-title-4">
             <a:extLst xmlns:a="http://schemas.openxmlformats.org/drawingml/2006/main">
               <a:ext uri="{FF2B5EF4-FFF2-40B4-BE49-F238E27FC236}">
-                <a16:creationId xmlns:a16="http://schemas.microsoft.com/office/drawing/2014/main" id="{52AE6C6F-FD8A-4B89-90C7-891F240A5AA2}"/>
+                <a16:creationId xmlns:a16="http://schemas.microsoft.com/office/drawing/2014/main" id="{EBEDD3E2-1182-4A0C-AA18-51C6D814ACD3}"/>
               </a:ext>
             </a:extLst>
           </p:cNvPr>
@@ -16905,7 +16626,7 @@
         </p:nvSpPr>
         <p:spPr>
           <a:xfrm xmlns:a="http://schemas.openxmlformats.org/drawingml/2006/main" rot="0">
-            <a:off x="9580216" y="3497313"/>
+            <a:off x="9580216" y="3541519"/>
             <a:ext cx="1611516" cy="333375"/>
           </a:xfrm>
           <a:prstGeom xmlns:a="http://schemas.openxmlformats.org/drawingml/2006/main" prst="rect">
@@ -16918,7 +16639,7 @@
           </a:ln>
         </p:spPr>
         <p:txBody>
-          <a:bodyPr xmlns:a="http://schemas.openxmlformats.org/drawingml/2006/main" wrap="square" lIns="0" tIns="0" rIns="0" bIns="0" anchor="ctr">
+          <a:bodyPr xmlns:a="http://schemas.openxmlformats.org/drawingml/2006/main" wrap="none" lIns="0" tIns="0" rIns="0" bIns="0" anchor="ctr">
             <a:noAutofit/>
           </a:bodyPr>
           <a:lstStyle xmlns:a="http://schemas.openxmlformats.org/drawingml/2006/main"/>
@@ -16956,7 +16677,7 @@
           <p:cNvPr id="32" name="spectrum-body-4">
             <a:extLst xmlns:a="http://schemas.openxmlformats.org/drawingml/2006/main">
               <a:ext uri="{FF2B5EF4-FFF2-40B4-BE49-F238E27FC236}">
-                <a16:creationId xmlns:a16="http://schemas.microsoft.com/office/drawing/2014/main" id="{A4737B7A-78C8-4407-A4C1-5A34C0521DBE}"/>
+                <a16:creationId xmlns:a16="http://schemas.microsoft.com/office/drawing/2014/main" id="{4BEAEE6A-1D8F-4F1E-8BF0-B931D7892EB0}"/>
               </a:ext>
             </a:extLst>
           </p:cNvPr>
@@ -16967,8 +16688,8 @@
         </p:nvSpPr>
         <p:spPr>
           <a:xfrm xmlns:a="http://schemas.openxmlformats.org/drawingml/2006/main" rot="0">
-            <a:off x="9580216" y="3944988"/>
-            <a:ext cx="1611516" cy="587273"/>
+            <a:off x="9580216" y="3970144"/>
+            <a:ext cx="1611516" cy="517922"/>
           </a:xfrm>
           <a:prstGeom xmlns:a="http://schemas.openxmlformats.org/drawingml/2006/main" prst="rect">
             <a:avLst/>
@@ -16990,7 +16711,7 @@
                 <a:spcPct val="136000"/>
               </a:lnSpc>
               <a:buNone/>
-              <a:defRPr sz="1700" b="0" i="0">
+              <a:defRPr sz="1500" b="0" i="0">
                 <a:solidFill>
                   <a:srgbClr val="526174"/>
                 </a:solidFill>
@@ -17000,7 +16721,7 @@
               </a:defRPr>
             </a:pPr>
             <a:r>
-              <a:rPr sz="1700" b="0" i="0">
+              <a:rPr sz="1500" b="0" i="0">
                 <a:solidFill>
                   <a:srgbClr val="526174"/>
                 </a:solidFill>
@@ -17008,7 +16729,7 @@
                 <a:ea typeface="Microsoft YaHei"/>
                 <a:cs typeface="Microsoft YaHei"/>
               </a:rPr>
-              <a:t>以独特视觉体验</a:t>
+              <a:t>以独特视觉体验为</a:t>
             </a:r>
           </a:p>
           <a:p xmlns:a="http://schemas.openxmlformats.org/drawingml/2006/main">
@@ -17017,7 +16738,7 @@
                 <a:spcPct val="136000"/>
               </a:lnSpc>
               <a:buNone/>
-              <a:defRPr sz="1700" b="0" i="0">
+              <a:defRPr sz="1500" b="0" i="0">
                 <a:solidFill>
                   <a:srgbClr val="526174"/>
                 </a:solidFill>
@@ -17027,7 +16748,7 @@
               </a:defRPr>
             </a:pPr>
             <a:r>
-              <a:rPr sz="1700" b="0" i="0">
+              <a:rPr sz="1500" b="0" i="0">
                 <a:solidFill>
                   <a:srgbClr val="526174"/>
                 </a:solidFill>
@@ -17035,7 +16756,7 @@
                 <a:ea typeface="Microsoft YaHei"/>
                 <a:cs typeface="Microsoft YaHei"/>
               </a:rPr>
-              <a:t>为首要目标</a:t>
+              <a:t>首要目标</a:t>
             </a:r>
           </a:p>
         </p:txBody>
@@ -17045,7 +16766,7 @@
           <p:cNvPr id="33" name="spectrum-focus-label-bg">
             <a:extLst xmlns:a="http://schemas.openxmlformats.org/drawingml/2006/main">
               <a:ext uri="{FF2B5EF4-FFF2-40B4-BE49-F238E27FC236}">
-                <a16:creationId xmlns:a16="http://schemas.microsoft.com/office/drawing/2014/main" id="{A7CC8750-2475-4F5F-86C5-F2821669BE2B}"/>
+                <a16:creationId xmlns:a16="http://schemas.microsoft.com/office/drawing/2014/main" id="{FED684D0-4054-469C-AC1B-3A0EFF064FE2}"/>
               </a:ext>
             </a:extLst>
           </p:cNvPr>
@@ -17078,7 +16799,7 @@
           <p:cNvPr id="34" name="spectrum-focus-label">
             <a:extLst xmlns:a="http://schemas.openxmlformats.org/drawingml/2006/main">
               <a:ext uri="{FF2B5EF4-FFF2-40B4-BE49-F238E27FC236}">
-                <a16:creationId xmlns:a16="http://schemas.microsoft.com/office/drawing/2014/main" id="{160D2623-F682-4F12-9E61-90CF4A4AF07D}"/>
+                <a16:creationId xmlns:a16="http://schemas.microsoft.com/office/drawing/2014/main" id="{0C920421-03E5-4B3D-8899-A691D55B53C9}"/>
               </a:ext>
             </a:extLst>
           </p:cNvPr>
@@ -17138,7 +16859,7 @@
     </p:spTree>
     <p:extLst>
       <p:ext uri="{BB962C8B-B14F-4D97-AF65-F5344CB8AC3E}">
-        <p14:creationId xmlns:p14="http://schemas.microsoft.com/office/powerpoint/2010/main" val="452575553"/>
+        <p14:creationId xmlns:p14="http://schemas.microsoft.com/office/powerpoint/2010/main" val="793552105"/>
       </p:ext>
     </p:extLst>
   </p:cSld>
@@ -17169,7 +16890,7 @@
           <p:cNvPr id="35" name="spectrum-density-fill">
             <a:extLst xmlns:a="http://schemas.openxmlformats.org/drawingml/2006/main">
               <a:ext uri="{FF2B5EF4-FFF2-40B4-BE49-F238E27FC236}">
-                <a16:creationId xmlns:a16="http://schemas.microsoft.com/office/drawing/2014/main" id="{BFBB2111-EF55-4C91-AF2D-0F94FF460A05}"/>
+                <a16:creationId xmlns:a16="http://schemas.microsoft.com/office/drawing/2014/main" id="{0EC313C1-BB69-4D4C-89CF-5C6866824BF7}"/>
               </a:ext>
             </a:extLst>
           </p:cNvPr>
@@ -17927,7 +17648,7 @@
           <p:cNvPr id="2" name="spectrum-density-curve">
             <a:extLst xmlns:a="http://schemas.openxmlformats.org/drawingml/2006/main">
               <a:ext uri="{FF2B5EF4-FFF2-40B4-BE49-F238E27FC236}">
-                <a16:creationId xmlns:a16="http://schemas.microsoft.com/office/drawing/2014/main" id="{8CC8E325-87DE-42F7-92D8-104899E9BF93}"/>
+                <a16:creationId xmlns:a16="http://schemas.microsoft.com/office/drawing/2014/main" id="{1B26E8BB-2FE9-4F9D-937E-AF243F999655}"/>
               </a:ext>
             </a:extLst>
           </p:cNvPr>
@@ -18684,7 +18405,7 @@
           <p:cNvPr id="3" name="spectrum-underlay-0">
             <a:extLst xmlns:a="http://schemas.openxmlformats.org/drawingml/2006/main">
               <a:ext uri="{FF2B5EF4-FFF2-40B4-BE49-F238E27FC236}">
-                <a16:creationId xmlns:a16="http://schemas.microsoft.com/office/drawing/2014/main" id="{C3D3E605-DC01-489E-AB69-A8F840CE4EA6}"/>
+                <a16:creationId xmlns:a16="http://schemas.microsoft.com/office/drawing/2014/main" id="{BD7215F7-6D98-4490-897E-F44E49851882}"/>
               </a:ext>
             </a:extLst>
           </p:cNvPr>
@@ -18717,7 +18438,7 @@
           <p:cNvPr id="4" name="spectrum-card-0">
             <a:extLst xmlns:a="http://schemas.openxmlformats.org/drawingml/2006/main">
               <a:ext uri="{FF2B5EF4-FFF2-40B4-BE49-F238E27FC236}">
-                <a16:creationId xmlns:a16="http://schemas.microsoft.com/office/drawing/2014/main" id="{89426AAD-2490-4AB6-85B1-A660753A2FA9}"/>
+                <a16:creationId xmlns:a16="http://schemas.microsoft.com/office/drawing/2014/main" id="{75817FE5-436B-4F34-AF31-DBEF042C50F5}"/>
               </a:ext>
             </a:extLst>
           </p:cNvPr>
@@ -18749,7 +18470,7 @@
         <p:style>
           <a:lnRef xmlns:a="http://schemas.openxmlformats.org/drawingml/2006/main" idx="0"/>
           <a:fillRef xmlns:a="http://schemas.openxmlformats.org/drawingml/2006/main" idx="0"/>
-          <a:effectRef xmlns:a="http://schemas.openxmlformats.org/drawingml/2006/main" idx="24"/>
+          <a:effectRef xmlns:a="http://schemas.openxmlformats.org/drawingml/2006/main" idx="10"/>
           <a:fontRef xmlns:a="http://schemas.openxmlformats.org/drawingml/2006/main" idx="major"/>
         </p:style>
       </p:sp>
@@ -18758,7 +18479,7 @@
           <p:cNvPr id="5" name="spectrum-underlay-1">
             <a:extLst xmlns:a="http://schemas.openxmlformats.org/drawingml/2006/main">
               <a:ext uri="{FF2B5EF4-FFF2-40B4-BE49-F238E27FC236}">
-                <a16:creationId xmlns:a16="http://schemas.microsoft.com/office/drawing/2014/main" id="{C4030C24-80B6-4637-9E89-4966CBE721EE}"/>
+                <a16:creationId xmlns:a16="http://schemas.microsoft.com/office/drawing/2014/main" id="{B8099D7A-D68B-4100-B39A-ADE937054DE7}"/>
               </a:ext>
             </a:extLst>
           </p:cNvPr>
@@ -18791,7 +18512,7 @@
           <p:cNvPr id="6" name="spectrum-card-1">
             <a:extLst xmlns:a="http://schemas.openxmlformats.org/drawingml/2006/main">
               <a:ext uri="{FF2B5EF4-FFF2-40B4-BE49-F238E27FC236}">
-                <a16:creationId xmlns:a16="http://schemas.microsoft.com/office/drawing/2014/main" id="{A53B5FBD-DEA3-4EC9-B0E6-652484F743A8}"/>
+                <a16:creationId xmlns:a16="http://schemas.microsoft.com/office/drawing/2014/main" id="{D8E5BE3C-F10B-4148-A881-151F0AF99273}"/>
               </a:ext>
             </a:extLst>
           </p:cNvPr>
@@ -18823,7 +18544,7 @@
         <p:style>
           <a:lnRef xmlns:a="http://schemas.openxmlformats.org/drawingml/2006/main" idx="0"/>
           <a:fillRef xmlns:a="http://schemas.openxmlformats.org/drawingml/2006/main" idx="0"/>
-          <a:effectRef xmlns:a="http://schemas.openxmlformats.org/drawingml/2006/main" idx="24"/>
+          <a:effectRef xmlns:a="http://schemas.openxmlformats.org/drawingml/2006/main" idx="10"/>
           <a:fontRef xmlns:a="http://schemas.openxmlformats.org/drawingml/2006/main" idx="major"/>
         </p:style>
       </p:sp>
@@ -18832,7 +18553,7 @@
           <p:cNvPr id="7" name="spectrum-underlay-2">
             <a:extLst xmlns:a="http://schemas.openxmlformats.org/drawingml/2006/main">
               <a:ext uri="{FF2B5EF4-FFF2-40B4-BE49-F238E27FC236}">
-                <a16:creationId xmlns:a16="http://schemas.microsoft.com/office/drawing/2014/main" id="{11D01AA2-0F75-47F5-A8D7-16FB2857AD2A}"/>
+                <a16:creationId xmlns:a16="http://schemas.microsoft.com/office/drawing/2014/main" id="{6F8DD3F3-3311-42CA-9CF8-ED88AFFCAC4C}"/>
               </a:ext>
             </a:extLst>
           </p:cNvPr>
@@ -18865,7 +18586,7 @@
           <p:cNvPr id="8" name="spectrum-card-2">
             <a:extLst xmlns:a="http://schemas.openxmlformats.org/drawingml/2006/main">
               <a:ext uri="{FF2B5EF4-FFF2-40B4-BE49-F238E27FC236}">
-                <a16:creationId xmlns:a16="http://schemas.microsoft.com/office/drawing/2014/main" id="{840EA2BE-80CD-4157-9BA0-2A4E3D44B4DA}"/>
+                <a16:creationId xmlns:a16="http://schemas.microsoft.com/office/drawing/2014/main" id="{F0D2A498-389B-4961-B2B9-68AE66CDA973}"/>
               </a:ext>
             </a:extLst>
           </p:cNvPr>
@@ -18897,7 +18618,7 @@
         <p:style>
           <a:lnRef xmlns:a="http://schemas.openxmlformats.org/drawingml/2006/main" idx="0"/>
           <a:fillRef xmlns:a="http://schemas.openxmlformats.org/drawingml/2006/main" idx="0"/>
-          <a:effectRef xmlns:a="http://schemas.openxmlformats.org/drawingml/2006/main" idx="25"/>
+          <a:effectRef xmlns:a="http://schemas.openxmlformats.org/drawingml/2006/main" idx="11"/>
           <a:fontRef xmlns:a="http://schemas.openxmlformats.org/drawingml/2006/main" idx="major"/>
         </p:style>
       </p:sp>
@@ -18906,7 +18627,7 @@
           <p:cNvPr id="9" name="spectrum-underlay-3">
             <a:extLst xmlns:a="http://schemas.openxmlformats.org/drawingml/2006/main">
               <a:ext uri="{FF2B5EF4-FFF2-40B4-BE49-F238E27FC236}">
-                <a16:creationId xmlns:a16="http://schemas.microsoft.com/office/drawing/2014/main" id="{5B40F263-89A8-4CB7-B2CF-99966720D539}"/>
+                <a16:creationId xmlns:a16="http://schemas.microsoft.com/office/drawing/2014/main" id="{B2E2BB41-0D19-42B0-AB8D-269147D16AC0}"/>
               </a:ext>
             </a:extLst>
           </p:cNvPr>
@@ -18939,7 +18660,7 @@
           <p:cNvPr id="10" name="spectrum-card-3">
             <a:extLst xmlns:a="http://schemas.openxmlformats.org/drawingml/2006/main">
               <a:ext uri="{FF2B5EF4-FFF2-40B4-BE49-F238E27FC236}">
-                <a16:creationId xmlns:a16="http://schemas.microsoft.com/office/drawing/2014/main" id="{81E98EE3-CBAB-4456-A37C-3CD93307E9A8}"/>
+                <a16:creationId xmlns:a16="http://schemas.microsoft.com/office/drawing/2014/main" id="{9532457B-46E4-44BC-914A-D7A1D9873627}"/>
               </a:ext>
             </a:extLst>
           </p:cNvPr>
@@ -18971,7 +18692,7 @@
         <p:style>
           <a:lnRef xmlns:a="http://schemas.openxmlformats.org/drawingml/2006/main" idx="0"/>
           <a:fillRef xmlns:a="http://schemas.openxmlformats.org/drawingml/2006/main" idx="0"/>
-          <a:effectRef xmlns:a="http://schemas.openxmlformats.org/drawingml/2006/main" idx="24"/>
+          <a:effectRef xmlns:a="http://schemas.openxmlformats.org/drawingml/2006/main" idx="10"/>
           <a:fontRef xmlns:a="http://schemas.openxmlformats.org/drawingml/2006/main" idx="major"/>
         </p:style>
       </p:sp>
@@ -18980,7 +18701,7 @@
           <p:cNvPr id="11" name="spectrum-underlay-4">
             <a:extLst xmlns:a="http://schemas.openxmlformats.org/drawingml/2006/main">
               <a:ext uri="{FF2B5EF4-FFF2-40B4-BE49-F238E27FC236}">
-                <a16:creationId xmlns:a16="http://schemas.microsoft.com/office/drawing/2014/main" id="{E26DEF11-AAE8-401C-9EB6-A6011410247B}"/>
+                <a16:creationId xmlns:a16="http://schemas.microsoft.com/office/drawing/2014/main" id="{065A081D-8BCE-40AA-8E7E-854E76724EBC}"/>
               </a:ext>
             </a:extLst>
           </p:cNvPr>
@@ -19013,7 +18734,7 @@
           <p:cNvPr id="12" name="spectrum-card-4">
             <a:extLst xmlns:a="http://schemas.openxmlformats.org/drawingml/2006/main">
               <a:ext uri="{FF2B5EF4-FFF2-40B4-BE49-F238E27FC236}">
-                <a16:creationId xmlns:a16="http://schemas.microsoft.com/office/drawing/2014/main" id="{19475480-7749-4EC5-9068-2324BAF785C5}"/>
+                <a16:creationId xmlns:a16="http://schemas.microsoft.com/office/drawing/2014/main" id="{E3B5FC97-94D1-475B-9430-5BB46A469BD0}"/>
               </a:ext>
             </a:extLst>
           </p:cNvPr>
@@ -19045,7 +18766,7 @@
         <p:style>
           <a:lnRef xmlns:a="http://schemas.openxmlformats.org/drawingml/2006/main" idx="0"/>
           <a:fillRef xmlns:a="http://schemas.openxmlformats.org/drawingml/2006/main" idx="0"/>
-          <a:effectRef xmlns:a="http://schemas.openxmlformats.org/drawingml/2006/main" idx="24"/>
+          <a:effectRef xmlns:a="http://schemas.openxmlformats.org/drawingml/2006/main" idx="10"/>
           <a:fontRef xmlns:a="http://schemas.openxmlformats.org/drawingml/2006/main" idx="major"/>
         </p:style>
       </p:sp>
@@ -19054,7 +18775,7 @@
           <p:cNvPr id="13" name="spectrum-axis">
             <a:extLst xmlns:a="http://schemas.openxmlformats.org/drawingml/2006/main">
               <a:ext uri="{FF2B5EF4-FFF2-40B4-BE49-F238E27FC236}">
-                <a16:creationId xmlns:a16="http://schemas.microsoft.com/office/drawing/2014/main" id="{8ADEA77B-2DAB-4CF9-8AA8-A5918ACEBD8D}"/>
+                <a16:creationId xmlns:a16="http://schemas.microsoft.com/office/drawing/2014/main" id="{D2415BA1-83DE-476C-98E1-A4D1247B6412}"/>
               </a:ext>
             </a:extLst>
           </p:cNvPr>
@@ -19087,7 +18808,7 @@
           <p:cNvPr id="14" name="spectrum-axis-arrow">
             <a:extLst xmlns:a="http://schemas.openxmlformats.org/drawingml/2006/main">
               <a:ext uri="{FF2B5EF4-FFF2-40B4-BE49-F238E27FC236}">
-                <a16:creationId xmlns:a16="http://schemas.microsoft.com/office/drawing/2014/main" id="{793EE141-A22F-41E7-B484-1626F18D546C}"/>
+                <a16:creationId xmlns:a16="http://schemas.microsoft.com/office/drawing/2014/main" id="{B561D83C-4952-4CE0-9096-90E2EDF80AFF}"/>
               </a:ext>
             </a:extLst>
           </p:cNvPr>
@@ -19220,7 +18941,7 @@
           <p:cNvPr id="15" name="spectrum-axis-low">
             <a:extLst xmlns:a="http://schemas.openxmlformats.org/drawingml/2006/main">
               <a:ext uri="{FF2B5EF4-FFF2-40B4-BE49-F238E27FC236}">
-                <a16:creationId xmlns:a16="http://schemas.microsoft.com/office/drawing/2014/main" id="{63AFBFE0-3B67-4B74-8301-5969DB6140B5}"/>
+                <a16:creationId xmlns:a16="http://schemas.microsoft.com/office/drawing/2014/main" id="{E4B8B1B6-E838-439C-A227-B2F3B4166553}"/>
               </a:ext>
             </a:extLst>
           </p:cNvPr>
@@ -19282,7 +19003,7 @@
           <p:cNvPr id="16" name="spectrum-axis-label">
             <a:extLst xmlns:a="http://schemas.openxmlformats.org/drawingml/2006/main">
               <a:ext uri="{FF2B5EF4-FFF2-40B4-BE49-F238E27FC236}">
-                <a16:creationId xmlns:a16="http://schemas.microsoft.com/office/drawing/2014/main" id="{1B47A5A6-FE45-4298-8A18-6B1FCF4F9E1C}"/>
+                <a16:creationId xmlns:a16="http://schemas.microsoft.com/office/drawing/2014/main" id="{90EB7AF8-EE64-4A2A-81D8-A4AE11128B9C}"/>
               </a:ext>
             </a:extLst>
           </p:cNvPr>
@@ -19344,7 +19065,7 @@
           <p:cNvPr id="17" name="spectrum-axis-high">
             <a:extLst xmlns:a="http://schemas.openxmlformats.org/drawingml/2006/main">
               <a:ext uri="{FF2B5EF4-FFF2-40B4-BE49-F238E27FC236}">
-                <a16:creationId xmlns:a16="http://schemas.microsoft.com/office/drawing/2014/main" id="{534D5891-5DCB-42B6-B9A7-A4303F53AEFE}"/>
+                <a16:creationId xmlns:a16="http://schemas.microsoft.com/office/drawing/2014/main" id="{C0D29D44-4462-417B-9E96-2A0F81A5E7C6}"/>
               </a:ext>
             </a:extLst>
           </p:cNvPr>
@@ -19406,7 +19127,7 @@
           <p:cNvPr id="18" name="spectrum-order-0">
             <a:extLst xmlns:a="http://schemas.openxmlformats.org/drawingml/2006/main">
               <a:ext uri="{FF2B5EF4-FFF2-40B4-BE49-F238E27FC236}">
-                <a16:creationId xmlns:a16="http://schemas.microsoft.com/office/drawing/2014/main" id="{B0A04CEB-2F41-4D2A-AFA6-E5FD44E2BA81}"/>
+                <a16:creationId xmlns:a16="http://schemas.microsoft.com/office/drawing/2014/main" id="{0F170FF1-F70C-4083-B708-C8E9605907E4}"/>
               </a:ext>
             </a:extLst>
           </p:cNvPr>
@@ -19468,7 +19189,7 @@
           <p:cNvPr id="19" name="spectrum-title-0">
             <a:extLst xmlns:a="http://schemas.openxmlformats.org/drawingml/2006/main">
               <a:ext uri="{FF2B5EF4-FFF2-40B4-BE49-F238E27FC236}">
-                <a16:creationId xmlns:a16="http://schemas.microsoft.com/office/drawing/2014/main" id="{EF1D12A1-2796-479C-ABD6-68AAF4A51B80}"/>
+                <a16:creationId xmlns:a16="http://schemas.microsoft.com/office/drawing/2014/main" id="{A1F5CC6E-29BA-4393-B2B7-C14DB17D3C04}"/>
               </a:ext>
             </a:extLst>
           </p:cNvPr>
@@ -19479,7 +19200,7 @@
         </p:nvSpPr>
         <p:spPr>
           <a:xfrm xmlns:a="http://schemas.openxmlformats.org/drawingml/2006/main" rot="0">
-            <a:off x="1000125" y="3531994"/>
+            <a:off x="1000125" y="3541519"/>
             <a:ext cx="1611516" cy="333375"/>
           </a:xfrm>
           <a:prstGeom xmlns:a="http://schemas.openxmlformats.org/drawingml/2006/main" prst="rect">
@@ -19492,7 +19213,7 @@
           </a:ln>
         </p:spPr>
         <p:txBody>
-          <a:bodyPr xmlns:a="http://schemas.openxmlformats.org/drawingml/2006/main" wrap="square" lIns="0" tIns="0" rIns="0" bIns="0" anchor="ctr">
+          <a:bodyPr xmlns:a="http://schemas.openxmlformats.org/drawingml/2006/main" wrap="none" lIns="0" tIns="0" rIns="0" bIns="0" anchor="ctr">
             <a:noAutofit/>
           </a:bodyPr>
           <a:lstStyle xmlns:a="http://schemas.openxmlformats.org/drawingml/2006/main"/>
@@ -19530,7 +19251,7 @@
           <p:cNvPr id="20" name="spectrum-body-0">
             <a:extLst xmlns:a="http://schemas.openxmlformats.org/drawingml/2006/main">
               <a:ext uri="{FF2B5EF4-FFF2-40B4-BE49-F238E27FC236}">
-                <a16:creationId xmlns:a16="http://schemas.microsoft.com/office/drawing/2014/main" id="{39EF5D75-B03C-4CBD-BB76-3A813290D3D7}"/>
+                <a16:creationId xmlns:a16="http://schemas.microsoft.com/office/drawing/2014/main" id="{525BEECC-689D-4A73-97BB-EDEEAADB8CFC}"/>
               </a:ext>
             </a:extLst>
           </p:cNvPr>
@@ -19541,7 +19262,7 @@
         </p:nvSpPr>
         <p:spPr>
           <a:xfrm xmlns:a="http://schemas.openxmlformats.org/drawingml/2006/main" rot="0">
-            <a:off x="1000125" y="3979669"/>
+            <a:off x="1000125" y="3970144"/>
             <a:ext cx="1611516" cy="517922"/>
           </a:xfrm>
           <a:prstGeom xmlns:a="http://schemas.openxmlformats.org/drawingml/2006/main" prst="rect">
@@ -19619,7 +19340,7 @@
           <p:cNvPr id="21" name="spectrum-order-1">
             <a:extLst xmlns:a="http://schemas.openxmlformats.org/drawingml/2006/main">
               <a:ext uri="{FF2B5EF4-FFF2-40B4-BE49-F238E27FC236}">
-                <a16:creationId xmlns:a16="http://schemas.microsoft.com/office/drawing/2014/main" id="{2CFE3FA7-681C-4499-B404-CCFD9D46E80E}"/>
+                <a16:creationId xmlns:a16="http://schemas.microsoft.com/office/drawing/2014/main" id="{E2BD26F8-91FD-4A9C-8103-B910B0FC9482}"/>
               </a:ext>
             </a:extLst>
           </p:cNvPr>
@@ -19681,7 +19402,7 @@
           <p:cNvPr id="22" name="spectrum-title-1">
             <a:extLst xmlns:a="http://schemas.openxmlformats.org/drawingml/2006/main">
               <a:ext uri="{FF2B5EF4-FFF2-40B4-BE49-F238E27FC236}">
-                <a16:creationId xmlns:a16="http://schemas.microsoft.com/office/drawing/2014/main" id="{18A8FA93-B98E-4B62-BC7D-8E86C85A29D4}"/>
+                <a16:creationId xmlns:a16="http://schemas.microsoft.com/office/drawing/2014/main" id="{C516FB95-EE34-4864-AFEA-19A555586915}"/>
               </a:ext>
             </a:extLst>
           </p:cNvPr>
@@ -19692,8 +19413,8 @@
         </p:nvSpPr>
         <p:spPr>
           <a:xfrm xmlns:a="http://schemas.openxmlformats.org/drawingml/2006/main" rot="0">
-            <a:off x="3145041" y="3418437"/>
-            <a:ext cx="1611659" cy="301523"/>
+            <a:off x="3145041" y="3412036"/>
+            <a:ext cx="1611659" cy="333375"/>
           </a:xfrm>
           <a:prstGeom xmlns:a="http://schemas.openxmlformats.org/drawingml/2006/main" prst="rect">
             <a:avLst/>
@@ -19705,7 +19426,7 @@
           </a:ln>
         </p:spPr>
         <p:txBody>
-          <a:bodyPr xmlns:a="http://schemas.openxmlformats.org/drawingml/2006/main" wrap="square" lIns="0" tIns="0" rIns="0" bIns="0" anchor="ctr">
+          <a:bodyPr xmlns:a="http://schemas.openxmlformats.org/drawingml/2006/main" wrap="none" lIns="0" tIns="0" rIns="0" bIns="0" anchor="ctr">
             <a:noAutofit/>
           </a:bodyPr>
           <a:lstStyle xmlns:a="http://schemas.openxmlformats.org/drawingml/2006/main"/>
@@ -19715,7 +19436,7 @@
                 <a:spcPct val="125000"/>
               </a:lnSpc>
               <a:buNone/>
-              <a:defRPr sz="1900" b="1" i="0">
+              <a:defRPr sz="2100" b="1" i="0">
                 <a:solidFill>
                   <a:srgbClr val="254B7C"/>
                 </a:solidFill>
@@ -19725,7 +19446,7 @@
               </a:defRPr>
             </a:pPr>
             <a:r>
-              <a:rPr sz="1900" b="1" i="0">
+              <a:rPr sz="2100" b="1" i="0">
                 <a:solidFill>
                   <a:srgbClr val="254B7C"/>
                 </a:solidFill>
@@ -19743,7 +19464,7 @@
           <p:cNvPr id="23" name="spectrum-body-1">
             <a:extLst xmlns:a="http://schemas.openxmlformats.org/drawingml/2006/main">
               <a:ext uri="{FF2B5EF4-FFF2-40B4-BE49-F238E27FC236}">
-                <a16:creationId xmlns:a16="http://schemas.microsoft.com/office/drawing/2014/main" id="{E46C042B-8DB8-4AAA-9BF6-BCEAD2CF790F}"/>
+                <a16:creationId xmlns:a16="http://schemas.microsoft.com/office/drawing/2014/main" id="{07CFCD43-9F98-452C-A39B-7F24038FE809}"/>
               </a:ext>
             </a:extLst>
           </p:cNvPr>
@@ -19754,7 +19475,7 @@
         </p:nvSpPr>
         <p:spPr>
           <a:xfrm xmlns:a="http://schemas.openxmlformats.org/drawingml/2006/main" rot="0">
-            <a:off x="3145041" y="3834260"/>
+            <a:off x="3145041" y="3840661"/>
             <a:ext cx="1611659" cy="776888"/>
           </a:xfrm>
           <a:prstGeom xmlns:a="http://schemas.openxmlformats.org/drawingml/2006/main" prst="rect">
@@ -19859,7 +19580,7 @@
           <p:cNvPr id="24" name="spectrum-order-2">
             <a:extLst xmlns:a="http://schemas.openxmlformats.org/drawingml/2006/main">
               <a:ext uri="{FF2B5EF4-FFF2-40B4-BE49-F238E27FC236}">
-                <a16:creationId xmlns:a16="http://schemas.microsoft.com/office/drawing/2014/main" id="{2D18D34C-CE77-4419-BDB6-EBC85C204726}"/>
+                <a16:creationId xmlns:a16="http://schemas.microsoft.com/office/drawing/2014/main" id="{AF79CB56-BBBD-456E-A5CA-15221DAE2556}"/>
               </a:ext>
             </a:extLst>
           </p:cNvPr>
@@ -19921,7 +19642,7 @@
           <p:cNvPr id="25" name="spectrum-title-2">
             <a:extLst xmlns:a="http://schemas.openxmlformats.org/drawingml/2006/main">
               <a:ext uri="{FF2B5EF4-FFF2-40B4-BE49-F238E27FC236}">
-                <a16:creationId xmlns:a16="http://schemas.microsoft.com/office/drawing/2014/main" id="{6E43A8E1-0335-44B8-8F65-AB0112ED1652}"/>
+                <a16:creationId xmlns:a16="http://schemas.microsoft.com/office/drawing/2014/main" id="{F66E2ABB-061A-4E8B-8B92-35CE2CD2DF2E}"/>
               </a:ext>
             </a:extLst>
           </p:cNvPr>
@@ -19932,7 +19653,7 @@
         </p:nvSpPr>
         <p:spPr>
           <a:xfrm xmlns:a="http://schemas.openxmlformats.org/drawingml/2006/main" rot="0">
-            <a:off x="5290099" y="3207544"/>
+            <a:off x="5290099" y="3269161"/>
             <a:ext cx="1611659" cy="333375"/>
           </a:xfrm>
           <a:prstGeom xmlns:a="http://schemas.openxmlformats.org/drawingml/2006/main" prst="rect">
@@ -19945,7 +19666,7 @@
           </a:ln>
         </p:spPr>
         <p:txBody>
-          <a:bodyPr xmlns:a="http://schemas.openxmlformats.org/drawingml/2006/main" wrap="square" lIns="0" tIns="0" rIns="0" bIns="0" anchor="ctr">
+          <a:bodyPr xmlns:a="http://schemas.openxmlformats.org/drawingml/2006/main" wrap="none" lIns="0" tIns="0" rIns="0" bIns="0" anchor="ctr">
             <a:noAutofit/>
           </a:bodyPr>
           <a:lstStyle xmlns:a="http://schemas.openxmlformats.org/drawingml/2006/main"/>
@@ -19983,7 +19704,7 @@
           <p:cNvPr id="26" name="spectrum-body-2">
             <a:extLst xmlns:a="http://schemas.openxmlformats.org/drawingml/2006/main">
               <a:ext uri="{FF2B5EF4-FFF2-40B4-BE49-F238E27FC236}">
-                <a16:creationId xmlns:a16="http://schemas.microsoft.com/office/drawing/2014/main" id="{CEBE6245-A0C6-4606-BE1F-3FC3118D4B7F}"/>
+                <a16:creationId xmlns:a16="http://schemas.microsoft.com/office/drawing/2014/main" id="{08E66B3B-7252-4129-9822-07E1C5FCDFDE}"/>
               </a:ext>
             </a:extLst>
           </p:cNvPr>
@@ -19994,8 +19715,8 @@
         </p:nvSpPr>
         <p:spPr>
           <a:xfrm xmlns:a="http://schemas.openxmlformats.org/drawingml/2006/main" rot="0">
-            <a:off x="5290099" y="3655219"/>
-            <a:ext cx="1611659" cy="880910"/>
+            <a:off x="5290099" y="3697786"/>
+            <a:ext cx="1611659" cy="776888"/>
           </a:xfrm>
           <a:prstGeom xmlns:a="http://schemas.openxmlformats.org/drawingml/2006/main" prst="rect">
             <a:avLst/>
@@ -20017,7 +19738,7 @@
                 <a:spcPct val="136000"/>
               </a:lnSpc>
               <a:buNone/>
-              <a:defRPr sz="1700" b="0" i="0">
+              <a:defRPr sz="1500" b="0" i="0">
                 <a:solidFill>
                   <a:srgbClr val="FFFFFF"/>
                 </a:solidFill>
@@ -20027,7 +19748,7 @@
               </a:defRPr>
             </a:pPr>
             <a:r>
-              <a:rPr sz="1700" b="0" i="0">
+              <a:rPr sz="1500" b="0" i="0">
                 <a:solidFill>
                   <a:srgbClr val="FFFFFF"/>
                 </a:solidFill>
@@ -20035,7 +19756,7 @@
                 <a:ea typeface="Microsoft YaHei"/>
                 <a:cs typeface="Microsoft YaHei"/>
               </a:rPr>
-              <a:t>发布会、路演和</a:t>
+              <a:t>发布会、路演和比</a:t>
             </a:r>
           </a:p>
           <a:p xmlns:a="http://schemas.openxmlformats.org/drawingml/2006/main">
@@ -20044,7 +19765,7 @@
                 <a:spcPct val="136000"/>
               </a:lnSpc>
               <a:buNone/>
-              <a:defRPr sz="1700" b="0" i="0">
+              <a:defRPr sz="1500" b="0" i="0">
                 <a:solidFill>
                   <a:srgbClr val="FFFFFF"/>
                 </a:solidFill>
@@ -20054,7 +19775,7 @@
               </a:defRPr>
             </a:pPr>
             <a:r>
-              <a:rPr sz="1700" b="0" i="0">
+              <a:rPr sz="1500" b="0" i="0">
                 <a:solidFill>
                   <a:srgbClr val="FFFFFF"/>
                 </a:solidFill>
@@ -20062,7 +19783,7 @@
                 <a:ea typeface="Microsoft YaHei"/>
                 <a:cs typeface="Microsoft YaHei"/>
               </a:rPr>
-              <a:t>比赛需要高度视</a:t>
+              <a:t>赛需要高度视觉创</a:t>
             </a:r>
           </a:p>
           <a:p xmlns:a="http://schemas.openxmlformats.org/drawingml/2006/main">
@@ -20071,7 +19792,7 @@
                 <a:spcPct val="136000"/>
               </a:lnSpc>
               <a:buNone/>
-              <a:defRPr sz="1700" b="0" i="0">
+              <a:defRPr sz="1500" b="0" i="0">
                 <a:solidFill>
                   <a:srgbClr val="FFFFFF"/>
                 </a:solidFill>
@@ -20081,7 +19802,7 @@
               </a:defRPr>
             </a:pPr>
             <a:r>
-              <a:rPr sz="1700" b="0" i="0">
+              <a:rPr sz="1500" b="0" i="0">
                 <a:solidFill>
                   <a:srgbClr val="FFFFFF"/>
                 </a:solidFill>
@@ -20089,7 +19810,7 @@
                 <a:ea typeface="Microsoft YaHei"/>
                 <a:cs typeface="Microsoft YaHei"/>
               </a:rPr>
-              <a:t>觉创意</a:t>
+              <a:t>意</a:t>
             </a:r>
           </a:p>
         </p:txBody>
@@ -20099,7 +19820,7 @@
           <p:cNvPr id="27" name="spectrum-order-3">
             <a:extLst xmlns:a="http://schemas.openxmlformats.org/drawingml/2006/main">
               <a:ext uri="{FF2B5EF4-FFF2-40B4-BE49-F238E27FC236}">
-                <a16:creationId xmlns:a16="http://schemas.microsoft.com/office/drawing/2014/main" id="{F9D171EA-B5DD-4335-A3C0-90935CB7957C}"/>
+                <a16:creationId xmlns:a16="http://schemas.microsoft.com/office/drawing/2014/main" id="{61706774-9C79-4FEC-B302-7CC76A6ADB63}"/>
               </a:ext>
             </a:extLst>
           </p:cNvPr>
@@ -20161,7 +19882,7 @@
           <p:cNvPr id="28" name="spectrum-title-3">
             <a:extLst xmlns:a="http://schemas.openxmlformats.org/drawingml/2006/main">
               <a:ext uri="{FF2B5EF4-FFF2-40B4-BE49-F238E27FC236}">
-                <a16:creationId xmlns:a16="http://schemas.microsoft.com/office/drawing/2014/main" id="{FB1ED90A-0D7D-40E1-8596-FD43A2177FCE}"/>
+                <a16:creationId xmlns:a16="http://schemas.microsoft.com/office/drawing/2014/main" id="{5900674C-6A02-4610-AABE-ADDDADD3CA19}"/>
               </a:ext>
             </a:extLst>
           </p:cNvPr>
@@ -20172,7 +19893,7 @@
         </p:nvSpPr>
         <p:spPr>
           <a:xfrm xmlns:a="http://schemas.openxmlformats.org/drawingml/2006/main" rot="0">
-            <a:off x="7435158" y="3497313"/>
+            <a:off x="7435158" y="3541519"/>
             <a:ext cx="1611659" cy="333375"/>
           </a:xfrm>
           <a:prstGeom xmlns:a="http://schemas.openxmlformats.org/drawingml/2006/main" prst="rect">
@@ -20185,7 +19906,7 @@
           </a:ln>
         </p:spPr>
         <p:txBody>
-          <a:bodyPr xmlns:a="http://schemas.openxmlformats.org/drawingml/2006/main" wrap="square" lIns="0" tIns="0" rIns="0" bIns="0" anchor="ctr">
+          <a:bodyPr xmlns:a="http://schemas.openxmlformats.org/drawingml/2006/main" wrap="none" lIns="0" tIns="0" rIns="0" bIns="0" anchor="ctr">
             <a:noAutofit/>
           </a:bodyPr>
           <a:lstStyle xmlns:a="http://schemas.openxmlformats.org/drawingml/2006/main"/>
@@ -20223,7 +19944,7 @@
           <p:cNvPr id="29" name="spectrum-body-3">
             <a:extLst xmlns:a="http://schemas.openxmlformats.org/drawingml/2006/main">
               <a:ext uri="{FF2B5EF4-FFF2-40B4-BE49-F238E27FC236}">
-                <a16:creationId xmlns:a16="http://schemas.microsoft.com/office/drawing/2014/main" id="{E394291B-8D72-4A31-95F3-DEAF627D7FB4}"/>
+                <a16:creationId xmlns:a16="http://schemas.microsoft.com/office/drawing/2014/main" id="{5E47D2A2-0F04-4BA9-987F-B9D99AED1B73}"/>
               </a:ext>
             </a:extLst>
           </p:cNvPr>
@@ -20234,8 +19955,8 @@
         </p:nvSpPr>
         <p:spPr>
           <a:xfrm xmlns:a="http://schemas.openxmlformats.org/drawingml/2006/main" rot="0">
-            <a:off x="7435158" y="3944988"/>
-            <a:ext cx="1611659" cy="587273"/>
+            <a:off x="7435158" y="3970144"/>
+            <a:ext cx="1611659" cy="517922"/>
           </a:xfrm>
           <a:prstGeom xmlns:a="http://schemas.openxmlformats.org/drawingml/2006/main" prst="rect">
             <a:avLst/>
@@ -20257,7 +19978,7 @@
                 <a:spcPct val="136000"/>
               </a:lnSpc>
               <a:buNone/>
-              <a:defRPr sz="1700" b="0" i="0">
+              <a:defRPr sz="1500" b="0" i="0">
                 <a:solidFill>
                   <a:srgbClr val="526174"/>
                 </a:solidFill>
@@ -20267,7 +19988,7 @@
               </a:defRPr>
             </a:pPr>
             <a:r>
-              <a:rPr sz="1700" b="0" i="0">
+              <a:rPr sz="1500" b="0" i="0">
                 <a:solidFill>
                   <a:srgbClr val="526174"/>
                 </a:solidFill>
@@ -20275,7 +19996,7 @@
                 <a:ea typeface="Microsoft YaHei"/>
                 <a:cs typeface="Microsoft YaHei"/>
               </a:rPr>
-              <a:t>需要专门设计与</a:t>
+              <a:t>需要专门设计与品</a:t>
             </a:r>
           </a:p>
           <a:p xmlns:a="http://schemas.openxmlformats.org/drawingml/2006/main">
@@ -20284,7 +20005,7 @@
                 <a:spcPct val="136000"/>
               </a:lnSpc>
               <a:buNone/>
-              <a:defRPr sz="1700" b="0" i="0">
+              <a:defRPr sz="1500" b="0" i="0">
                 <a:solidFill>
                   <a:srgbClr val="526174"/>
                 </a:solidFill>
@@ -20294,7 +20015,7 @@
               </a:defRPr>
             </a:pPr>
             <a:r>
-              <a:rPr sz="1700" b="0" i="0">
+              <a:rPr sz="1500" b="0" i="0">
                 <a:solidFill>
                   <a:srgbClr val="526174"/>
                 </a:solidFill>
@@ -20302,7 +20023,7 @@
                 <a:ea typeface="Microsoft YaHei"/>
                 <a:cs typeface="Microsoft YaHei"/>
               </a:rPr>
-              <a:t>品牌化表达</a:t>
+              <a:t>牌化表达</a:t>
             </a:r>
           </a:p>
         </p:txBody>
@@ -20312,7 +20033,7 @@
           <p:cNvPr id="30" name="spectrum-order-4">
             <a:extLst xmlns:a="http://schemas.openxmlformats.org/drawingml/2006/main">
               <a:ext uri="{FF2B5EF4-FFF2-40B4-BE49-F238E27FC236}">
-                <a16:creationId xmlns:a16="http://schemas.microsoft.com/office/drawing/2014/main" id="{48BD8D5E-BD2A-4E53-AE81-A68964B23AEA}"/>
+                <a16:creationId xmlns:a16="http://schemas.microsoft.com/office/drawing/2014/main" id="{A9AC0CCC-129A-455E-BCB5-A281B64C0A1F}"/>
               </a:ext>
             </a:extLst>
           </p:cNvPr>
@@ -20374,7 +20095,7 @@
           <p:cNvPr id="31" name="spectrum-title-4">
             <a:extLst xmlns:a="http://schemas.openxmlformats.org/drawingml/2006/main">
               <a:ext uri="{FF2B5EF4-FFF2-40B4-BE49-F238E27FC236}">
-                <a16:creationId xmlns:a16="http://schemas.microsoft.com/office/drawing/2014/main" id="{17C1469E-5DF6-4D9E-B852-FEAF26AACA06}"/>
+                <a16:creationId xmlns:a16="http://schemas.microsoft.com/office/drawing/2014/main" id="{0936416E-748B-478D-BB94-3B06B12206A5}"/>
               </a:ext>
             </a:extLst>
           </p:cNvPr>
@@ -20385,7 +20106,7 @@
         </p:nvSpPr>
         <p:spPr>
           <a:xfrm xmlns:a="http://schemas.openxmlformats.org/drawingml/2006/main" rot="0">
-            <a:off x="9580216" y="3497313"/>
+            <a:off x="9580216" y="3541519"/>
             <a:ext cx="1611516" cy="333375"/>
           </a:xfrm>
           <a:prstGeom xmlns:a="http://schemas.openxmlformats.org/drawingml/2006/main" prst="rect">
@@ -20398,7 +20119,7 @@
           </a:ln>
         </p:spPr>
         <p:txBody>
-          <a:bodyPr xmlns:a="http://schemas.openxmlformats.org/drawingml/2006/main" wrap="square" lIns="0" tIns="0" rIns="0" bIns="0" anchor="ctr">
+          <a:bodyPr xmlns:a="http://schemas.openxmlformats.org/drawingml/2006/main" wrap="none" lIns="0" tIns="0" rIns="0" bIns="0" anchor="ctr">
             <a:noAutofit/>
           </a:bodyPr>
           <a:lstStyle xmlns:a="http://schemas.openxmlformats.org/drawingml/2006/main"/>
@@ -20436,7 +20157,7 @@
           <p:cNvPr id="32" name="spectrum-body-4">
             <a:extLst xmlns:a="http://schemas.openxmlformats.org/drawingml/2006/main">
               <a:ext uri="{FF2B5EF4-FFF2-40B4-BE49-F238E27FC236}">
-                <a16:creationId xmlns:a16="http://schemas.microsoft.com/office/drawing/2014/main" id="{104D4DF7-52B5-468B-B1A8-987AF7CB7B70}"/>
+                <a16:creationId xmlns:a16="http://schemas.microsoft.com/office/drawing/2014/main" id="{6BE91EE0-21FA-4CD3-ABDB-A13CC6027FE7}"/>
               </a:ext>
             </a:extLst>
           </p:cNvPr>
@@ -20447,8 +20168,8 @@
         </p:nvSpPr>
         <p:spPr>
           <a:xfrm xmlns:a="http://schemas.openxmlformats.org/drawingml/2006/main" rot="0">
-            <a:off x="9580216" y="3944988"/>
-            <a:ext cx="1611516" cy="587273"/>
+            <a:off x="9580216" y="3970144"/>
+            <a:ext cx="1611516" cy="517922"/>
           </a:xfrm>
           <a:prstGeom xmlns:a="http://schemas.openxmlformats.org/drawingml/2006/main" prst="rect">
             <a:avLst/>
@@ -20470,7 +20191,7 @@
                 <a:spcPct val="136000"/>
               </a:lnSpc>
               <a:buNone/>
-              <a:defRPr sz="1700" b="0" i="0">
+              <a:defRPr sz="1500" b="0" i="0">
                 <a:solidFill>
                   <a:srgbClr val="526174"/>
                 </a:solidFill>
@@ -20480,7 +20201,7 @@
               </a:defRPr>
             </a:pPr>
             <a:r>
-              <a:rPr sz="1700" b="0" i="0">
+              <a:rPr sz="1500" b="0" i="0">
                 <a:solidFill>
                   <a:srgbClr val="526174"/>
                 </a:solidFill>
@@ -20488,7 +20209,7 @@
                 <a:ea typeface="Microsoft YaHei"/>
                 <a:cs typeface="Microsoft YaHei"/>
               </a:rPr>
-              <a:t>以独特视觉体验</a:t>
+              <a:t>以独特视觉体验为</a:t>
             </a:r>
           </a:p>
           <a:p xmlns:a="http://schemas.openxmlformats.org/drawingml/2006/main">
@@ -20497,7 +20218,7 @@
                 <a:spcPct val="136000"/>
               </a:lnSpc>
               <a:buNone/>
-              <a:defRPr sz="1700" b="0" i="0">
+              <a:defRPr sz="1500" b="0" i="0">
                 <a:solidFill>
                   <a:srgbClr val="526174"/>
                 </a:solidFill>
@@ -20507,7 +20228,7 @@
               </a:defRPr>
             </a:pPr>
             <a:r>
-              <a:rPr sz="1700" b="0" i="0">
+              <a:rPr sz="1500" b="0" i="0">
                 <a:solidFill>
                   <a:srgbClr val="526174"/>
                 </a:solidFill>
@@ -20515,7 +20236,7 @@
                 <a:ea typeface="Microsoft YaHei"/>
                 <a:cs typeface="Microsoft YaHei"/>
               </a:rPr>
-              <a:t>为首要目标</a:t>
+              <a:t>首要目标</a:t>
             </a:r>
           </a:p>
         </p:txBody>
@@ -20525,7 +20246,7 @@
           <p:cNvPr id="33" name="spectrum-focus-label-bg">
             <a:extLst xmlns:a="http://schemas.openxmlformats.org/drawingml/2006/main">
               <a:ext uri="{FF2B5EF4-FFF2-40B4-BE49-F238E27FC236}">
-                <a16:creationId xmlns:a16="http://schemas.microsoft.com/office/drawing/2014/main" id="{8F61A031-7DA3-4501-A0A0-7007D453F0F6}"/>
+                <a16:creationId xmlns:a16="http://schemas.microsoft.com/office/drawing/2014/main" id="{596B9A97-0C8B-40D1-A0A6-4524C000AFC6}"/>
               </a:ext>
             </a:extLst>
           </p:cNvPr>
@@ -20558,7 +20279,7 @@
           <p:cNvPr id="34" name="spectrum-focus-label">
             <a:extLst xmlns:a="http://schemas.openxmlformats.org/drawingml/2006/main">
               <a:ext uri="{FF2B5EF4-FFF2-40B4-BE49-F238E27FC236}">
-                <a16:creationId xmlns:a16="http://schemas.microsoft.com/office/drawing/2014/main" id="{6B2690E9-13DE-479B-BF1A-32BCF98FD4DD}"/>
+                <a16:creationId xmlns:a16="http://schemas.microsoft.com/office/drawing/2014/main" id="{6D603BE3-F2F3-4D1F-9426-B0FC0AB59C93}"/>
               </a:ext>
             </a:extLst>
           </p:cNvPr>
@@ -20618,7 +20339,7 @@
     </p:spTree>
     <p:extLst>
       <p:ext uri="{BB962C8B-B14F-4D97-AF65-F5344CB8AC3E}">
-        <p14:creationId xmlns:p14="http://schemas.microsoft.com/office/powerpoint/2010/main" val="401590290"/>
+        <p14:creationId xmlns:p14="http://schemas.microsoft.com/office/powerpoint/2010/main" val="284125834"/>
       </p:ext>
     </p:extLst>
   </p:cSld>
@@ -20828,132 +20549,6 @@
         </a:effectStyle>
         <a:effectStyle>
           <a:effectLst>
-            <a:outerShdw blurRad="266700" dist="114300" dir="5400000">
-              <a:srgbClr val="2F5EA8">
-                <a:alpha val="22000"/>
-              </a:srgbClr>
-            </a:outerShdw>
-          </a:effectLst>
-        </a:effectStyle>
-        <a:effectStyle>
-          <a:effectLst>
-            <a:outerShdw blurRad="152400" dist="66675" dir="5400000">
-              <a:srgbClr val="2F5EA8">
-                <a:alpha val="9000"/>
-              </a:srgbClr>
-            </a:outerShdw>
-          </a:effectLst>
-        </a:effectStyle>
-        <a:effectStyle>
-          <a:effectLst>
-            <a:outerShdw blurRad="152400" dist="66675" dir="5400000">
-              <a:srgbClr val="2F5EA8">
-                <a:alpha val="10000"/>
-              </a:srgbClr>
-            </a:outerShdw>
-          </a:effectLst>
-        </a:effectStyle>
-        <a:effectStyle>
-          <a:effectLst>
-            <a:outerShdw blurRad="171450" dist="76200" dir="5400000">
-              <a:srgbClr val="2F5EA8">
-                <a:alpha val="16000"/>
-              </a:srgbClr>
-            </a:outerShdw>
-          </a:effectLst>
-        </a:effectStyle>
-        <a:effectStyle>
-          <a:effectLst>
-            <a:outerShdw blurRad="114300" dist="47625" dir="5400000">
-              <a:srgbClr val="2F5EA8">
-                <a:alpha val="7000"/>
-              </a:srgbClr>
-            </a:outerShdw>
-          </a:effectLst>
-        </a:effectStyle>
-        <a:effectStyle>
-          <a:effectLst>
-            <a:outerShdw blurRad="95250" dist="38100" dir="5400000">
-              <a:srgbClr val="2F5EA8">
-                <a:alpha val="8000"/>
-              </a:srgbClr>
-            </a:outerShdw>
-          </a:effectLst>
-        </a:effectStyle>
-        <a:effectStyle>
-          <a:effectLst>
-            <a:outerShdw blurRad="209550" dist="95250" dir="5400000">
-              <a:srgbClr val="2F5EA8">
-                <a:alpha val="8000"/>
-              </a:srgbClr>
-            </a:outerShdw>
-          </a:effectLst>
-        </a:effectStyle>
-        <a:effectStyle>
-          <a:effectLst>
-            <a:outerShdw blurRad="133350" dist="57150" dir="5400000">
-              <a:srgbClr val="2F5EA8">
-                <a:alpha val="18000"/>
-              </a:srgbClr>
-            </a:outerShdw>
-          </a:effectLst>
-        </a:effectStyle>
-        <a:effectStyle>
-          <a:effectLst>
-            <a:outerShdw blurRad="200025" dist="85725" dir="5400000">
-              <a:srgbClr val="2F5EA8">
-                <a:alpha val="14000"/>
-              </a:srgbClr>
-            </a:outerShdw>
-          </a:effectLst>
-        </a:effectStyle>
-        <a:effectStyle>
-          <a:effectLst>
-            <a:outerShdw blurRad="171450" dist="76200" dir="5400000">
-              <a:srgbClr val="264E80">
-                <a:alpha val="10000"/>
-              </a:srgbClr>
-            </a:outerShdw>
-          </a:effectLst>
-        </a:effectStyle>
-        <a:effectStyle>
-          <a:effectLst>
-            <a:outerShdw blurRad="171450" dist="76200" dir="5400000">
-              <a:srgbClr val="1F497E">
-                <a:alpha val="8000"/>
-              </a:srgbClr>
-            </a:outerShdw>
-          </a:effectLst>
-        </a:effectStyle>
-        <a:effectStyle>
-          <a:effectLst>
-            <a:outerShdw blurRad="95250" dist="38100" dir="5400000">
-              <a:srgbClr val="2F5EA8">
-                <a:alpha val="16000"/>
-              </a:srgbClr>
-            </a:outerShdw>
-          </a:effectLst>
-        </a:effectStyle>
-        <a:effectStyle>
-          <a:effectLst>
-            <a:outerShdw blurRad="114300" dist="57150" dir="5400000">
-              <a:srgbClr val="2F5EA8">
-                <a:alpha val="15000"/>
-              </a:srgbClr>
-            </a:outerShdw>
-          </a:effectLst>
-        </a:effectStyle>
-        <a:effectStyle>
-          <a:effectLst>
-            <a:outerShdw blurRad="114300" dist="47625" dir="5400000">
-              <a:srgbClr val="2F5EA8">
-                <a:alpha val="20000"/>
-              </a:srgbClr>
-            </a:outerShdw>
-          </a:effectLst>
-        </a:effectStyle>
-        <a:effectStyle>
-          <a:effectLst>
             <a:outerShdw blurRad="190500" dist="85725" dir="5400000">
               <a:srgbClr val="2F5EA8">
                 <a:alpha val="9000"/>
